--- a/docs/exhibition/패널_A_논문구조.pptx
+++ b/docs/exhibition/패널_A_논문구조.pptx
@@ -107,7 +107,7 @@
   <p:extLst>
     <p:ext uri="{521415D9-36F7-43E2-AB2F-B90AF26B5E84}">
       <p14:sectionLst xmlns:p14="http://schemas.microsoft.com/office/powerpoint/2010/main">
-        <p14:section name="패널" id="{29bd6298-fc71-4974-f3c5-cd22d99ffbe0}">
+        <p14:section name="패널" id="{41035ff9-6b9b-1f78-9c35-54327370c614}">
           <p14:sldIdLst>
             <p14:sldId id="256"/>
           </p14:sldIdLst>
@@ -1670,11 +1670,11 @@
         <p:spPr>
           <a:xfrm>
             <a:off x="548640" y="2926080"/>
-            <a:ext cx="6828282" cy="4389120"/>
+            <a:ext cx="6828282" cy="4343400"/>
           </a:xfrm>
           <a:prstGeom prst="roundRect">
             <a:avLst>
-              <a:gd name="adj" fmla="val 3750"/>
+              <a:gd name="adj" fmla="val 3789"/>
             </a:avLst>
           </a:prstGeom>
           <a:solidFill>
@@ -1794,7 +1794,7 @@
         <p:spPr>
           <a:xfrm>
             <a:off x="914400" y="4069080"/>
-            <a:ext cx="6096762" cy="2971800"/>
+            <a:ext cx="6096762" cy="2926080"/>
           </a:xfrm>
           <a:prstGeom prst="rect">
             <a:avLst/>
@@ -1955,12 +1955,12 @@
         </p:nvSpPr>
         <p:spPr>
           <a:xfrm>
-            <a:off x="7742682" y="2926080"/>
-            <a:ext cx="6828282" cy="4389120"/>
+            <a:off x="548640" y="7543800"/>
+            <a:ext cx="6828282" cy="4526280"/>
           </a:xfrm>
           <a:prstGeom prst="roundRect">
             <a:avLst>
-              <a:gd name="adj" fmla="val 3750"/>
+              <a:gd name="adj" fmla="val 3636"/>
             </a:avLst>
           </a:prstGeom>
           <a:solidFill>
@@ -1982,7 +1982,7 @@
         </p:nvSpPr>
         <p:spPr>
           <a:xfrm>
-            <a:off x="8062722" y="3200400"/>
+            <a:off x="868680" y="7818120"/>
             <a:ext cx="621792" cy="621792"/>
           </a:xfrm>
           <a:prstGeom prst="ellipse">
@@ -2007,7 +2007,7 @@
         </p:nvSpPr>
         <p:spPr>
           <a:xfrm>
-            <a:off x="8062722" y="3200400"/>
+            <a:off x="868680" y="7818120"/>
             <a:ext cx="621792" cy="621792"/>
           </a:xfrm>
           <a:prstGeom prst="rect">
@@ -2043,7 +2043,7 @@
         </p:nvSpPr>
         <p:spPr>
           <a:xfrm>
-            <a:off x="8839962" y="3200400"/>
+            <a:off x="1645920" y="7818120"/>
             <a:ext cx="5456682" cy="621792"/>
           </a:xfrm>
           <a:prstGeom prst="rect">
@@ -2079,8 +2079,8 @@
         </p:nvSpPr>
         <p:spPr>
           <a:xfrm>
-            <a:off x="8108442" y="4069080"/>
-            <a:ext cx="6096762" cy="2971800"/>
+            <a:off x="914400" y="8686800"/>
+            <a:ext cx="6096762" cy="3108960"/>
           </a:xfrm>
           <a:prstGeom prst="rect">
             <a:avLst/>
@@ -2100,31 +2100,31 @@
               <a:buChar char="•"/>
             </a:pPr>
             <a:r>
-              <a:rPr lang="en-US" sz="1900" b="1" dirty="0">
+              <a:rPr lang="en-US" sz="1800" b="1" dirty="0">
                 <a:solidFill>
                   <a:schemeClr val="accent1"/>
                 </a:solidFill>
               </a:rPr>
-              <a:t>① 주 신호  </a:t>
+              <a:t>① LLM 기반 주 신호  </a:t>
             </a:r>
             <a:pPr indent="0" marL="0">
               <a:lnSpc>
                 <a:spcPct val="105000"/>
               </a:lnSpc>
               <a:spcAft>
-                <a:spcPts val="900"/>
+                <a:spcPts val="700"/>
               </a:spcAft>
               <a:buNone/>
             </a:pPr>
             <a:r>
-              <a:rPr lang="en-US" sz="1900" dirty="0">
+              <a:rPr lang="en-US" sz="1800" dirty="0">
                 <a:solidFill>
                   <a:schemeClr val="tx1"/>
                 </a:solidFill>
               </a:rPr>
-              <a:t>GPT-4o-mini 요약·감성 + 임베딩(1536차원) → 512차원</a:t>
-            </a:r>
-            <a:endParaRPr lang="en-US" sz="1900" dirty="0"/>
+              <a:t>GPT-4o-mini 요약·감성 점수 + 요약문 임베딩(1536차원) → 완전연결층 → 512차원</a:t>
+            </a:r>
+            <a:endParaRPr lang="en-US" sz="1800" dirty="0"/>
           </a:p>
           <a:p>
             <a:pPr marL="228600" indent="-228600">
@@ -2135,31 +2135,31 @@
               <a:buChar char="•"/>
             </a:pPr>
             <a:r>
-              <a:rPr lang="en-US" sz="1900" b="1" dirty="0">
+              <a:rPr lang="en-US" sz="1800" b="1" dirty="0">
                 <a:solidFill>
                   <a:schemeClr val="accent1"/>
                 </a:solidFill>
               </a:rPr>
-              <a:t>② 보조 신호  </a:t>
+              <a:t>② TCN 기반 보조 벡터  </a:t>
             </a:r>
             <a:pPr indent="0" marL="0">
               <a:lnSpc>
                 <a:spcPct val="105000"/>
               </a:lnSpc>
               <a:spcAft>
-                <a:spcPts val="900"/>
+                <a:spcPts val="700"/>
               </a:spcAft>
               <a:buNone/>
             </a:pPr>
             <a:r>
-              <a:rPr lang="en-US" sz="1900" dirty="0">
+              <a:rPr lang="en-US" sz="1800" dirty="0">
                 <a:solidFill>
                   <a:schemeClr val="tx1"/>
                 </a:solidFill>
               </a:rPr>
-              <a:t>지표 9종 × 30일 → 인과적 TCN(미래 차단) → 30 × 512</a:t>
-            </a:r>
-            <a:endParaRPr lang="en-US" sz="1900" dirty="0"/>
+              <a:t>기술적 지표 9종 × 30일 → 인과적 TCN → 시점별 512차원</a:t>
+            </a:r>
+            <a:endParaRPr lang="en-US" sz="1800" dirty="0"/>
           </a:p>
           <a:p>
             <a:pPr marL="228600" indent="-228600">
@@ -2170,7 +2170,7 @@
               <a:buChar char="•"/>
             </a:pPr>
             <a:r>
-              <a:rPr lang="en-US" sz="1900" b="1" dirty="0">
+              <a:rPr lang="en-US" sz="1800" b="1" dirty="0">
                 <a:solidFill>
                   <a:schemeClr val="accent1"/>
                 </a:solidFill>
@@ -2182,19 +2182,19 @@
                 <a:spcPct val="105000"/>
               </a:lnSpc>
               <a:spcAft>
-                <a:spcPts val="900"/>
+                <a:spcPts val="700"/>
               </a:spcAft>
               <a:buNone/>
             </a:pPr>
             <a:r>
-              <a:rPr lang="en-US" sz="1900" dirty="0">
+              <a:rPr lang="en-US" sz="1800" dirty="0">
                 <a:solidFill>
                   <a:schemeClr val="tx1"/>
                 </a:solidFill>
               </a:rPr>
-              <a:t>뉴스(Q)가 30일 지표(K·V) 중 관련 시점을 가중 평균</a:t>
-            </a:r>
-            <a:endParaRPr lang="en-US" sz="1900" dirty="0"/>
+              <a:t>주 신호(Q)로 30개 보조 벡터(K·V)를 softmax 가중 평균</a:t>
+            </a:r>
+            <a:endParaRPr lang="en-US" sz="1800" dirty="0"/>
           </a:p>
           <a:p>
             <a:pPr marL="228600" indent="-228600">
@@ -2205,31 +2205,66 @@
               <a:buChar char="•"/>
             </a:pPr>
             <a:r>
-              <a:rPr lang="en-US" sz="1900" b="1" dirty="0">
+              <a:rPr lang="en-US" sz="1800" b="1" dirty="0">
                 <a:solidFill>
                   <a:schemeClr val="accent1"/>
                 </a:solidFill>
               </a:rPr>
-              <a:t>④ 게이트 잔차 결합  </a:t>
+              <a:t>④ 게이트 기반 잔차 결합  </a:t>
             </a:r>
             <a:pPr indent="0" marL="0">
               <a:lnSpc>
                 <a:spcPct val="105000"/>
               </a:lnSpc>
               <a:spcAft>
-                <a:spcPts val="900"/>
+                <a:spcPts val="700"/>
               </a:spcAft>
               <a:buNone/>
             </a:pPr>
             <a:r>
-              <a:rPr lang="en-US" sz="1900" dirty="0">
+              <a:rPr lang="en-US" sz="1800" dirty="0">
                 <a:solidFill>
                   <a:schemeClr val="tx1"/>
                 </a:solidFill>
               </a:rPr>
-              <a:t>h = p + σ(W[p; c]) ⊙ c → MLP로 등락률 예측</a:t>
-            </a:r>
-            <a:endParaRPr lang="en-US" sz="1900" dirty="0"/>
+              <a:t>h = p + σ(W[p; c]) ⊙ c, 보조 정보 반영 정도를 학습</a:t>
+            </a:r>
+            <a:endParaRPr lang="en-US" sz="1800" dirty="0"/>
+          </a:p>
+          <a:p>
+            <a:pPr marL="228600" indent="-228600">
+              <a:lnSpc>
+                <a:spcPct val="105000"/>
+              </a:lnSpc>
+              <a:buSzPct val="100000"/>
+              <a:buChar char="•"/>
+            </a:pPr>
+            <a:r>
+              <a:rPr lang="en-US" sz="1800" b="1" dirty="0">
+                <a:solidFill>
+                  <a:schemeClr val="accent1"/>
+                </a:solidFill>
+              </a:rPr>
+              <a:t>⑤ 등락률 예측  </a:t>
+            </a:r>
+            <a:pPr indent="0" marL="0">
+              <a:lnSpc>
+                <a:spcPct val="105000"/>
+              </a:lnSpc>
+              <a:spcAft>
+                <a:spcPts val="700"/>
+              </a:spcAft>
+              <a:buNone/>
+            </a:pPr>
+            <a:r>
+              <a:rPr lang="en-US" sz="1800" dirty="0">
+                <a:solidFill>
+                  <a:schemeClr val="tx1"/>
+                </a:solidFill>
+              </a:rPr>
+              <a:t>MLP 512 → 256 → 64 → 1</a:t>
+            </a:r>
+            <a:endParaRPr lang="en-US" sz="1800" dirty="0"/>
           </a:p>
         </p:txBody>
       </p:sp>
@@ -2241,12 +2276,12 @@
         </p:nvSpPr>
         <p:spPr>
           <a:xfrm>
-            <a:off x="548640" y="7589520"/>
-            <a:ext cx="14022324" cy="4160520"/>
+            <a:off x="7742682" y="2926080"/>
+            <a:ext cx="6828282" cy="9144000"/>
           </a:xfrm>
           <a:prstGeom prst="roundRect">
             <a:avLst>
-              <a:gd name="adj" fmla="val 3956"/>
+              <a:gd name="adj" fmla="val 2410"/>
             </a:avLst>
           </a:prstGeom>
           <a:solidFill>
@@ -2268,7 +2303,7 @@
         </p:nvSpPr>
         <p:spPr>
           <a:xfrm>
-            <a:off x="868680" y="7863840"/>
+            <a:off x="8062722" y="3200400"/>
             <a:ext cx="621792" cy="621792"/>
           </a:xfrm>
           <a:prstGeom prst="ellipse">
@@ -2293,7 +2328,7 @@
         </p:nvSpPr>
         <p:spPr>
           <a:xfrm>
-            <a:off x="868680" y="7863840"/>
+            <a:off x="8062722" y="3200400"/>
             <a:ext cx="621792" cy="621792"/>
           </a:xfrm>
           <a:prstGeom prst="rect">
@@ -2329,8 +2364,8 @@
         </p:nvSpPr>
         <p:spPr>
           <a:xfrm>
-            <a:off x="1645920" y="7863840"/>
-            <a:ext cx="12650724" cy="621792"/>
+            <a:off x="8839962" y="3200400"/>
+            <a:ext cx="5456682" cy="621792"/>
           </a:xfrm>
           <a:prstGeom prst="rect">
             <a:avLst/>
@@ -2351,7 +2386,7 @@
                   <a:schemeClr val="accent1"/>
                 </a:solidFill>
               </a:rPr>
-              <a:t>구조 (논문 제안 모델)</a:t>
+              <a:t>구조</a:t>
             </a:r>
             <a:endParaRPr lang="en-US" sz="3200" dirty="0"/>
           </a:p>
@@ -2359,41 +2394,68 @@
       </p:sp>
       <p:sp>
         <p:nvSpPr>
-          <p:cNvPr id="19" name="node-18"/>
+          <p:cNvPr id="19" name="group-18"/>
           <p:cNvSpPr/>
           <p:nvPr/>
         </p:nvSpPr>
         <p:spPr>
           <a:xfrm>
-            <a:off x="960120" y="8778240"/>
-            <a:ext cx="1600200" cy="960120"/>
+            <a:off x="8291345" y="4682309"/>
+            <a:ext cx="3353219" cy="2698206"/>
           </a:xfrm>
           <a:prstGeom prst="roundRect">
             <a:avLst>
-              <a:gd name="adj" fmla="val 9524"/>
+              <a:gd name="adj" fmla="val 2711"/>
             </a:avLst>
           </a:prstGeom>
           <a:solidFill>
-            <a:srgbClr val="DCE8F6"/>
+            <a:srgbClr val="EAF1FA"/>
           </a:solidFill>
-          <a:ln w="15875">
-            <a:solidFill>
-              <a:srgbClr val="DCE8F6"/>
-            </a:solidFill>
-            <a:prstDash val="solid"/>
-          </a:ln>
-        </p:spPr>
-      </p:sp>
-      <p:sp>
-        <p:nvSpPr>
-          <p:cNvPr id="20" name="text-19"/>
+          <a:ln w="19050">
+            <a:solidFill>
+              <a:srgbClr val="14233F"/>
+            </a:solidFill>
+            <a:prstDash val="solid"/>
+          </a:ln>
+        </p:spPr>
+      </p:sp>
+      <p:sp>
+        <p:nvSpPr>
+          <p:cNvPr id="20" name="group-19"/>
+          <p:cNvSpPr/>
+          <p:nvPr/>
+        </p:nvSpPr>
+        <p:spPr>
+          <a:xfrm>
+            <a:off x="12010370" y="5663474"/>
+            <a:ext cx="2011931" cy="1717040"/>
+          </a:xfrm>
+          <a:prstGeom prst="roundRect">
+            <a:avLst>
+              <a:gd name="adj" fmla="val 4260"/>
+            </a:avLst>
+          </a:prstGeom>
+          <a:solidFill>
+            <a:srgbClr val="E8F3EA"/>
+          </a:solidFill>
+          <a:ln w="19050">
+            <a:solidFill>
+              <a:srgbClr val="2E8B57"/>
+            </a:solidFill>
+            <a:prstDash val="solid"/>
+          </a:ln>
+        </p:spPr>
+      </p:sp>
+      <p:sp>
+        <p:nvSpPr>
+          <p:cNvPr id="21" name="text-20"/>
           <p:cNvSpPr txBox="1"/>
           <p:nvPr/>
         </p:nvSpPr>
         <p:spPr>
           <a:xfrm>
-            <a:off x="1033272" y="8778240"/>
-            <a:ext cx="1453896" cy="960120"/>
+            <a:off x="8291345" y="4723190"/>
+            <a:ext cx="3353219" cy="367937"/>
           </a:xfrm>
           <a:prstGeom prst="rect">
             <a:avLst/>
@@ -2406,66 +2468,19 @@
           <a:lstStyle/>
           <a:p>
             <a:pPr algn="ctr" indent="0" marL="0">
-              <a:lnSpc>
-                <a:spcPct val="95000"/>
-              </a:lnSpc>
-              <a:buNone/>
-            </a:pPr>
-            <a:r>
-              <a:rPr lang="en-US" sz="1700" dirty="0">
-                <a:solidFill>
-                  <a:schemeClr val="tx1"/>
-                </a:solidFill>
-              </a:rPr>
-              <a:t>뉴스 본문</a:t>
-            </a:r>
-            <a:endParaRPr lang="en-US" sz="1700" dirty="0"/>
-          </a:p>
-          <a:p>
-            <a:pPr algn="ctr" indent="0" marL="0">
-              <a:lnSpc>
-                <a:spcPct val="95000"/>
-              </a:lnSpc>
-              <a:buNone/>
-            </a:pPr>
-            <a:r>
-              <a:rPr lang="en-US" sz="1700" dirty="0">
-                <a:solidFill>
-                  <a:schemeClr val="tx1"/>
-                </a:solidFill>
-              </a:rPr>
-              <a:t>(발행 시각)</a:t>
-            </a:r>
-            <a:endParaRPr lang="en-US" sz="1700" dirty="0"/>
+              <a:buNone/>
+            </a:pPr>
+            <a:r>
+              <a:rPr lang="en-US" sz="1600" b="1" dirty="0">
+                <a:solidFill>
+                  <a:schemeClr val="accent1"/>
+                </a:solidFill>
+              </a:rPr>
+              <a:t>1. LLM 기반 주 신호 생성</a:t>
+            </a:r>
+            <a:endParaRPr lang="en-US" sz="1600" dirty="0"/>
           </a:p>
         </p:txBody>
-      </p:sp>
-      <p:sp>
-        <p:nvSpPr>
-          <p:cNvPr id="21" name="node-20"/>
-          <p:cNvSpPr/>
-          <p:nvPr/>
-        </p:nvSpPr>
-        <p:spPr>
-          <a:xfrm>
-            <a:off x="2862072" y="8778240"/>
-            <a:ext cx="1965960" cy="960120"/>
-          </a:xfrm>
-          <a:prstGeom prst="roundRect">
-            <a:avLst>
-              <a:gd name="adj" fmla="val 9524"/>
-            </a:avLst>
-          </a:prstGeom>
-          <a:solidFill>
-            <a:srgbClr val="DCE8F6"/>
-          </a:solidFill>
-          <a:ln w="15875">
-            <a:solidFill>
-              <a:srgbClr val="DCE8F6"/>
-            </a:solidFill>
-            <a:prstDash val="solid"/>
-          </a:ln>
-        </p:spPr>
       </p:sp>
       <p:sp>
         <p:nvSpPr>
@@ -2475,8 +2490,8 @@
         </p:nvSpPr>
         <p:spPr>
           <a:xfrm>
-            <a:off x="2935224" y="8778240"/>
-            <a:ext cx="1819656" cy="960120"/>
+            <a:off x="12010370" y="5704356"/>
+            <a:ext cx="2011931" cy="572347"/>
           </a:xfrm>
           <a:prstGeom prst="rect">
             <a:avLst/>
@@ -2495,14 +2510,14 @@
               <a:buNone/>
             </a:pPr>
             <a:r>
-              <a:rPr lang="en-US" sz="1700" dirty="0">
-                <a:solidFill>
-                  <a:schemeClr val="tx1"/>
-                </a:solidFill>
-              </a:rPr>
-              <a:t>GPT-4o-mini</a:t>
-            </a:r>
-            <a:endParaRPr lang="en-US" sz="1700" dirty="0"/>
+              <a:rPr lang="en-US" sz="1600" b="1" dirty="0">
+                <a:solidFill>
+                  <a:schemeClr val="accent1"/>
+                </a:solidFill>
+              </a:rPr>
+              <a:t>2. TCN 기반</a:t>
+            </a:r>
+            <a:endParaRPr lang="en-US" sz="1600" dirty="0"/>
           </a:p>
           <a:p>
             <a:pPr algn="ctr" indent="0" marL="0">
@@ -2512,14 +2527,14 @@
               <a:buNone/>
             </a:pPr>
             <a:r>
-              <a:rPr lang="en-US" sz="1700" dirty="0">
-                <a:solidFill>
-                  <a:schemeClr val="tx1"/>
-                </a:solidFill>
-              </a:rPr>
-              <a:t>요약 · 감성 점수</a:t>
-            </a:r>
-            <a:endParaRPr lang="en-US" sz="1700" dirty="0"/>
+              <a:rPr lang="en-US" sz="1600" b="1" dirty="0">
+                <a:solidFill>
+                  <a:schemeClr val="accent1"/>
+                </a:solidFill>
+              </a:rPr>
+              <a:t>보조 벡터 생성</a:t>
+            </a:r>
+            <a:endParaRPr lang="en-US" sz="1600" dirty="0"/>
           </a:p>
         </p:txBody>
       </p:sp>
@@ -2531,16 +2546,16 @@
         </p:nvSpPr>
         <p:spPr>
           <a:xfrm>
-            <a:off x="5129784" y="8778240"/>
-            <a:ext cx="1965960" cy="960120"/>
+            <a:off x="9083924" y="4069080"/>
+            <a:ext cx="1950964" cy="449701"/>
           </a:xfrm>
           <a:prstGeom prst="roundRect">
             <a:avLst>
-              <a:gd name="adj" fmla="val 9524"/>
+              <a:gd name="adj" fmla="val 20334"/>
             </a:avLst>
           </a:prstGeom>
           <a:solidFill>
-            <a:srgbClr val="DCE8F6"/>
+            <a:srgbClr val="FFFFFF"/>
           </a:solidFill>
           <a:ln w="15875">
             <a:solidFill>
@@ -2558,8 +2573,8 @@
         </p:nvSpPr>
         <p:spPr>
           <a:xfrm>
-            <a:off x="5202936" y="8778240"/>
-            <a:ext cx="1819656" cy="960120"/>
+            <a:off x="9157076" y="4069080"/>
+            <a:ext cx="1804660" cy="449701"/>
           </a:xfrm>
           <a:prstGeom prst="rect">
             <a:avLst/>
@@ -2578,71 +2593,78 @@
               <a:buNone/>
             </a:pPr>
             <a:r>
-              <a:rPr lang="en-US" sz="1700" b="1" dirty="0">
+              <a:rPr lang="en-US" sz="1550" dirty="0">
                 <a:solidFill>
                   <a:schemeClr val="tx1"/>
                 </a:solidFill>
               </a:rPr>
-              <a:t>주 신호 512</a:t>
-            </a:r>
-            <a:endParaRPr lang="en-US" sz="1700" dirty="0"/>
-          </a:p>
-          <a:p>
-            <a:pPr algn="ctr" indent="0" marL="0">
-              <a:lnSpc>
-                <a:spcPct val="95000"/>
-              </a:lnSpc>
-              <a:buNone/>
-            </a:pPr>
-            <a:r>
-              <a:rPr lang="en-US" sz="1700" b="1" dirty="0">
-                <a:solidFill>
-                  <a:schemeClr val="tx1"/>
-                </a:solidFill>
-              </a:rPr>
-              <a:t>임베딩 + 감성</a:t>
-            </a:r>
-            <a:endParaRPr lang="en-US" sz="1700" dirty="0"/>
+              <a:t>이벤트 발생 (뉴스)</a:t>
+            </a:r>
+            <a:endParaRPr lang="en-US" sz="1550" dirty="0"/>
           </a:p>
         </p:txBody>
       </p:sp>
       <p:sp>
         <p:nvSpPr>
-          <p:cNvPr id="25" name="node-24"/>
+          <p:cNvPr id="25" name="arrow-24"/>
           <p:cNvSpPr/>
           <p:nvPr/>
         </p:nvSpPr>
         <p:spPr>
           <a:xfrm>
-            <a:off x="960120" y="10424160"/>
-            <a:ext cx="1600200" cy="960120"/>
+            <a:off x="10059406" y="4518781"/>
+            <a:ext cx="0" cy="163528"/>
+          </a:xfrm>
+          <a:prstGeom prst="line">
+            <a:avLst/>
+          </a:prstGeom>
+          <a:noFill/>
+          <a:ln w="22225">
+            <a:solidFill>
+              <a:srgbClr val="14233F"/>
+            </a:solidFill>
+            <a:prstDash val="solid"/>
+            <a:tailEnd type="triangle"/>
+          </a:ln>
+        </p:spPr>
+      </p:sp>
+      <p:sp>
+        <p:nvSpPr>
+          <p:cNvPr id="26" name="node-25"/>
+          <p:cNvSpPr/>
+          <p:nvPr/>
+        </p:nvSpPr>
+        <p:spPr>
+          <a:xfrm>
+            <a:off x="9388762" y="5132010"/>
+            <a:ext cx="1219352" cy="408819"/>
           </a:xfrm>
           <a:prstGeom prst="roundRect">
             <a:avLst>
-              <a:gd name="adj" fmla="val 9524"/>
+              <a:gd name="adj" fmla="val 22367"/>
             </a:avLst>
           </a:prstGeom>
           <a:solidFill>
-            <a:srgbClr val="E1F0E3"/>
+            <a:srgbClr val="FFFFFF"/>
           </a:solidFill>
           <a:ln w="15875">
             <a:solidFill>
-              <a:srgbClr val="E1F0E3"/>
-            </a:solidFill>
-            <a:prstDash val="solid"/>
-          </a:ln>
-        </p:spPr>
-      </p:sp>
-      <p:sp>
-        <p:nvSpPr>
-          <p:cNvPr id="26" name="text-25"/>
+              <a:srgbClr val="8A94A6"/>
+            </a:solidFill>
+            <a:prstDash val="solid"/>
+          </a:ln>
+        </p:spPr>
+      </p:sp>
+      <p:sp>
+        <p:nvSpPr>
+          <p:cNvPr id="27" name="text-26"/>
           <p:cNvSpPr txBox="1"/>
           <p:nvPr/>
         </p:nvSpPr>
         <p:spPr>
           <a:xfrm>
-            <a:off x="1033272" y="10424160"/>
-            <a:ext cx="1453896" cy="960120"/>
+            <a:off x="9461914" y="5132010"/>
+            <a:ext cx="1073048" cy="408819"/>
           </a:xfrm>
           <a:prstGeom prst="rect">
             <a:avLst/>
@@ -2661,71 +2683,148 @@
               <a:buNone/>
             </a:pPr>
             <a:r>
-              <a:rPr lang="en-US" sz="1700" dirty="0">
+              <a:rPr lang="en-US" sz="1550" dirty="0">
                 <a:solidFill>
                   <a:schemeClr val="tx1"/>
                 </a:solidFill>
               </a:rPr>
-              <a:t>기술적 지표</a:t>
-            </a:r>
-            <a:endParaRPr lang="en-US" sz="1700" dirty="0"/>
-          </a:p>
-          <a:p>
-            <a:pPr algn="ctr" indent="0" marL="0">
-              <a:lnSpc>
-                <a:spcPct val="95000"/>
-              </a:lnSpc>
-              <a:buNone/>
-            </a:pPr>
-            <a:r>
-              <a:rPr lang="en-US" sz="1700" dirty="0">
-                <a:solidFill>
-                  <a:schemeClr val="tx1"/>
-                </a:solidFill>
-              </a:rPr>
-              <a:t>9종 × 30일</a:t>
-            </a:r>
-            <a:endParaRPr lang="en-US" sz="1700" dirty="0"/>
+              <a:t>LLM</a:t>
+            </a:r>
+            <a:endParaRPr lang="en-US" sz="1550" dirty="0"/>
           </a:p>
         </p:txBody>
       </p:sp>
       <p:sp>
         <p:nvSpPr>
-          <p:cNvPr id="27" name="node-26"/>
+          <p:cNvPr id="28" name="arrow-27"/>
           <p:cNvSpPr/>
           <p:nvPr/>
         </p:nvSpPr>
         <p:spPr>
           <a:xfrm>
-            <a:off x="2862072" y="10424160"/>
-            <a:ext cx="1965960" cy="960120"/>
+            <a:off x="9998438" y="5540829"/>
+            <a:ext cx="0" cy="138998"/>
+          </a:xfrm>
+          <a:prstGeom prst="line">
+            <a:avLst/>
+          </a:prstGeom>
+          <a:noFill/>
+          <a:ln w="22225">
+            <a:solidFill>
+              <a:srgbClr val="14233F"/>
+            </a:solidFill>
+            <a:prstDash val="solid"/>
+          </a:ln>
+        </p:spPr>
+      </p:sp>
+      <p:sp>
+        <p:nvSpPr>
+          <p:cNvPr id="29" name="arrow-28"/>
+          <p:cNvSpPr/>
+          <p:nvPr/>
+        </p:nvSpPr>
+        <p:spPr>
+          <a:xfrm>
+            <a:off x="9266827" y="5679827"/>
+            <a:ext cx="1432739" cy="0"/>
+          </a:xfrm>
+          <a:prstGeom prst="line">
+            <a:avLst/>
+          </a:prstGeom>
+          <a:noFill/>
+          <a:ln w="22225">
+            <a:solidFill>
+              <a:srgbClr val="14233F"/>
+            </a:solidFill>
+            <a:prstDash val="solid"/>
+          </a:ln>
+        </p:spPr>
+      </p:sp>
+      <p:sp>
+        <p:nvSpPr>
+          <p:cNvPr id="30" name="arrow-29"/>
+          <p:cNvSpPr/>
+          <p:nvPr/>
+        </p:nvSpPr>
+        <p:spPr>
+          <a:xfrm>
+            <a:off x="9266827" y="5679827"/>
+            <a:ext cx="0" cy="147175"/>
+          </a:xfrm>
+          <a:prstGeom prst="line">
+            <a:avLst/>
+          </a:prstGeom>
+          <a:noFill/>
+          <a:ln w="22225">
+            <a:solidFill>
+              <a:srgbClr val="14233F"/>
+            </a:solidFill>
+            <a:prstDash val="solid"/>
+            <a:tailEnd type="triangle"/>
+          </a:ln>
+        </p:spPr>
+      </p:sp>
+      <p:sp>
+        <p:nvSpPr>
+          <p:cNvPr id="31" name="arrow-30"/>
+          <p:cNvSpPr/>
+          <p:nvPr/>
+        </p:nvSpPr>
+        <p:spPr>
+          <a:xfrm>
+            <a:off x="10699566" y="5679827"/>
+            <a:ext cx="0" cy="147175"/>
+          </a:xfrm>
+          <a:prstGeom prst="line">
+            <a:avLst/>
+          </a:prstGeom>
+          <a:noFill/>
+          <a:ln w="22225">
+            <a:solidFill>
+              <a:srgbClr val="14233F"/>
+            </a:solidFill>
+            <a:prstDash val="solid"/>
+            <a:tailEnd type="triangle"/>
+          </a:ln>
+        </p:spPr>
+      </p:sp>
+      <p:sp>
+        <p:nvSpPr>
+          <p:cNvPr id="32" name="node-31"/>
+          <p:cNvSpPr/>
+          <p:nvPr/>
+        </p:nvSpPr>
+        <p:spPr>
+          <a:xfrm>
+            <a:off x="8596183" y="5827002"/>
+            <a:ext cx="1341288" cy="408819"/>
           </a:xfrm>
           <a:prstGeom prst="roundRect">
             <a:avLst>
-              <a:gd name="adj" fmla="val 9524"/>
+              <a:gd name="adj" fmla="val 22367"/>
             </a:avLst>
           </a:prstGeom>
           <a:solidFill>
-            <a:srgbClr val="E1F0E3"/>
+            <a:srgbClr val="FFFFFF"/>
           </a:solidFill>
           <a:ln w="15875">
             <a:solidFill>
-              <a:srgbClr val="E1F0E3"/>
-            </a:solidFill>
-            <a:prstDash val="solid"/>
-          </a:ln>
-        </p:spPr>
-      </p:sp>
-      <p:sp>
-        <p:nvSpPr>
-          <p:cNvPr id="28" name="text-27"/>
+              <a:srgbClr val="8A94A6"/>
+            </a:solidFill>
+            <a:prstDash val="solid"/>
+          </a:ln>
+        </p:spPr>
+      </p:sp>
+      <p:sp>
+        <p:nvSpPr>
+          <p:cNvPr id="33" name="text-32"/>
           <p:cNvSpPr txBox="1"/>
           <p:nvPr/>
         </p:nvSpPr>
         <p:spPr>
           <a:xfrm>
-            <a:off x="2935224" y="10424160"/>
-            <a:ext cx="1819656" cy="960120"/>
+            <a:off x="8669335" y="5827002"/>
+            <a:ext cx="1194984" cy="408819"/>
           </a:xfrm>
           <a:prstGeom prst="rect">
             <a:avLst/>
@@ -2744,71 +2843,54 @@
               <a:buNone/>
             </a:pPr>
             <a:r>
-              <a:rPr lang="en-US" sz="1700" dirty="0">
+              <a:rPr lang="en-US" sz="1550" dirty="0">
                 <a:solidFill>
                   <a:schemeClr val="tx1"/>
                 </a:solidFill>
               </a:rPr>
-              <a:t>TCN</a:t>
-            </a:r>
-            <a:endParaRPr lang="en-US" sz="1700" dirty="0"/>
-          </a:p>
-          <a:p>
-            <a:pPr algn="ctr" indent="0" marL="0">
-              <a:lnSpc>
-                <a:spcPct val="95000"/>
-              </a:lnSpc>
-              <a:buNone/>
-            </a:pPr>
-            <a:r>
-              <a:rPr lang="en-US" sz="1700" dirty="0">
-                <a:solidFill>
-                  <a:schemeClr val="tx1"/>
-                </a:solidFill>
-              </a:rPr>
-              <a:t>(인과적 합성곱)</a:t>
-            </a:r>
-            <a:endParaRPr lang="en-US" sz="1700" dirty="0"/>
+              <a:t>뉴스 요약</a:t>
+            </a:r>
+            <a:endParaRPr lang="en-US" sz="1550" dirty="0"/>
           </a:p>
         </p:txBody>
       </p:sp>
       <p:sp>
         <p:nvSpPr>
-          <p:cNvPr id="29" name="node-28"/>
+          <p:cNvPr id="34" name="node-33"/>
           <p:cNvSpPr/>
           <p:nvPr/>
         </p:nvSpPr>
         <p:spPr>
           <a:xfrm>
-            <a:off x="5129784" y="10424160"/>
-            <a:ext cx="1965960" cy="960120"/>
+            <a:off x="10059406" y="5827002"/>
+            <a:ext cx="1280320" cy="408819"/>
           </a:xfrm>
           <a:prstGeom prst="roundRect">
             <a:avLst>
-              <a:gd name="adj" fmla="val 9524"/>
+              <a:gd name="adj" fmla="val 22367"/>
             </a:avLst>
           </a:prstGeom>
           <a:solidFill>
-            <a:srgbClr val="E1F0E3"/>
+            <a:srgbClr val="FFFFFF"/>
           </a:solidFill>
           <a:ln w="15875">
             <a:solidFill>
-              <a:srgbClr val="2E8B57"/>
-            </a:solidFill>
-            <a:prstDash val="solid"/>
-          </a:ln>
-        </p:spPr>
-      </p:sp>
-      <p:sp>
-        <p:nvSpPr>
-          <p:cNvPr id="30" name="text-29"/>
+              <a:srgbClr val="8A94A6"/>
+            </a:solidFill>
+            <a:prstDash val="solid"/>
+          </a:ln>
+        </p:spPr>
+      </p:sp>
+      <p:sp>
+        <p:nvSpPr>
+          <p:cNvPr id="35" name="text-34"/>
           <p:cNvSpPr txBox="1"/>
           <p:nvPr/>
         </p:nvSpPr>
         <p:spPr>
           <a:xfrm>
-            <a:off x="5202936" y="10424160"/>
-            <a:ext cx="1819656" cy="960120"/>
+            <a:off x="10132558" y="5827002"/>
+            <a:ext cx="1134016" cy="408819"/>
           </a:xfrm>
           <a:prstGeom prst="rect">
             <a:avLst/>
@@ -2827,48 +2909,681 @@
               <a:buNone/>
             </a:pPr>
             <a:r>
-              <a:rPr lang="en-US" sz="1700" b="1" dirty="0">
+              <a:rPr lang="en-US" sz="1550" dirty="0">
                 <a:solidFill>
                   <a:schemeClr val="tx1"/>
                 </a:solidFill>
               </a:rPr>
-              <a:t>보조 신호</a:t>
-            </a:r>
-            <a:endParaRPr lang="en-US" sz="1700" dirty="0"/>
-          </a:p>
-          <a:p>
-            <a:pPr algn="ctr" indent="0" marL="0">
-              <a:lnSpc>
-                <a:spcPct val="95000"/>
-              </a:lnSpc>
-              <a:buNone/>
-            </a:pPr>
-            <a:r>
-              <a:rPr lang="en-US" sz="1700" b="1" dirty="0">
-                <a:solidFill>
-                  <a:schemeClr val="tx1"/>
-                </a:solidFill>
-              </a:rPr>
-              <a:t>30 × 512</a:t>
-            </a:r>
-            <a:endParaRPr lang="en-US" sz="1700" dirty="0"/>
+              <a:t>감성 점수</a:t>
+            </a:r>
+            <a:endParaRPr lang="en-US" sz="1550" dirty="0"/>
           </a:p>
         </p:txBody>
       </p:sp>
       <p:sp>
         <p:nvSpPr>
-          <p:cNvPr id="31" name="node-30"/>
+          <p:cNvPr id="36" name="arrow-35"/>
           <p:cNvSpPr/>
           <p:nvPr/>
         </p:nvSpPr>
         <p:spPr>
           <a:xfrm>
-            <a:off x="7397496" y="9509760"/>
-            <a:ext cx="1920240" cy="1143000"/>
+            <a:off x="9266827" y="6235821"/>
+            <a:ext cx="0" cy="204410"/>
+          </a:xfrm>
+          <a:prstGeom prst="line">
+            <a:avLst/>
+          </a:prstGeom>
+          <a:noFill/>
+          <a:ln w="22225">
+            <a:solidFill>
+              <a:srgbClr val="14233F"/>
+            </a:solidFill>
+            <a:prstDash val="solid"/>
+            <a:tailEnd type="triangle"/>
+          </a:ln>
+        </p:spPr>
+      </p:sp>
+      <p:sp>
+        <p:nvSpPr>
+          <p:cNvPr id="37" name="node-36"/>
+          <p:cNvSpPr/>
+          <p:nvPr/>
+        </p:nvSpPr>
+        <p:spPr>
+          <a:xfrm>
+            <a:off x="8596183" y="6440230"/>
+            <a:ext cx="1341288" cy="327055"/>
           </a:xfrm>
           <a:prstGeom prst="roundRect">
             <a:avLst>
-              <a:gd name="adj" fmla="val 8000"/>
+              <a:gd name="adj" fmla="val 27959"/>
+            </a:avLst>
+          </a:prstGeom>
+          <a:solidFill>
+            <a:srgbClr val="FFFFFF"/>
+          </a:solidFill>
+          <a:ln w="15875">
+            <a:solidFill>
+              <a:srgbClr val="8A94A6"/>
+            </a:solidFill>
+            <a:prstDash val="solid"/>
+          </a:ln>
+        </p:spPr>
+      </p:sp>
+      <p:sp>
+        <p:nvSpPr>
+          <p:cNvPr id="38" name="text-37"/>
+          <p:cNvSpPr txBox="1"/>
+          <p:nvPr/>
+        </p:nvSpPr>
+        <p:spPr>
+          <a:xfrm>
+            <a:off x="8669335" y="6440230"/>
+            <a:ext cx="1194984" cy="327055"/>
+          </a:xfrm>
+          <a:prstGeom prst="rect">
+            <a:avLst/>
+          </a:prstGeom>
+          <a:noFill/>
+          <a:ln/>
+        </p:spPr>
+        <p:txBody>
+          <a:bodyPr wrap="square" lIns="0" tIns="0" rIns="0" bIns="0" rtlCol="0" anchor="ctr"/>
+          <a:lstStyle/>
+          <a:p>
+            <a:pPr algn="ctr" indent="0" marL="0">
+              <a:lnSpc>
+                <a:spcPct val="95000"/>
+              </a:lnSpc>
+              <a:buNone/>
+            </a:pPr>
+            <a:r>
+              <a:rPr lang="en-US" sz="1550" dirty="0">
+                <a:solidFill>
+                  <a:schemeClr val="tx1"/>
+                </a:solidFill>
+              </a:rPr>
+              <a:t>임베딩 생성</a:t>
+            </a:r>
+            <a:endParaRPr lang="en-US" sz="1550" dirty="0"/>
+          </a:p>
+        </p:txBody>
+      </p:sp>
+      <p:sp>
+        <p:nvSpPr>
+          <p:cNvPr id="39" name="arrow-38"/>
+          <p:cNvSpPr/>
+          <p:nvPr/>
+        </p:nvSpPr>
+        <p:spPr>
+          <a:xfrm>
+            <a:off x="9266827" y="6767286"/>
+            <a:ext cx="0" cy="163528"/>
+          </a:xfrm>
+          <a:prstGeom prst="line">
+            <a:avLst/>
+          </a:prstGeom>
+          <a:noFill/>
+          <a:ln w="22225">
+            <a:solidFill>
+              <a:srgbClr val="14233F"/>
+            </a:solidFill>
+            <a:prstDash val="solid"/>
+            <a:tailEnd type="triangle"/>
+          </a:ln>
+        </p:spPr>
+      </p:sp>
+      <p:sp>
+        <p:nvSpPr>
+          <p:cNvPr id="40" name="arrow-39"/>
+          <p:cNvSpPr/>
+          <p:nvPr/>
+        </p:nvSpPr>
+        <p:spPr>
+          <a:xfrm>
+            <a:off x="10699566" y="6235821"/>
+            <a:ext cx="0" cy="694992"/>
+          </a:xfrm>
+          <a:prstGeom prst="line">
+            <a:avLst/>
+          </a:prstGeom>
+          <a:noFill/>
+          <a:ln w="22225">
+            <a:solidFill>
+              <a:srgbClr val="14233F"/>
+            </a:solidFill>
+            <a:prstDash val="solid"/>
+            <a:tailEnd type="triangle"/>
+          </a:ln>
+        </p:spPr>
+      </p:sp>
+      <p:sp>
+        <p:nvSpPr>
+          <p:cNvPr id="41" name="node-40"/>
+          <p:cNvSpPr/>
+          <p:nvPr/>
+        </p:nvSpPr>
+        <p:spPr>
+          <a:xfrm>
+            <a:off x="8474248" y="6930813"/>
+            <a:ext cx="2987413" cy="327055"/>
+          </a:xfrm>
+          <a:prstGeom prst="roundRect">
+            <a:avLst>
+              <a:gd name="adj" fmla="val 27959"/>
+            </a:avLst>
+          </a:prstGeom>
+          <a:solidFill>
+            <a:srgbClr val="FFFFFF"/>
+          </a:solidFill>
+          <a:ln w="15875">
+            <a:solidFill>
+              <a:srgbClr val="8A94A6"/>
+            </a:solidFill>
+            <a:prstDash val="solid"/>
+          </a:ln>
+        </p:spPr>
+      </p:sp>
+      <p:sp>
+        <p:nvSpPr>
+          <p:cNvPr id="42" name="text-41"/>
+          <p:cNvSpPr txBox="1"/>
+          <p:nvPr/>
+        </p:nvSpPr>
+        <p:spPr>
+          <a:xfrm>
+            <a:off x="8547400" y="6930813"/>
+            <a:ext cx="2841109" cy="327055"/>
+          </a:xfrm>
+          <a:prstGeom prst="rect">
+            <a:avLst/>
+          </a:prstGeom>
+          <a:noFill/>
+          <a:ln/>
+        </p:spPr>
+        <p:txBody>
+          <a:bodyPr wrap="square" lIns="0" tIns="0" rIns="0" bIns="0" rtlCol="0" anchor="ctr"/>
+          <a:lstStyle/>
+          <a:p>
+            <a:pPr algn="ctr" indent="0" marL="0">
+              <a:lnSpc>
+                <a:spcPct val="95000"/>
+              </a:lnSpc>
+              <a:buNone/>
+            </a:pPr>
+            <a:r>
+              <a:rPr lang="en-US" sz="1550" dirty="0">
+                <a:solidFill>
+                  <a:schemeClr val="tx1"/>
+                </a:solidFill>
+              </a:rPr>
+              <a:t>완전 연결층</a:t>
+            </a:r>
+            <a:endParaRPr lang="en-US" sz="1550" dirty="0"/>
+          </a:p>
+        </p:txBody>
+      </p:sp>
+      <p:sp>
+        <p:nvSpPr>
+          <p:cNvPr id="43" name="node-42"/>
+          <p:cNvSpPr/>
+          <p:nvPr/>
+        </p:nvSpPr>
+        <p:spPr>
+          <a:xfrm>
+            <a:off x="12254240" y="6317585"/>
+            <a:ext cx="1524191" cy="327055"/>
+          </a:xfrm>
+          <a:prstGeom prst="roundRect">
+            <a:avLst>
+              <a:gd name="adj" fmla="val 27959"/>
+            </a:avLst>
+          </a:prstGeom>
+          <a:solidFill>
+            <a:srgbClr val="FFFFFF"/>
+          </a:solidFill>
+          <a:ln w="15875">
+            <a:solidFill>
+              <a:srgbClr val="8A94A6"/>
+            </a:solidFill>
+            <a:prstDash val="solid"/>
+          </a:ln>
+        </p:spPr>
+      </p:sp>
+      <p:sp>
+        <p:nvSpPr>
+          <p:cNvPr id="44" name="text-43"/>
+          <p:cNvSpPr txBox="1"/>
+          <p:nvPr/>
+        </p:nvSpPr>
+        <p:spPr>
+          <a:xfrm>
+            <a:off x="12327392" y="6317585"/>
+            <a:ext cx="1377887" cy="327055"/>
+          </a:xfrm>
+          <a:prstGeom prst="rect">
+            <a:avLst/>
+          </a:prstGeom>
+          <a:noFill/>
+          <a:ln/>
+        </p:spPr>
+        <p:txBody>
+          <a:bodyPr wrap="square" lIns="0" tIns="0" rIns="0" bIns="0" rtlCol="0" anchor="ctr"/>
+          <a:lstStyle/>
+          <a:p>
+            <a:pPr algn="ctr" indent="0" marL="0">
+              <a:lnSpc>
+                <a:spcPct val="95000"/>
+              </a:lnSpc>
+              <a:buNone/>
+            </a:pPr>
+            <a:r>
+              <a:rPr lang="en-US" sz="1550" dirty="0">
+                <a:solidFill>
+                  <a:schemeClr val="tx1"/>
+                </a:solidFill>
+              </a:rPr>
+              <a:t>기술적 지표</a:t>
+            </a:r>
+            <a:endParaRPr lang="en-US" sz="1550" dirty="0"/>
+          </a:p>
+        </p:txBody>
+      </p:sp>
+      <p:sp>
+        <p:nvSpPr>
+          <p:cNvPr id="45" name="arrow-44"/>
+          <p:cNvSpPr/>
+          <p:nvPr/>
+        </p:nvSpPr>
+        <p:spPr>
+          <a:xfrm>
+            <a:off x="13016335" y="6644640"/>
+            <a:ext cx="0" cy="245291"/>
+          </a:xfrm>
+          <a:prstGeom prst="line">
+            <a:avLst/>
+          </a:prstGeom>
+          <a:noFill/>
+          <a:ln w="22225">
+            <a:solidFill>
+              <a:srgbClr val="14233F"/>
+            </a:solidFill>
+            <a:prstDash val="solid"/>
+            <a:tailEnd type="triangle"/>
+          </a:ln>
+        </p:spPr>
+      </p:sp>
+      <p:sp>
+        <p:nvSpPr>
+          <p:cNvPr id="46" name="node-45"/>
+          <p:cNvSpPr/>
+          <p:nvPr/>
+        </p:nvSpPr>
+        <p:spPr>
+          <a:xfrm>
+            <a:off x="12254240" y="6889931"/>
+            <a:ext cx="1524191" cy="327055"/>
+          </a:xfrm>
+          <a:prstGeom prst="roundRect">
+            <a:avLst>
+              <a:gd name="adj" fmla="val 27959"/>
+            </a:avLst>
+          </a:prstGeom>
+          <a:solidFill>
+            <a:srgbClr val="FFFFFF"/>
+          </a:solidFill>
+          <a:ln w="15875">
+            <a:solidFill>
+              <a:srgbClr val="8A94A6"/>
+            </a:solidFill>
+            <a:prstDash val="solid"/>
+          </a:ln>
+        </p:spPr>
+      </p:sp>
+      <p:sp>
+        <p:nvSpPr>
+          <p:cNvPr id="47" name="text-46"/>
+          <p:cNvSpPr txBox="1"/>
+          <p:nvPr/>
+        </p:nvSpPr>
+        <p:spPr>
+          <a:xfrm>
+            <a:off x="12327392" y="6889931"/>
+            <a:ext cx="1377887" cy="327055"/>
+          </a:xfrm>
+          <a:prstGeom prst="rect">
+            <a:avLst/>
+          </a:prstGeom>
+          <a:noFill/>
+          <a:ln/>
+        </p:spPr>
+        <p:txBody>
+          <a:bodyPr wrap="square" lIns="0" tIns="0" rIns="0" bIns="0" rtlCol="0" anchor="ctr"/>
+          <a:lstStyle/>
+          <a:p>
+            <a:pPr algn="ctr" indent="0" marL="0">
+              <a:lnSpc>
+                <a:spcPct val="95000"/>
+              </a:lnSpc>
+              <a:buNone/>
+            </a:pPr>
+            <a:r>
+              <a:rPr lang="en-US" sz="1550" dirty="0">
+                <a:solidFill>
+                  <a:schemeClr val="tx1"/>
+                </a:solidFill>
+              </a:rPr>
+              <a:t>TCN</a:t>
+            </a:r>
+            <a:endParaRPr lang="en-US" sz="1550" dirty="0"/>
+          </a:p>
+        </p:txBody>
+      </p:sp>
+      <p:sp>
+        <p:nvSpPr>
+          <p:cNvPr id="48" name="arrow-47"/>
+          <p:cNvSpPr/>
+          <p:nvPr/>
+        </p:nvSpPr>
+        <p:spPr>
+          <a:xfrm>
+            <a:off x="9967954" y="7380514"/>
+            <a:ext cx="0" cy="204410"/>
+          </a:xfrm>
+          <a:prstGeom prst="line">
+            <a:avLst/>
+          </a:prstGeom>
+          <a:noFill/>
+          <a:ln w="22225">
+            <a:solidFill>
+              <a:srgbClr val="14233F"/>
+            </a:solidFill>
+            <a:prstDash val="solid"/>
+            <a:tailEnd type="triangle"/>
+          </a:ln>
+        </p:spPr>
+      </p:sp>
+      <p:sp>
+        <p:nvSpPr>
+          <p:cNvPr id="49" name="arrow-48"/>
+          <p:cNvSpPr/>
+          <p:nvPr/>
+        </p:nvSpPr>
+        <p:spPr>
+          <a:xfrm>
+            <a:off x="13016335" y="7380514"/>
+            <a:ext cx="0" cy="204410"/>
+          </a:xfrm>
+          <a:prstGeom prst="line">
+            <a:avLst/>
+          </a:prstGeom>
+          <a:noFill/>
+          <a:ln w="22225">
+            <a:solidFill>
+              <a:srgbClr val="14233F"/>
+            </a:solidFill>
+            <a:prstDash val="solid"/>
+            <a:tailEnd type="triangle"/>
+          </a:ln>
+        </p:spPr>
+      </p:sp>
+      <p:sp>
+        <p:nvSpPr>
+          <p:cNvPr id="50" name="node-49"/>
+          <p:cNvSpPr/>
+          <p:nvPr/>
+        </p:nvSpPr>
+        <p:spPr>
+          <a:xfrm>
+            <a:off x="8291345" y="7584924"/>
+            <a:ext cx="3353219" cy="490583"/>
+          </a:xfrm>
+          <a:prstGeom prst="roundRect">
+            <a:avLst>
+              <a:gd name="adj" fmla="val 18639"/>
+            </a:avLst>
+          </a:prstGeom>
+          <a:solidFill>
+            <a:srgbClr val="FFFFFF"/>
+          </a:solidFill>
+          <a:ln w="15875">
+            <a:solidFill>
+              <a:srgbClr val="14233F"/>
+            </a:solidFill>
+            <a:prstDash val="solid"/>
+          </a:ln>
+        </p:spPr>
+      </p:sp>
+      <p:sp>
+        <p:nvSpPr>
+          <p:cNvPr id="51" name="text-50"/>
+          <p:cNvSpPr txBox="1"/>
+          <p:nvPr/>
+        </p:nvSpPr>
+        <p:spPr>
+          <a:xfrm>
+            <a:off x="8364497" y="7584924"/>
+            <a:ext cx="3206915" cy="490583"/>
+          </a:xfrm>
+          <a:prstGeom prst="rect">
+            <a:avLst/>
+          </a:prstGeom>
+          <a:noFill/>
+          <a:ln/>
+        </p:spPr>
+        <p:txBody>
+          <a:bodyPr wrap="square" lIns="0" tIns="0" rIns="0" bIns="0" rtlCol="0" anchor="ctr"/>
+          <a:lstStyle/>
+          <a:p>
+            <a:pPr algn="ctr" indent="0" marL="0">
+              <a:lnSpc>
+                <a:spcPct val="95000"/>
+              </a:lnSpc>
+              <a:buNone/>
+            </a:pPr>
+            <a:r>
+              <a:rPr lang="en-US" sz="1550" b="1" dirty="0">
+                <a:solidFill>
+                  <a:schemeClr val="tx1"/>
+                </a:solidFill>
+              </a:rPr>
+              <a:t>주 신호: 512차원 벡터</a:t>
+            </a:r>
+            <a:endParaRPr lang="en-US" sz="1550" dirty="0"/>
+          </a:p>
+        </p:txBody>
+      </p:sp>
+      <p:sp>
+        <p:nvSpPr>
+          <p:cNvPr id="52" name="node-51"/>
+          <p:cNvSpPr/>
+          <p:nvPr/>
+        </p:nvSpPr>
+        <p:spPr>
+          <a:xfrm>
+            <a:off x="12010370" y="7584924"/>
+            <a:ext cx="2011931" cy="490583"/>
+          </a:xfrm>
+          <a:prstGeom prst="roundRect">
+            <a:avLst>
+              <a:gd name="adj" fmla="val 18639"/>
+            </a:avLst>
+          </a:prstGeom>
+          <a:solidFill>
+            <a:srgbClr val="FFFFFF"/>
+          </a:solidFill>
+          <a:ln w="15875">
+            <a:solidFill>
+              <a:srgbClr val="2E8B57"/>
+            </a:solidFill>
+            <a:prstDash val="solid"/>
+          </a:ln>
+        </p:spPr>
+      </p:sp>
+      <p:sp>
+        <p:nvSpPr>
+          <p:cNvPr id="53" name="text-52"/>
+          <p:cNvSpPr txBox="1"/>
+          <p:nvPr/>
+        </p:nvSpPr>
+        <p:spPr>
+          <a:xfrm>
+            <a:off x="12083522" y="7584924"/>
+            <a:ext cx="1865627" cy="490583"/>
+          </a:xfrm>
+          <a:prstGeom prst="rect">
+            <a:avLst/>
+          </a:prstGeom>
+          <a:noFill/>
+          <a:ln/>
+        </p:spPr>
+        <p:txBody>
+          <a:bodyPr wrap="square" lIns="0" tIns="0" rIns="0" bIns="0" rtlCol="0" anchor="ctr"/>
+          <a:lstStyle/>
+          <a:p>
+            <a:pPr algn="ctr" indent="0" marL="0">
+              <a:lnSpc>
+                <a:spcPct val="95000"/>
+              </a:lnSpc>
+              <a:buNone/>
+            </a:pPr>
+            <a:r>
+              <a:rPr lang="en-US" sz="1450" b="1" dirty="0">
+                <a:solidFill>
+                  <a:schemeClr val="tx1"/>
+                </a:solidFill>
+              </a:rPr>
+              <a:t>보조 신호:</a:t>
+            </a:r>
+            <a:endParaRPr lang="en-US" sz="1450" dirty="0"/>
+          </a:p>
+          <a:p>
+            <a:pPr algn="ctr" indent="0" marL="0">
+              <a:lnSpc>
+                <a:spcPct val="95000"/>
+              </a:lnSpc>
+              <a:buNone/>
+            </a:pPr>
+            <a:r>
+              <a:rPr lang="en-US" sz="1450" b="1" dirty="0">
+                <a:solidFill>
+                  <a:schemeClr val="tx1"/>
+                </a:solidFill>
+              </a:rPr>
+              <a:t>(T, 512)차원 벡터</a:t>
+            </a:r>
+            <a:endParaRPr lang="en-US" sz="1450" dirty="0"/>
+          </a:p>
+        </p:txBody>
+      </p:sp>
+      <p:sp>
+        <p:nvSpPr>
+          <p:cNvPr id="54" name="arrow-53"/>
+          <p:cNvSpPr/>
+          <p:nvPr/>
+        </p:nvSpPr>
+        <p:spPr>
+          <a:xfrm>
+            <a:off x="9967954" y="8075507"/>
+            <a:ext cx="0" cy="179880"/>
+          </a:xfrm>
+          <a:prstGeom prst="line">
+            <a:avLst/>
+          </a:prstGeom>
+          <a:noFill/>
+          <a:ln w="22225">
+            <a:solidFill>
+              <a:srgbClr val="14233F"/>
+            </a:solidFill>
+            <a:prstDash val="solid"/>
+          </a:ln>
+        </p:spPr>
+      </p:sp>
+      <p:sp>
+        <p:nvSpPr>
+          <p:cNvPr id="55" name="arrow-54"/>
+          <p:cNvSpPr/>
+          <p:nvPr/>
+        </p:nvSpPr>
+        <p:spPr>
+          <a:xfrm>
+            <a:off x="13016335" y="8075507"/>
+            <a:ext cx="0" cy="179880"/>
+          </a:xfrm>
+          <a:prstGeom prst="line">
+            <a:avLst/>
+          </a:prstGeom>
+          <a:noFill/>
+          <a:ln w="22225">
+            <a:solidFill>
+              <a:srgbClr val="14233F"/>
+            </a:solidFill>
+            <a:prstDash val="solid"/>
+          </a:ln>
+        </p:spPr>
+      </p:sp>
+      <p:sp>
+        <p:nvSpPr>
+          <p:cNvPr id="56" name="arrow-55"/>
+          <p:cNvSpPr/>
+          <p:nvPr/>
+        </p:nvSpPr>
+        <p:spPr>
+          <a:xfrm>
+            <a:off x="9967954" y="8255387"/>
+            <a:ext cx="3048381" cy="0"/>
+          </a:xfrm>
+          <a:prstGeom prst="line">
+            <a:avLst/>
+          </a:prstGeom>
+          <a:noFill/>
+          <a:ln w="22225">
+            <a:solidFill>
+              <a:srgbClr val="14233F"/>
+            </a:solidFill>
+            <a:prstDash val="solid"/>
+          </a:ln>
+        </p:spPr>
+      </p:sp>
+      <p:sp>
+        <p:nvSpPr>
+          <p:cNvPr id="57" name="arrow-56"/>
+          <p:cNvSpPr/>
+          <p:nvPr/>
+        </p:nvSpPr>
+        <p:spPr>
+          <a:xfrm>
+            <a:off x="11461661" y="8255387"/>
+            <a:ext cx="0" cy="228939"/>
+          </a:xfrm>
+          <a:prstGeom prst="line">
+            <a:avLst/>
+          </a:prstGeom>
+          <a:noFill/>
+          <a:ln w="22225">
+            <a:solidFill>
+              <a:srgbClr val="14233F"/>
+            </a:solidFill>
+            <a:prstDash val="solid"/>
+            <a:tailEnd type="triangle"/>
+          </a:ln>
+        </p:spPr>
+      </p:sp>
+      <p:sp>
+        <p:nvSpPr>
+          <p:cNvPr id="58" name="node-57"/>
+          <p:cNvSpPr/>
+          <p:nvPr/>
+        </p:nvSpPr>
+        <p:spPr>
+          <a:xfrm>
+            <a:off x="9266827" y="8484326"/>
+            <a:ext cx="4389669" cy="449701"/>
+          </a:xfrm>
+          <a:prstGeom prst="roundRect">
+            <a:avLst>
+              <a:gd name="adj" fmla="val 20334"/>
             </a:avLst>
           </a:prstGeom>
           <a:solidFill>
@@ -2884,14 +3599,14 @@
       </p:sp>
       <p:sp>
         <p:nvSpPr>
-          <p:cNvPr id="32" name="text-31"/>
+          <p:cNvPr id="59" name="text-58"/>
           <p:cNvSpPr txBox="1"/>
           <p:nvPr/>
         </p:nvSpPr>
         <p:spPr>
           <a:xfrm>
-            <a:off x="7470648" y="9509760"/>
-            <a:ext cx="1773936" cy="1143000"/>
+            <a:off x="9339979" y="8484326"/>
+            <a:ext cx="4243365" cy="449701"/>
           </a:xfrm>
           <a:prstGeom prst="rect">
             <a:avLst/>
@@ -2915,60 +3630,140 @@
                   <a:schemeClr val="tx1"/>
                 </a:solidFill>
               </a:rPr>
-              <a:t>비대칭</a:t>
+              <a:t>3. 비대칭 교차 어텐션</a:t>
             </a:r>
             <a:endParaRPr lang="en-US" sz="1700" dirty="0"/>
           </a:p>
-          <a:p>
-            <a:pPr algn="ctr" indent="0" marL="0">
-              <a:lnSpc>
-                <a:spcPct val="95000"/>
-              </a:lnSpc>
-              <a:buNone/>
-            </a:pPr>
-            <a:r>
-              <a:rPr lang="en-US" sz="1700" b="1" dirty="0">
-                <a:solidFill>
-                  <a:schemeClr val="tx1"/>
-                </a:solidFill>
-              </a:rPr>
-              <a:t>교차 어텐션</a:t>
-            </a:r>
-            <a:endParaRPr lang="en-US" sz="1700" dirty="0"/>
-          </a:p>
-          <a:p>
-            <a:pPr algn="ctr" indent="0" marL="0">
-              <a:lnSpc>
-                <a:spcPct val="95000"/>
-              </a:lnSpc>
-              <a:buNone/>
-            </a:pPr>
-            <a:r>
-              <a:rPr lang="en-US" sz="1700" b="1" dirty="0">
-                <a:solidFill>
-                  <a:schemeClr val="tx1"/>
-                </a:solidFill>
-              </a:rPr>
-              <a:t>Q=뉴스 K·V=지표</a:t>
-            </a:r>
-            <a:endParaRPr lang="en-US" sz="1700" dirty="0"/>
-          </a:p>
         </p:txBody>
       </p:sp>
       <p:sp>
         <p:nvSpPr>
-          <p:cNvPr id="33" name="node-32"/>
+          <p:cNvPr id="60" name="arrow-59"/>
           <p:cNvSpPr/>
           <p:nvPr/>
         </p:nvSpPr>
         <p:spPr>
           <a:xfrm>
-            <a:off x="9619488" y="9509760"/>
-            <a:ext cx="1645920" cy="1143000"/>
+            <a:off x="11461661" y="8934027"/>
+            <a:ext cx="0" cy="204410"/>
+          </a:xfrm>
+          <a:prstGeom prst="line">
+            <a:avLst/>
+          </a:prstGeom>
+          <a:noFill/>
+          <a:ln w="22225">
+            <a:solidFill>
+              <a:srgbClr val="14233F"/>
+            </a:solidFill>
+            <a:prstDash val="solid"/>
+            <a:tailEnd type="triangle"/>
+          </a:ln>
+        </p:spPr>
+      </p:sp>
+      <p:sp>
+        <p:nvSpPr>
+          <p:cNvPr id="61" name="node-60"/>
+          <p:cNvSpPr/>
+          <p:nvPr/>
+        </p:nvSpPr>
+        <p:spPr>
+          <a:xfrm>
+            <a:off x="9937471" y="9138436"/>
+            <a:ext cx="3048381" cy="327055"/>
           </a:xfrm>
           <a:prstGeom prst="roundRect">
             <a:avLst>
-              <a:gd name="adj" fmla="val 8000"/>
+              <a:gd name="adj" fmla="val 27959"/>
+            </a:avLst>
+          </a:prstGeom>
+          <a:solidFill>
+            <a:srgbClr val="FFFFFF"/>
+          </a:solidFill>
+          <a:ln w="15875">
+            <a:solidFill>
+              <a:srgbClr val="8A94A6"/>
+            </a:solidFill>
+            <a:prstDash val="solid"/>
+          </a:ln>
+        </p:spPr>
+      </p:sp>
+      <p:sp>
+        <p:nvSpPr>
+          <p:cNvPr id="62" name="text-61"/>
+          <p:cNvSpPr txBox="1"/>
+          <p:nvPr/>
+        </p:nvSpPr>
+        <p:spPr>
+          <a:xfrm>
+            <a:off x="10010623" y="9138436"/>
+            <a:ext cx="2902077" cy="327055"/>
+          </a:xfrm>
+          <a:prstGeom prst="rect">
+            <a:avLst/>
+          </a:prstGeom>
+          <a:noFill/>
+          <a:ln/>
+        </p:spPr>
+        <p:txBody>
+          <a:bodyPr wrap="square" lIns="0" tIns="0" rIns="0" bIns="0" rtlCol="0" anchor="ctr"/>
+          <a:lstStyle/>
+          <a:p>
+            <a:pPr algn="ctr" indent="0" marL="0">
+              <a:lnSpc>
+                <a:spcPct val="95000"/>
+              </a:lnSpc>
+              <a:buNone/>
+            </a:pPr>
+            <a:r>
+              <a:rPr lang="en-US" sz="1550" dirty="0">
+                <a:solidFill>
+                  <a:schemeClr val="tx1"/>
+                </a:solidFill>
+              </a:rPr>
+              <a:t>보조 문맥 벡터: 512차원</a:t>
+            </a:r>
+            <a:endParaRPr lang="en-US" sz="1550" dirty="0"/>
+          </a:p>
+        </p:txBody>
+      </p:sp>
+      <p:sp>
+        <p:nvSpPr>
+          <p:cNvPr id="63" name="arrow-62"/>
+          <p:cNvSpPr/>
+          <p:nvPr/>
+        </p:nvSpPr>
+        <p:spPr>
+          <a:xfrm>
+            <a:off x="11461661" y="9465491"/>
+            <a:ext cx="0" cy="204410"/>
+          </a:xfrm>
+          <a:prstGeom prst="line">
+            <a:avLst/>
+          </a:prstGeom>
+          <a:noFill/>
+          <a:ln w="22225">
+            <a:solidFill>
+              <a:srgbClr val="14233F"/>
+            </a:solidFill>
+            <a:prstDash val="solid"/>
+            <a:tailEnd type="triangle"/>
+          </a:ln>
+        </p:spPr>
+      </p:sp>
+      <p:sp>
+        <p:nvSpPr>
+          <p:cNvPr id="64" name="node-63"/>
+          <p:cNvSpPr/>
+          <p:nvPr/>
+        </p:nvSpPr>
+        <p:spPr>
+          <a:xfrm>
+            <a:off x="9266827" y="9669901"/>
+            <a:ext cx="4389669" cy="449701"/>
+          </a:xfrm>
+          <a:prstGeom prst="roundRect">
+            <a:avLst>
+              <a:gd name="adj" fmla="val 20334"/>
             </a:avLst>
           </a:prstGeom>
           <a:solidFill>
@@ -2984,14 +3779,14 @@
       </p:sp>
       <p:sp>
         <p:nvSpPr>
-          <p:cNvPr id="34" name="text-33"/>
+          <p:cNvPr id="65" name="text-64"/>
           <p:cNvSpPr txBox="1"/>
           <p:nvPr/>
         </p:nvSpPr>
         <p:spPr>
           <a:xfrm>
-            <a:off x="9692640" y="9509760"/>
-            <a:ext cx="1499616" cy="1143000"/>
+            <a:off x="9339979" y="9669901"/>
+            <a:ext cx="4243365" cy="449701"/>
           </a:xfrm>
           <a:prstGeom prst="rect">
             <a:avLst/>
@@ -3015,43 +3810,210 @@
                   <a:schemeClr val="tx1"/>
                 </a:solidFill>
               </a:rPr>
-              <a:t>게이트 기반</a:t>
+              <a:t>4. 게이트 기반 잔차 결합</a:t>
             </a:r>
             <a:endParaRPr lang="en-US" sz="1700" dirty="0"/>
           </a:p>
-          <a:p>
-            <a:pPr algn="ctr" indent="0" marL="0">
-              <a:lnSpc>
-                <a:spcPct val="95000"/>
-              </a:lnSpc>
-              <a:buNone/>
-            </a:pPr>
-            <a:r>
-              <a:rPr lang="en-US" sz="1700" b="1" dirty="0">
-                <a:solidFill>
-                  <a:schemeClr val="tx1"/>
-                </a:solidFill>
-              </a:rPr>
-              <a:t>잔차 결합</a:t>
-            </a:r>
-            <a:endParaRPr lang="en-US" sz="1700" dirty="0"/>
-          </a:p>
         </p:txBody>
       </p:sp>
       <p:sp>
         <p:nvSpPr>
-          <p:cNvPr id="35" name="node-34"/>
+          <p:cNvPr id="66" name="arrow-65"/>
           <p:cNvSpPr/>
           <p:nvPr/>
         </p:nvSpPr>
         <p:spPr>
           <a:xfrm>
-            <a:off x="11567160" y="9509760"/>
-            <a:ext cx="1371600" cy="1143000"/>
+            <a:off x="7925539" y="7830215"/>
+            <a:ext cx="365806" cy="0"/>
+          </a:xfrm>
+          <a:prstGeom prst="line">
+            <a:avLst/>
+          </a:prstGeom>
+          <a:noFill/>
+          <a:ln w="22225">
+            <a:solidFill>
+              <a:srgbClr val="14233F"/>
+            </a:solidFill>
+            <a:prstDash val="solid"/>
+          </a:ln>
+        </p:spPr>
+      </p:sp>
+      <p:sp>
+        <p:nvSpPr>
+          <p:cNvPr id="67" name="arrow-66"/>
+          <p:cNvSpPr/>
+          <p:nvPr/>
+        </p:nvSpPr>
+        <p:spPr>
+          <a:xfrm>
+            <a:off x="7925539" y="7830215"/>
+            <a:ext cx="0" cy="2064536"/>
+          </a:xfrm>
+          <a:prstGeom prst="line">
+            <a:avLst/>
+          </a:prstGeom>
+          <a:noFill/>
+          <a:ln w="22225">
+            <a:solidFill>
+              <a:srgbClr val="14233F"/>
+            </a:solidFill>
+            <a:prstDash val="solid"/>
+          </a:ln>
+        </p:spPr>
+      </p:sp>
+      <p:sp>
+        <p:nvSpPr>
+          <p:cNvPr id="68" name="arrow-67"/>
+          <p:cNvSpPr/>
+          <p:nvPr/>
+        </p:nvSpPr>
+        <p:spPr>
+          <a:xfrm>
+            <a:off x="7925539" y="9894751"/>
+            <a:ext cx="1341288" cy="0"/>
+          </a:xfrm>
+          <a:prstGeom prst="line">
+            <a:avLst/>
+          </a:prstGeom>
+          <a:noFill/>
+          <a:ln w="22225">
+            <a:solidFill>
+              <a:srgbClr val="14233F"/>
+            </a:solidFill>
+            <a:prstDash val="solid"/>
+            <a:tailEnd type="triangle"/>
+          </a:ln>
+        </p:spPr>
+      </p:sp>
+      <p:sp>
+        <p:nvSpPr>
+          <p:cNvPr id="69" name="arrow-68"/>
+          <p:cNvSpPr/>
+          <p:nvPr/>
+        </p:nvSpPr>
+        <p:spPr>
+          <a:xfrm>
+            <a:off x="11461661" y="10119602"/>
+            <a:ext cx="0" cy="204410"/>
+          </a:xfrm>
+          <a:prstGeom prst="line">
+            <a:avLst/>
+          </a:prstGeom>
+          <a:noFill/>
+          <a:ln w="22225">
+            <a:solidFill>
+              <a:srgbClr val="14233F"/>
+            </a:solidFill>
+            <a:prstDash val="solid"/>
+            <a:tailEnd type="triangle"/>
+          </a:ln>
+        </p:spPr>
+      </p:sp>
+      <p:sp>
+        <p:nvSpPr>
+          <p:cNvPr id="70" name="node-69"/>
+          <p:cNvSpPr/>
+          <p:nvPr/>
+        </p:nvSpPr>
+        <p:spPr>
+          <a:xfrm>
+            <a:off x="9937471" y="10324011"/>
+            <a:ext cx="3048381" cy="327055"/>
           </a:xfrm>
           <a:prstGeom prst="roundRect">
             <a:avLst>
-              <a:gd name="adj" fmla="val 8000"/>
+              <a:gd name="adj" fmla="val 27959"/>
+            </a:avLst>
+          </a:prstGeom>
+          <a:solidFill>
+            <a:srgbClr val="FFFFFF"/>
+          </a:solidFill>
+          <a:ln w="15875">
+            <a:solidFill>
+              <a:srgbClr val="8A94A6"/>
+            </a:solidFill>
+            <a:prstDash val="solid"/>
+          </a:ln>
+        </p:spPr>
+      </p:sp>
+      <p:sp>
+        <p:nvSpPr>
+          <p:cNvPr id="71" name="text-70"/>
+          <p:cNvSpPr txBox="1"/>
+          <p:nvPr/>
+        </p:nvSpPr>
+        <p:spPr>
+          <a:xfrm>
+            <a:off x="10010623" y="10324011"/>
+            <a:ext cx="2902077" cy="327055"/>
+          </a:xfrm>
+          <a:prstGeom prst="rect">
+            <a:avLst/>
+          </a:prstGeom>
+          <a:noFill/>
+          <a:ln/>
+        </p:spPr>
+        <p:txBody>
+          <a:bodyPr wrap="square" lIns="0" tIns="0" rIns="0" bIns="0" rtlCol="0" anchor="ctr"/>
+          <a:lstStyle/>
+          <a:p>
+            <a:pPr algn="ctr" indent="0" marL="0">
+              <a:lnSpc>
+                <a:spcPct val="95000"/>
+              </a:lnSpc>
+              <a:buNone/>
+            </a:pPr>
+            <a:r>
+              <a:rPr lang="en-US" sz="1550" dirty="0">
+                <a:solidFill>
+                  <a:schemeClr val="tx1"/>
+                </a:solidFill>
+              </a:rPr>
+              <a:t>통합 표현 벡터: 512차원</a:t>
+            </a:r>
+            <a:endParaRPr lang="en-US" sz="1550" dirty="0"/>
+          </a:p>
+        </p:txBody>
+      </p:sp>
+      <p:sp>
+        <p:nvSpPr>
+          <p:cNvPr id="72" name="arrow-71"/>
+          <p:cNvSpPr/>
+          <p:nvPr/>
+        </p:nvSpPr>
+        <p:spPr>
+          <a:xfrm>
+            <a:off x="11461661" y="10651067"/>
+            <a:ext cx="0" cy="204410"/>
+          </a:xfrm>
+          <a:prstGeom prst="line">
+            <a:avLst/>
+          </a:prstGeom>
+          <a:noFill/>
+          <a:ln w="22225">
+            <a:solidFill>
+              <a:srgbClr val="14233F"/>
+            </a:solidFill>
+            <a:prstDash val="solid"/>
+            <a:tailEnd type="triangle"/>
+          </a:ln>
+        </p:spPr>
+      </p:sp>
+      <p:sp>
+        <p:nvSpPr>
+          <p:cNvPr id="73" name="node-72"/>
+          <p:cNvSpPr/>
+          <p:nvPr/>
+        </p:nvSpPr>
+        <p:spPr>
+          <a:xfrm>
+            <a:off x="9266827" y="10855476"/>
+            <a:ext cx="4389669" cy="449701"/>
+          </a:xfrm>
+          <a:prstGeom prst="roundRect">
+            <a:avLst>
+              <a:gd name="adj" fmla="val 20334"/>
             </a:avLst>
           </a:prstGeom>
           <a:solidFill>
@@ -3059,22 +4021,22 @@
           </a:solidFill>
           <a:ln w="15875">
             <a:solidFill>
-              <a:srgbClr val="FBE8D0"/>
-            </a:solidFill>
-            <a:prstDash val="solid"/>
-          </a:ln>
-        </p:spPr>
-      </p:sp>
-      <p:sp>
-        <p:nvSpPr>
-          <p:cNvPr id="36" name="text-35"/>
+              <a:srgbClr val="E3A12F"/>
+            </a:solidFill>
+            <a:prstDash val="solid"/>
+          </a:ln>
+        </p:spPr>
+      </p:sp>
+      <p:sp>
+        <p:nvSpPr>
+          <p:cNvPr id="74" name="text-73"/>
           <p:cNvSpPr txBox="1"/>
           <p:nvPr/>
         </p:nvSpPr>
         <p:spPr>
           <a:xfrm>
-            <a:off x="11640312" y="9509760"/>
-            <a:ext cx="1225296" cy="1143000"/>
+            <a:off x="9339979" y="10855476"/>
+            <a:ext cx="4243365" cy="449701"/>
           </a:xfrm>
           <a:prstGeom prst="rect">
             <a:avLst/>
@@ -3093,65 +4055,55 @@
               <a:buNone/>
             </a:pPr>
             <a:r>
-              <a:rPr lang="en-US" sz="1700" dirty="0">
+              <a:rPr lang="en-US" sz="1700" b="1" dirty="0">
                 <a:solidFill>
                   <a:schemeClr val="tx1"/>
                 </a:solidFill>
               </a:rPr>
-              <a:t>MLP</a:t>
+              <a:t>5. 등락률 예측</a:t>
             </a:r>
             <a:endParaRPr lang="en-US" sz="1700" dirty="0"/>
           </a:p>
-          <a:p>
-            <a:pPr algn="ctr" indent="0" marL="0">
-              <a:lnSpc>
-                <a:spcPct val="95000"/>
-              </a:lnSpc>
-              <a:buNone/>
-            </a:pPr>
-            <a:r>
-              <a:rPr lang="en-US" sz="1700" dirty="0">
-                <a:solidFill>
-                  <a:schemeClr val="tx1"/>
-                </a:solidFill>
-              </a:rPr>
-              <a:t>512→256</a:t>
-            </a:r>
-            <a:endParaRPr lang="en-US" sz="1700" dirty="0"/>
-          </a:p>
-          <a:p>
-            <a:pPr algn="ctr" indent="0" marL="0">
-              <a:lnSpc>
-                <a:spcPct val="95000"/>
-              </a:lnSpc>
-              <a:buNone/>
-            </a:pPr>
-            <a:r>
-              <a:rPr lang="en-US" sz="1700" dirty="0">
-                <a:solidFill>
-                  <a:schemeClr val="tx1"/>
-                </a:solidFill>
-              </a:rPr>
-              <a:t>→64→1</a:t>
-            </a:r>
-            <a:endParaRPr lang="en-US" sz="1700" dirty="0"/>
-          </a:p>
         </p:txBody>
       </p:sp>
       <p:sp>
         <p:nvSpPr>
-          <p:cNvPr id="37" name="node-36"/>
+          <p:cNvPr id="75" name="arrow-74"/>
           <p:cNvSpPr/>
           <p:nvPr/>
         </p:nvSpPr>
         <p:spPr>
           <a:xfrm>
-            <a:off x="13240512" y="9509760"/>
-            <a:ext cx="1280160" cy="1143000"/>
+            <a:off x="11461661" y="11305177"/>
+            <a:ext cx="0" cy="163528"/>
+          </a:xfrm>
+          <a:prstGeom prst="line">
+            <a:avLst/>
+          </a:prstGeom>
+          <a:noFill/>
+          <a:ln w="22225">
+            <a:solidFill>
+              <a:srgbClr val="14233F"/>
+            </a:solidFill>
+            <a:prstDash val="solid"/>
+            <a:tailEnd type="triangle"/>
+          </a:ln>
+        </p:spPr>
+      </p:sp>
+      <p:sp>
+        <p:nvSpPr>
+          <p:cNvPr id="76" name="node-75"/>
+          <p:cNvSpPr/>
+          <p:nvPr/>
+        </p:nvSpPr>
+        <p:spPr>
+          <a:xfrm>
+            <a:off x="10181341" y="11468705"/>
+            <a:ext cx="2560640" cy="327055"/>
           </a:xfrm>
           <a:prstGeom prst="roundRect">
             <a:avLst>
-              <a:gd name="adj" fmla="val 8000"/>
+              <a:gd name="adj" fmla="val 27959"/>
             </a:avLst>
           </a:prstGeom>
           <a:solidFill>
@@ -3167,14 +4119,14 @@
       </p:sp>
       <p:sp>
         <p:nvSpPr>
-          <p:cNvPr id="38" name="text-37"/>
+          <p:cNvPr id="77" name="text-76"/>
           <p:cNvSpPr txBox="1"/>
           <p:nvPr/>
         </p:nvSpPr>
         <p:spPr>
           <a:xfrm>
-            <a:off x="13313664" y="9509760"/>
-            <a:ext cx="1133856" cy="1143000"/>
+            <a:off x="10254493" y="11468705"/>
+            <a:ext cx="2414336" cy="327055"/>
           </a:xfrm>
           <a:prstGeom prst="rect">
             <a:avLst/>
@@ -3193,383 +4145,31 @@
               <a:buNone/>
             </a:pPr>
             <a:r>
-              <a:rPr lang="en-US" sz="1700" b="1" dirty="0">
+              <a:rPr lang="en-US" sz="1550" b="1" dirty="0">
                 <a:solidFill>
                   <a:schemeClr val="bg1"/>
                 </a:solidFill>
               </a:rPr>
-              <a:t>1일 등락률</a:t>
-            </a:r>
-            <a:endParaRPr lang="en-US" sz="1700" dirty="0"/>
-          </a:p>
-          <a:p>
-            <a:pPr algn="ctr" indent="0" marL="0">
-              <a:lnSpc>
-                <a:spcPct val="95000"/>
-              </a:lnSpc>
-              <a:buNone/>
-            </a:pPr>
-            <a:r>
-              <a:rPr lang="en-US" sz="1700" b="1" dirty="0">
-                <a:solidFill>
-                  <a:schemeClr val="bg1"/>
-                </a:solidFill>
-              </a:rPr>
-              <a:t>예측</a:t>
-            </a:r>
-            <a:endParaRPr lang="en-US" sz="1700" dirty="0"/>
+              <a:t>등락률</a:t>
+            </a:r>
+            <a:endParaRPr lang="en-US" sz="1550" dirty="0"/>
           </a:p>
         </p:txBody>
       </p:sp>
       <p:sp>
         <p:nvSpPr>
-          <p:cNvPr id="39" name="arrow-38"/>
+          <p:cNvPr id="78" name="card-77"/>
           <p:cNvSpPr/>
           <p:nvPr/>
         </p:nvSpPr>
         <p:spPr>
           <a:xfrm>
-            <a:off x="2560320" y="9258300"/>
-            <a:ext cx="301752" cy="0"/>
-          </a:xfrm>
-          <a:prstGeom prst="line">
-            <a:avLst/>
-          </a:prstGeom>
-          <a:noFill/>
-          <a:ln w="25400">
-            <a:solidFill>
-              <a:srgbClr val="14233F"/>
-            </a:solidFill>
-            <a:prstDash val="solid"/>
-            <a:tailEnd type="triangle"/>
-          </a:ln>
-        </p:spPr>
-      </p:sp>
-      <p:sp>
-        <p:nvSpPr>
-          <p:cNvPr id="40" name="arrow-39"/>
-          <p:cNvSpPr/>
-          <p:nvPr/>
-        </p:nvSpPr>
-        <p:spPr>
-          <a:xfrm>
-            <a:off x="4828032" y="9258300"/>
-            <a:ext cx="301752" cy="0"/>
-          </a:xfrm>
-          <a:prstGeom prst="line">
-            <a:avLst/>
-          </a:prstGeom>
-          <a:noFill/>
-          <a:ln w="25400">
-            <a:solidFill>
-              <a:srgbClr val="14233F"/>
-            </a:solidFill>
-            <a:prstDash val="solid"/>
-            <a:tailEnd type="triangle"/>
-          </a:ln>
-        </p:spPr>
-      </p:sp>
-      <p:sp>
-        <p:nvSpPr>
-          <p:cNvPr id="41" name="arrow-40"/>
-          <p:cNvSpPr/>
-          <p:nvPr/>
-        </p:nvSpPr>
-        <p:spPr>
-          <a:xfrm>
-            <a:off x="2560320" y="10904220"/>
-            <a:ext cx="301752" cy="0"/>
-          </a:xfrm>
-          <a:prstGeom prst="line">
-            <a:avLst/>
-          </a:prstGeom>
-          <a:noFill/>
-          <a:ln w="25400">
-            <a:solidFill>
-              <a:srgbClr val="14233F"/>
-            </a:solidFill>
-            <a:prstDash val="solid"/>
-            <a:tailEnd type="triangle"/>
-          </a:ln>
-        </p:spPr>
-      </p:sp>
-      <p:sp>
-        <p:nvSpPr>
-          <p:cNvPr id="42" name="arrow-41"/>
-          <p:cNvSpPr/>
-          <p:nvPr/>
-        </p:nvSpPr>
-        <p:spPr>
-          <a:xfrm>
-            <a:off x="4828032" y="10904220"/>
-            <a:ext cx="301752" cy="0"/>
-          </a:xfrm>
-          <a:prstGeom prst="line">
-            <a:avLst/>
-          </a:prstGeom>
-          <a:noFill/>
-          <a:ln w="25400">
-            <a:solidFill>
-              <a:srgbClr val="14233F"/>
-            </a:solidFill>
-            <a:prstDash val="solid"/>
-            <a:tailEnd type="triangle"/>
-          </a:ln>
-        </p:spPr>
-      </p:sp>
-      <p:sp>
-        <p:nvSpPr>
-          <p:cNvPr id="43" name="arrow-42"/>
-          <p:cNvSpPr/>
-          <p:nvPr/>
-        </p:nvSpPr>
-        <p:spPr>
-          <a:xfrm>
-            <a:off x="7095744" y="9258300"/>
-            <a:ext cx="301752" cy="571500"/>
-          </a:xfrm>
-          <a:prstGeom prst="line">
-            <a:avLst/>
-          </a:prstGeom>
-          <a:noFill/>
-          <a:ln w="25400">
-            <a:solidFill>
-              <a:srgbClr val="14233F"/>
-            </a:solidFill>
-            <a:prstDash val="solid"/>
-            <a:tailEnd type="triangle"/>
-          </a:ln>
-        </p:spPr>
-      </p:sp>
-      <p:sp>
-        <p:nvSpPr>
-          <p:cNvPr id="44" name="arrow-43"/>
-          <p:cNvSpPr/>
-          <p:nvPr/>
-        </p:nvSpPr>
-        <p:spPr>
-          <a:xfrm flipV="1">
-            <a:off x="7095744" y="10332720"/>
-            <a:ext cx="301752" cy="571500"/>
-          </a:xfrm>
-          <a:prstGeom prst="line">
-            <a:avLst/>
-          </a:prstGeom>
-          <a:noFill/>
-          <a:ln w="25400">
-            <a:solidFill>
-              <a:srgbClr val="14233F"/>
-            </a:solidFill>
-            <a:prstDash val="solid"/>
-            <a:tailEnd type="triangle"/>
-          </a:ln>
-        </p:spPr>
-      </p:sp>
-      <p:sp>
-        <p:nvSpPr>
-          <p:cNvPr id="45" name="arrow-44"/>
-          <p:cNvSpPr/>
-          <p:nvPr/>
-        </p:nvSpPr>
-        <p:spPr>
-          <a:xfrm>
-            <a:off x="9317736" y="10081260"/>
-            <a:ext cx="301752" cy="0"/>
-          </a:xfrm>
-          <a:prstGeom prst="line">
-            <a:avLst/>
-          </a:prstGeom>
-          <a:noFill/>
-          <a:ln w="25400">
-            <a:solidFill>
-              <a:srgbClr val="14233F"/>
-            </a:solidFill>
-            <a:prstDash val="solid"/>
-            <a:tailEnd type="triangle"/>
-          </a:ln>
-        </p:spPr>
-      </p:sp>
-      <p:sp>
-        <p:nvSpPr>
-          <p:cNvPr id="46" name="arrow-45"/>
-          <p:cNvSpPr/>
-          <p:nvPr/>
-        </p:nvSpPr>
-        <p:spPr>
-          <a:xfrm>
-            <a:off x="11265408" y="10081260"/>
-            <a:ext cx="301752" cy="0"/>
-          </a:xfrm>
-          <a:prstGeom prst="line">
-            <a:avLst/>
-          </a:prstGeom>
-          <a:noFill/>
-          <a:ln w="25400">
-            <a:solidFill>
-              <a:srgbClr val="14233F"/>
-            </a:solidFill>
-            <a:prstDash val="solid"/>
-            <a:tailEnd type="triangle"/>
-          </a:ln>
-        </p:spPr>
-      </p:sp>
-      <p:sp>
-        <p:nvSpPr>
-          <p:cNvPr id="47" name="arrow-46"/>
-          <p:cNvSpPr/>
-          <p:nvPr/>
-        </p:nvSpPr>
-        <p:spPr>
-          <a:xfrm>
-            <a:off x="12938760" y="10081260"/>
-            <a:ext cx="301752" cy="0"/>
-          </a:xfrm>
-          <a:prstGeom prst="line">
-            <a:avLst/>
-          </a:prstGeom>
-          <a:noFill/>
-          <a:ln w="25400">
-            <a:solidFill>
-              <a:srgbClr val="14233F"/>
-            </a:solidFill>
-            <a:prstDash val="solid"/>
-            <a:tailEnd type="triangle"/>
-          </a:ln>
-        </p:spPr>
-      </p:sp>
-      <p:sp>
-        <p:nvSpPr>
-          <p:cNvPr id="48" name="arrow-47"/>
-          <p:cNvSpPr/>
-          <p:nvPr/>
-        </p:nvSpPr>
-        <p:spPr>
-          <a:xfrm>
-            <a:off x="7095744" y="8979408"/>
-            <a:ext cx="3346704" cy="0"/>
-          </a:xfrm>
-          <a:prstGeom prst="line">
-            <a:avLst/>
-          </a:prstGeom>
-          <a:noFill/>
-          <a:ln w="22225">
-            <a:solidFill>
-              <a:srgbClr val="6B7686"/>
-            </a:solidFill>
-            <a:prstDash val="dash"/>
-          </a:ln>
-        </p:spPr>
-      </p:sp>
-      <p:sp>
-        <p:nvSpPr>
-          <p:cNvPr id="49" name="arrow-48"/>
-          <p:cNvSpPr/>
-          <p:nvPr/>
-        </p:nvSpPr>
-        <p:spPr>
-          <a:xfrm>
-            <a:off x="10442448" y="8979408"/>
-            <a:ext cx="0" cy="530352"/>
-          </a:xfrm>
-          <a:prstGeom prst="line">
-            <a:avLst/>
-          </a:prstGeom>
-          <a:noFill/>
-          <a:ln w="22225">
-            <a:solidFill>
-              <a:srgbClr val="6B7686"/>
-            </a:solidFill>
-            <a:prstDash val="dash"/>
-            <a:tailEnd type="triangle"/>
-          </a:ln>
-        </p:spPr>
-      </p:sp>
-      <p:sp>
-        <p:nvSpPr>
-          <p:cNvPr id="50" name="text-49"/>
-          <p:cNvSpPr txBox="1"/>
-          <p:nvPr/>
-        </p:nvSpPr>
-        <p:spPr>
-          <a:xfrm>
-            <a:off x="7488936" y="8595360"/>
-            <a:ext cx="2377440" cy="329184"/>
-          </a:xfrm>
-          <a:prstGeom prst="rect">
-            <a:avLst/>
-          </a:prstGeom>
-          <a:noFill/>
-          <a:ln/>
-        </p:spPr>
-        <p:txBody>
-          <a:bodyPr wrap="square" lIns="0" tIns="0" rIns="0" bIns="0" rtlCol="0" anchor="t"/>
-          <a:lstStyle/>
-          <a:p>
-            <a:pPr indent="0" marL="0">
-              <a:buNone/>
-            </a:pPr>
-            <a:r>
-              <a:rPr lang="en-US" sz="1500" dirty="0">
-                <a:solidFill>
-                  <a:srgbClr val="6B7686"/>
-                </a:solidFill>
-              </a:rPr>
-              <a:t>잔차: 주 신호 보존</a:t>
-            </a:r>
-            <a:endParaRPr lang="en-US" sz="1500" dirty="0"/>
-          </a:p>
-        </p:txBody>
-      </p:sp>
-      <p:sp>
-        <p:nvSpPr>
-          <p:cNvPr id="51" name="text-50"/>
-          <p:cNvSpPr txBox="1"/>
-          <p:nvPr/>
-        </p:nvSpPr>
-        <p:spPr>
-          <a:xfrm>
-            <a:off x="7397496" y="10762488"/>
-            <a:ext cx="4206240" cy="365760"/>
-          </a:xfrm>
-          <a:prstGeom prst="rect">
-            <a:avLst/>
-          </a:prstGeom>
-          <a:noFill/>
-          <a:ln/>
-        </p:spPr>
-        <p:txBody>
-          <a:bodyPr wrap="square" lIns="0" tIns="0" rIns="0" bIns="0" rtlCol="0" anchor="t"/>
-          <a:lstStyle/>
-          <a:p>
-            <a:pPr indent="0" marL="0">
-              <a:buNone/>
-            </a:pPr>
-            <a:r>
-              <a:rPr lang="en-US" sz="1500" dirty="0">
-                <a:solidFill>
-                  <a:srgbClr val="6B7686"/>
-                </a:solidFill>
-              </a:rPr>
-              <a:t>Q = 뉴스 1개, K·V = 30개 시점 (비대칭)</a:t>
-            </a:r>
-            <a:endParaRPr lang="en-US" sz="1500" dirty="0"/>
-          </a:p>
-        </p:txBody>
-      </p:sp>
-      <p:sp>
-        <p:nvSpPr>
-          <p:cNvPr id="52" name="card-51"/>
-          <p:cNvSpPr/>
-          <p:nvPr/>
-        </p:nvSpPr>
-        <p:spPr>
-          <a:xfrm>
-            <a:off x="548640" y="12024360"/>
-            <a:ext cx="6828282" cy="5257800"/>
+            <a:off x="7742682" y="12344400"/>
+            <a:ext cx="6828282" cy="4206240"/>
           </a:xfrm>
           <a:prstGeom prst="roundRect">
             <a:avLst>
-              <a:gd name="adj" fmla="val 3130"/>
+              <a:gd name="adj" fmla="val 3913"/>
             </a:avLst>
           </a:prstGeom>
           <a:solidFill>
@@ -3585,13 +4185,13 @@
       </p:sp>
       <p:sp>
         <p:nvSpPr>
-          <p:cNvPr id="53" name="badge-52"/>
+          <p:cNvPr id="79" name="badge-78"/>
           <p:cNvSpPr/>
           <p:nvPr/>
         </p:nvSpPr>
         <p:spPr>
           <a:xfrm>
-            <a:off x="868680" y="12298680"/>
+            <a:off x="8062722" y="12618720"/>
             <a:ext cx="621792" cy="621792"/>
           </a:xfrm>
           <a:prstGeom prst="ellipse">
@@ -3610,13 +4210,13 @@
       </p:sp>
       <p:sp>
         <p:nvSpPr>
-          <p:cNvPr id="54" name="text-53"/>
+          <p:cNvPr id="80" name="text-79"/>
           <p:cNvSpPr txBox="1"/>
           <p:nvPr/>
         </p:nvSpPr>
         <p:spPr>
           <a:xfrm>
-            <a:off x="868680" y="12298680"/>
+            <a:off x="8062722" y="12618720"/>
             <a:ext cx="621792" cy="621792"/>
           </a:xfrm>
           <a:prstGeom prst="rect">
@@ -3646,13 +4246,13 @@
       </p:sp>
       <p:sp>
         <p:nvSpPr>
-          <p:cNvPr id="55" name="text-54"/>
+          <p:cNvPr id="81" name="text-80"/>
           <p:cNvSpPr txBox="1"/>
           <p:nvPr/>
         </p:nvSpPr>
         <p:spPr>
           <a:xfrm>
-            <a:off x="1645920" y="12298680"/>
+            <a:off x="8839962" y="12618720"/>
             <a:ext cx="5456682" cy="621792"/>
           </a:xfrm>
           <a:prstGeom prst="rect">
@@ -3682,18 +4282,18 @@
       </p:sp>
       <p:sp>
         <p:nvSpPr>
-          <p:cNvPr id="56" name="code-bg-55"/>
+          <p:cNvPr id="82" name="code-bg-81"/>
           <p:cNvSpPr/>
           <p:nvPr/>
         </p:nvSpPr>
         <p:spPr>
           <a:xfrm>
-            <a:off x="914400" y="13167360"/>
-            <a:ext cx="6096762" cy="2743200"/>
+            <a:off x="8108442" y="13487400"/>
+            <a:ext cx="6096762" cy="1965960"/>
           </a:xfrm>
           <a:prstGeom prst="roundRect">
             <a:avLst>
-              <a:gd name="adj" fmla="val 2667"/>
+              <a:gd name="adj" fmla="val 3721"/>
             </a:avLst>
           </a:prstGeom>
           <a:solidFill>
@@ -3709,14 +4309,14 @@
       </p:sp>
       <p:sp>
         <p:nvSpPr>
-          <p:cNvPr id="57" name="text-56"/>
+          <p:cNvPr id="83" name="text-82"/>
           <p:cNvSpPr txBox="1"/>
           <p:nvPr/>
         </p:nvSpPr>
         <p:spPr>
           <a:xfrm>
-            <a:off x="1115568" y="13304520"/>
-            <a:ext cx="5731002" cy="2468880"/>
+            <a:off x="8309610" y="13597128"/>
+            <a:ext cx="5731002" cy="1746504"/>
           </a:xfrm>
           <a:prstGeom prst="rect">
             <a:avLst/>
@@ -3735,17 +4335,17 @@
               <a:buNone/>
             </a:pPr>
             <a:r>
-              <a:rPr lang="en-US" sz="1350" dirty="0">
-                <a:solidFill>
-                  <a:srgbClr val="F2C46D"/>
+              <a:rPr lang="en-US" sz="1300" dirty="0">
+                <a:solidFill>
+                  <a:srgbClr val="8FA3BF"/>
                 </a:solidFill>
                 <a:latin typeface="Courier New" pitchFamily="34" charset="0"/>
                 <a:ea typeface="Courier New" pitchFamily="34" charset="-122"/>
                 <a:cs typeface="Courier New" pitchFamily="34" charset="-120"/>
               </a:rPr>
-              <a:t>class AsymmetricCrossAttention(nn.Module):</a:t>
-            </a:r>
-            <a:endParaRPr lang="en-US" sz="1350" dirty="0"/>
+              <a:t># module 3: asymmetric cross-attention</a:t>
+            </a:r>
+            <a:endParaRPr lang="en-US" sz="1300" dirty="0"/>
           </a:p>
           <a:p>
             <a:pPr indent="0" marL="0">
@@ -3755,7 +4355,7 @@
               <a:buNone/>
             </a:pPr>
             <a:r>
-              <a:rPr lang="en-US" sz="1350" dirty="0">
+              <a:rPr lang="en-US" sz="1300" dirty="0">
                 <a:solidFill>
                   <a:srgbClr val="E8EDF4"/>
                 </a:solidFill>
@@ -3763,9 +4363,9 @@
                 <a:ea typeface="Courier New" pitchFamily="34" charset="-122"/>
                 <a:cs typeface="Courier New" pitchFamily="34" charset="-120"/>
               </a:rPr>
-              <a:t>  def forward(self, news, market):</a:t>
-            </a:r>
-            <a:endParaRPr lang="en-US" sz="1350" dirty="0"/>
+              <a:t>q = self.query_proj(news)           # (B, 512)</a:t>
+            </a:r>
+            <a:endParaRPr lang="en-US" sz="1300" dirty="0"/>
           </a:p>
           <a:p>
             <a:pPr indent="0" marL="0">
@@ -3775,7 +4375,7 @@
               <a:buNone/>
             </a:pPr>
             <a:r>
-              <a:rPr lang="en-US" sz="1350" dirty="0">
+              <a:rPr lang="en-US" sz="1300" dirty="0">
                 <a:solidFill>
                   <a:srgbClr val="E8EDF4"/>
                 </a:solidFill>
@@ -3783,9 +4383,9 @@
                 <a:ea typeface="Courier New" pitchFamily="34" charset="-122"/>
                 <a:cs typeface="Courier New" pitchFamily="34" charset="-120"/>
               </a:rPr>
-              <a:t>    q = self.query_proj(news)     # (B, 512)</a:t>
-            </a:r>
-            <a:endParaRPr lang="en-US" sz="1350" dirty="0"/>
+              <a:t>k = self.key_proj(market)           # (B, 30, 512)</a:t>
+            </a:r>
+            <a:endParaRPr lang="en-US" sz="1300" dirty="0"/>
           </a:p>
           <a:p>
             <a:pPr indent="0" marL="0">
@@ -3795,7 +4395,7 @@
               <a:buNone/>
             </a:pPr>
             <a:r>
-              <a:rPr lang="en-US" sz="1350" dirty="0">
+              <a:rPr lang="en-US" sz="1300" dirty="0">
                 <a:solidFill>
                   <a:srgbClr val="E8EDF4"/>
                 </a:solidFill>
@@ -3803,9 +4403,9 @@
                 <a:ea typeface="Courier New" pitchFamily="34" charset="-122"/>
                 <a:cs typeface="Courier New" pitchFamily="34" charset="-120"/>
               </a:rPr>
-              <a:t>    k = self.key_proj(market)     # (B, 30, 512)</a:t>
-            </a:r>
-            <a:endParaRPr lang="en-US" sz="1350" dirty="0"/>
+              <a:t>v = self.value_proj(market)</a:t>
+            </a:r>
+            <a:endParaRPr lang="en-US" sz="1300" dirty="0"/>
           </a:p>
           <a:p>
             <a:pPr indent="0" marL="0">
@@ -3815,7 +4415,7 @@
               <a:buNone/>
             </a:pPr>
             <a:r>
-              <a:rPr lang="en-US" sz="1350" dirty="0">
+              <a:rPr lang="en-US" sz="1300" dirty="0">
                 <a:solidFill>
                   <a:srgbClr val="E8EDF4"/>
                 </a:solidFill>
@@ -3823,9 +4423,9 @@
                 <a:ea typeface="Courier New" pitchFamily="34" charset="-122"/>
                 <a:cs typeface="Courier New" pitchFamily="34" charset="-120"/>
               </a:rPr>
-              <a:t>    v = self.value_proj(market)</a:t>
-            </a:r>
-            <a:endParaRPr lang="en-US" sz="1350" dirty="0"/>
+              <a:t>w = softmax(einsum('bd,btd-&gt;bt', q, k) * scale)</a:t>
+            </a:r>
+            <a:endParaRPr lang="en-US" sz="1300" dirty="0"/>
           </a:p>
           <a:p>
             <a:pPr indent="0" marL="0">
@@ -3835,7 +4435,7 @@
               <a:buNone/>
             </a:pPr>
             <a:r>
-              <a:rPr lang="en-US" sz="1350" dirty="0">
+              <a:rPr lang="en-US" sz="1300" dirty="0">
                 <a:solidFill>
                   <a:srgbClr val="E8EDF4"/>
                 </a:solidFill>
@@ -3843,9 +4443,9 @@
                 <a:ea typeface="Courier New" pitchFamily="34" charset="-122"/>
                 <a:cs typeface="Courier New" pitchFamily="34" charset="-120"/>
               </a:rPr>
-              <a:t>    s = einsum('bd,btd-&gt;bt', q, k) * self.scale</a:t>
-            </a:r>
-            <a:endParaRPr lang="en-US" sz="1350" dirty="0"/>
+              <a:t>c = einsum('bt,btd-&gt;bd', w, v)      # (B, 512)</a:t>
+            </a:r>
+            <a:endParaRPr lang="en-US" sz="1300" dirty="0"/>
           </a:p>
           <a:p>
             <a:pPr indent="0" marL="0">
@@ -3855,17 +4455,17 @@
               <a:buNone/>
             </a:pPr>
             <a:r>
-              <a:rPr lang="en-US" sz="1350" dirty="0">
-                <a:solidFill>
-                  <a:srgbClr val="E8EDF4"/>
+              <a:rPr lang="en-US" sz="1300" dirty="0">
+                <a:solidFill>
+                  <a:srgbClr val="8FA3BF"/>
                 </a:solidFill>
                 <a:latin typeface="Courier New" pitchFamily="34" charset="0"/>
                 <a:ea typeface="Courier New" pitchFamily="34" charset="-122"/>
                 <a:cs typeface="Courier New" pitchFamily="34" charset="-120"/>
               </a:rPr>
-              <a:t>    w = softmax(s, dim=-1)        # 30-day weights</a:t>
-            </a:r>
-            <a:endParaRPr lang="en-US" sz="1350" dirty="0"/>
+              <a:t># module 4: gated residual fusion</a:t>
+            </a:r>
+            <a:endParaRPr lang="en-US" sz="1300" dirty="0"/>
           </a:p>
           <a:p>
             <a:pPr indent="0" marL="0">
@@ -3875,7 +4475,7 @@
               <a:buNone/>
             </a:pPr>
             <a:r>
-              <a:rPr lang="en-US" sz="1350" dirty="0">
+              <a:rPr lang="en-US" sz="1300" dirty="0">
                 <a:solidFill>
                   <a:srgbClr val="E8EDF4"/>
                 </a:solidFill>
@@ -3883,9 +4483,9 @@
                 <a:ea typeface="Courier New" pitchFamily="34" charset="-122"/>
                 <a:cs typeface="Courier New" pitchFamily="34" charset="-120"/>
               </a:rPr>
-              <a:t>    return einsum('bt,btd-&gt;bd', w, v), w</a:t>
-            </a:r>
-            <a:endParaRPr lang="en-US" sz="1350" dirty="0"/>
+              <a:t>g = sigmoid(self.gate_net(cat([news, c], -1)))</a:t>
+            </a:r>
+            <a:endParaRPr lang="en-US" sz="1300" dirty="0"/>
           </a:p>
           <a:p>
             <a:pPr indent="0" marL="0">
@@ -3895,101 +4495,98 @@
               <a:buNone/>
             </a:pPr>
             <a:r>
-              <a:rPr lang="en-US" sz="1350" dirty="0">
-                <a:solidFill>
-                  <a:srgbClr val="F2C46D"/>
+              <a:rPr lang="en-US" sz="1300" dirty="0">
+                <a:solidFill>
+                  <a:srgbClr val="E8EDF4"/>
                 </a:solidFill>
                 <a:latin typeface="Courier New" pitchFamily="34" charset="0"/>
                 <a:ea typeface="Courier New" pitchFamily="34" charset="-122"/>
                 <a:cs typeface="Courier New" pitchFamily="34" charset="-120"/>
               </a:rPr>
-              <a:t>class GatedResidualFusion(nn.Module):</a:t>
-            </a:r>
-            <a:endParaRPr lang="en-US" sz="1350" dirty="0"/>
-          </a:p>
+              <a:t>h = news + g * c                    # (B, 512)</a:t>
+            </a:r>
+            <a:endParaRPr lang="en-US" sz="1300" dirty="0"/>
+          </a:p>
+        </p:txBody>
+      </p:sp>
+      <p:sp>
+        <p:nvSpPr>
+          <p:cNvPr id="84" name="text-83"/>
+          <p:cNvSpPr txBox="1"/>
+          <p:nvPr/>
+        </p:nvSpPr>
+        <p:spPr>
+          <a:xfrm>
+            <a:off x="8108442" y="15590520"/>
+            <a:ext cx="6096762" cy="685800"/>
+          </a:xfrm>
+          <a:prstGeom prst="rect">
+            <a:avLst/>
+          </a:prstGeom>
+          <a:noFill/>
+          <a:ln/>
+        </p:spPr>
+        <p:txBody>
+          <a:bodyPr wrap="square" lIns="0" tIns="0" rIns="0" bIns="0" rtlCol="0" anchor="t"/>
+          <a:lstStyle/>
           <a:p>
             <a:pPr indent="0" marL="0">
               <a:lnSpc>
-                <a:spcPct val="100000"/>
-              </a:lnSpc>
-              <a:buNone/>
-            </a:pPr>
-            <a:r>
-              <a:rPr lang="en-US" sz="1350" dirty="0">
-                <a:solidFill>
-                  <a:srgbClr val="E8EDF4"/>
+                <a:spcPct val="105000"/>
+              </a:lnSpc>
+              <a:spcAft>
+                <a:spcPts val="400"/>
+              </a:spcAft>
+              <a:buNone/>
+            </a:pPr>
+            <a:r>
+              <a:rPr lang="en-US" sz="1500" b="1" dirty="0">
+                <a:solidFill>
+                  <a:schemeClr val="accent1"/>
+                </a:solidFill>
+              </a:rPr>
+              <a:t>GitHub  </a:t>
+            </a:r>
+            <a:pPr indent="0" marL="0">
+              <a:lnSpc>
+                <a:spcPct val="105000"/>
+              </a:lnSpc>
+              <a:spcAft>
+                <a:spcPts val="400"/>
+              </a:spcAft>
+              <a:buNone/>
+            </a:pPr>
+            <a:r>
+              <a:rPr lang="en-US" sz="1500" dirty="0">
+                <a:solidFill>
+                  <a:schemeClr val="accent3"/>
+                </a:solidFill>
+              </a:rPr>
+              <a:t>github.com/kimsangmin1234/jolup</a:t>
+            </a:r>
+            <a:endParaRPr lang="en-US" sz="1500" dirty="0"/>
+          </a:p>
+          <a:p>
+            <a:pPr indent="0" marL="0">
+              <a:lnSpc>
+                <a:spcPct val="105000"/>
+              </a:lnSpc>
+              <a:spcAft>
+                <a:spcPts val="400"/>
+              </a:spcAft>
+              <a:buNone/>
+            </a:pPr>
+            <a:r>
+              <a:rPr lang="en-US" sz="1500" b="1" dirty="0">
+                <a:solidFill>
+                  <a:schemeClr val="accent1"/>
                 </a:solidFill>
                 <a:latin typeface="Courier New" pitchFamily="34" charset="0"/>
                 <a:ea typeface="Courier New" pitchFamily="34" charset="-122"/>
                 <a:cs typeface="Courier New" pitchFamily="34" charset="-120"/>
               </a:rPr>
-              <a:t>  def forward(self, p, c):</a:t>
-            </a:r>
-            <a:endParaRPr lang="en-US" sz="1350" dirty="0"/>
-          </a:p>
-          <a:p>
-            <a:pPr indent="0" marL="0">
-              <a:lnSpc>
-                <a:spcPct val="100000"/>
-              </a:lnSpc>
-              <a:buNone/>
-            </a:pPr>
-            <a:r>
-              <a:rPr lang="en-US" sz="1350" dirty="0">
-                <a:solidFill>
-                  <a:srgbClr val="E8EDF4"/>
-                </a:solidFill>
-                <a:latin typeface="Courier New" pitchFamily="34" charset="0"/>
-                <a:ea typeface="Courier New" pitchFamily="34" charset="-122"/>
-                <a:cs typeface="Courier New" pitchFamily="34" charset="-120"/>
-              </a:rPr>
-              <a:t>    g = sigmoid(self.gate_net(cat([p, c], -1)))</a:t>
-            </a:r>
-            <a:endParaRPr lang="en-US" sz="1350" dirty="0"/>
-          </a:p>
-          <a:p>
-            <a:pPr indent="0" marL="0">
-              <a:lnSpc>
-                <a:spcPct val="100000"/>
-              </a:lnSpc>
-              <a:buNone/>
-            </a:pPr>
-            <a:r>
-              <a:rPr lang="en-US" sz="1350" dirty="0">
-                <a:solidFill>
-                  <a:srgbClr val="E8EDF4"/>
-                </a:solidFill>
-                <a:latin typeface="Courier New" pitchFamily="34" charset="0"/>
-                <a:ea typeface="Courier New" pitchFamily="34" charset="-122"/>
-                <a:cs typeface="Courier New" pitchFamily="34" charset="-120"/>
-              </a:rPr>
-              <a:t>    return p + g * c, g</a:t>
-            </a:r>
-            <a:endParaRPr lang="en-US" sz="1350" dirty="0"/>
-          </a:p>
-        </p:txBody>
-      </p:sp>
-      <p:sp>
-        <p:nvSpPr>
-          <p:cNvPr id="58" name="text-57"/>
-          <p:cNvSpPr txBox="1"/>
-          <p:nvPr/>
-        </p:nvSpPr>
-        <p:spPr>
-          <a:xfrm>
-            <a:off x="914400" y="16093440"/>
-            <a:ext cx="6096762" cy="914400"/>
-          </a:xfrm>
-          <a:prstGeom prst="rect">
-            <a:avLst/>
-          </a:prstGeom>
-          <a:noFill/>
-          <a:ln/>
-        </p:spPr>
-        <p:txBody>
-          <a:bodyPr wrap="square" lIns="0" tIns="0" rIns="0" bIns="0" rtlCol="0" anchor="t"/>
-          <a:lstStyle/>
-          <a:p>
+              <a:t>modules/  </a:t>
+            </a:r>
             <a:pPr indent="0" marL="0">
               <a:lnSpc>
                 <a:spcPct val="105000"/>
@@ -4000,128 +4597,31 @@
               <a:buNone/>
             </a:pPr>
             <a:r>
-              <a:rPr lang="en-US" sz="1500" b="1" dirty="0">
-                <a:solidFill>
-                  <a:schemeClr val="accent1"/>
-                </a:solidFill>
-              </a:rPr>
-              <a:t>GitHub  </a:t>
-            </a:r>
-            <a:pPr indent="0" marL="0">
-              <a:lnSpc>
-                <a:spcPct val="105000"/>
-              </a:lnSpc>
-              <a:spcAft>
-                <a:spcPts val="400"/>
-              </a:spcAft>
-              <a:buNone/>
-            </a:pPr>
-            <a:r>
               <a:rPr lang="en-US" sz="1500" dirty="0">
                 <a:solidFill>
-                  <a:schemeClr val="accent3"/>
-                </a:solidFill>
-              </a:rPr>
-              <a:t>github.com/kimsangmin1234/jolup</a:t>
+                  <a:schemeClr val="tx1"/>
+                </a:solidFill>
+              </a:rPr>
+              <a:t>논문 모듈 1~5 (news_encoder, tcn_encoder, cross_attention, gated_fusion, return_predictor)</a:t>
             </a:r>
             <a:endParaRPr lang="en-US" sz="1500" dirty="0"/>
           </a:p>
-          <a:p>
-            <a:pPr indent="0" marL="0">
-              <a:lnSpc>
-                <a:spcPct val="105000"/>
-              </a:lnSpc>
-              <a:spcAft>
-                <a:spcPts val="400"/>
-              </a:spcAft>
-              <a:buNone/>
-            </a:pPr>
-            <a:r>
-              <a:rPr lang="en-US" sz="1500" b="1" dirty="0">
-                <a:solidFill>
-                  <a:schemeClr val="accent1"/>
-                </a:solidFill>
-                <a:latin typeface="Courier New" pitchFamily="34" charset="0"/>
-                <a:ea typeface="Courier New" pitchFamily="34" charset="-122"/>
-                <a:cs typeface="Courier New" pitchFamily="34" charset="-120"/>
-              </a:rPr>
-              <a:t>modules/  </a:t>
-            </a:r>
-            <a:pPr indent="0" marL="0">
-              <a:lnSpc>
-                <a:spcPct val="105000"/>
-              </a:lnSpc>
-              <a:spcAft>
-                <a:spcPts val="400"/>
-              </a:spcAft>
-              <a:buNone/>
-            </a:pPr>
-            <a:r>
-              <a:rPr lang="en-US" sz="1500" dirty="0">
-                <a:solidFill>
-                  <a:schemeClr val="tx1"/>
-                </a:solidFill>
-              </a:rPr>
-              <a:t>논문 모듈 1~5 (news_encoder, tcn_encoder, cross_attention, gated_fusion, return_predictor)</a:t>
-            </a:r>
-            <a:endParaRPr lang="en-US" sz="1500" dirty="0"/>
-          </a:p>
-          <a:p>
-            <a:pPr indent="0" marL="0">
-              <a:lnSpc>
-                <a:spcPct val="105000"/>
-              </a:lnSpc>
-              <a:spcAft>
-                <a:spcPts val="400"/>
-              </a:spcAft>
-              <a:buNone/>
-            </a:pPr>
-            <a:r>
-              <a:rPr lang="en-US" sz="1500" b="1" dirty="0">
-                <a:solidFill>
-                  <a:schemeClr val="accent1"/>
-                </a:solidFill>
-                <a:latin typeface="Courier New" pitchFamily="34" charset="0"/>
-                <a:ea typeface="Courier New" pitchFamily="34" charset="-122"/>
-                <a:cs typeface="Courier New" pitchFamily="34" charset="-120"/>
-              </a:rPr>
-              <a:t>run_edt_suite2.py  </a:t>
-            </a:r>
-            <a:pPr indent="0" marL="0">
-              <a:lnSpc>
-                <a:spcPct val="105000"/>
-              </a:lnSpc>
-              <a:spcAft>
-                <a:spcPts val="400"/>
-              </a:spcAft>
-              <a:buNone/>
-            </a:pPr>
-            <a:r>
-              <a:rPr lang="en-US" sz="1500" dirty="0">
-                <a:solidFill>
-                  <a:schemeClr val="tx1"/>
-                </a:solidFill>
-              </a:rPr>
-              <a:t>EDT 표본 외 학습 · 평가</a:t>
-            </a:r>
-            <a:endParaRPr lang="en-US" sz="1500" dirty="0"/>
-          </a:p>
         </p:txBody>
       </p:sp>
       <p:sp>
         <p:nvSpPr>
-          <p:cNvPr id="59" name="card-58"/>
+          <p:cNvPr id="85" name="card-84"/>
           <p:cNvSpPr/>
           <p:nvPr/>
         </p:nvSpPr>
         <p:spPr>
           <a:xfrm>
-            <a:off x="548640" y="17556480"/>
-            <a:ext cx="6828282" cy="3370478"/>
+            <a:off x="7742682" y="16824960"/>
+            <a:ext cx="6828282" cy="4101998"/>
           </a:xfrm>
           <a:prstGeom prst="roundRect">
             <a:avLst>
-              <a:gd name="adj" fmla="val 4883"/>
+              <a:gd name="adj" fmla="val 4012"/>
             </a:avLst>
           </a:prstGeom>
           <a:solidFill>
@@ -4137,13 +4637,13 @@
       </p:sp>
       <p:sp>
         <p:nvSpPr>
-          <p:cNvPr id="60" name="badge-59"/>
+          <p:cNvPr id="86" name="badge-85"/>
           <p:cNvSpPr/>
           <p:nvPr/>
         </p:nvSpPr>
         <p:spPr>
           <a:xfrm>
-            <a:off x="868680" y="17830800"/>
+            <a:off x="8062722" y="17099280"/>
             <a:ext cx="621792" cy="621792"/>
           </a:xfrm>
           <a:prstGeom prst="ellipse">
@@ -4162,13 +4662,13 @@
       </p:sp>
       <p:sp>
         <p:nvSpPr>
-          <p:cNvPr id="61" name="text-60"/>
+          <p:cNvPr id="87" name="text-86"/>
           <p:cNvSpPr txBox="1"/>
           <p:nvPr/>
         </p:nvSpPr>
         <p:spPr>
           <a:xfrm>
-            <a:off x="868680" y="17830800"/>
+            <a:off x="8062722" y="17099280"/>
             <a:ext cx="621792" cy="621792"/>
           </a:xfrm>
           <a:prstGeom prst="rect">
@@ -4198,13 +4698,13 @@
       </p:sp>
       <p:sp>
         <p:nvSpPr>
-          <p:cNvPr id="62" name="text-61"/>
+          <p:cNvPr id="88" name="text-87"/>
           <p:cNvSpPr txBox="1"/>
           <p:nvPr/>
         </p:nvSpPr>
         <p:spPr>
           <a:xfrm>
-            <a:off x="1645920" y="17830800"/>
+            <a:off x="8839962" y="17099280"/>
             <a:ext cx="5456682" cy="621792"/>
           </a:xfrm>
           <a:prstGeom prst="rect">
@@ -4234,14 +4734,14 @@
       </p:sp>
       <p:sp>
         <p:nvSpPr>
-          <p:cNvPr id="63" name="text-62"/>
+          <p:cNvPr id="89" name="text-88"/>
           <p:cNvSpPr txBox="1"/>
           <p:nvPr/>
         </p:nvSpPr>
         <p:spPr>
           <a:xfrm>
-            <a:off x="914400" y="18699480"/>
-            <a:ext cx="6096762" cy="1953158"/>
+            <a:off x="8108442" y="17967960"/>
+            <a:ext cx="6096762" cy="2684678"/>
           </a:xfrm>
           <a:prstGeom prst="rect">
             <a:avLst/>
@@ -4261,7 +4761,7 @@
               <a:buChar char="•"/>
             </a:pPr>
             <a:r>
-              <a:rPr lang="en-US" sz="1750" b="1" dirty="0">
+              <a:rPr lang="en-US" sz="1900" b="1" dirty="0">
                 <a:solidFill>
                   <a:schemeClr val="accent1"/>
                 </a:solidFill>
@@ -4273,19 +4773,19 @@
                 <a:spcPct val="105000"/>
               </a:lnSpc>
               <a:spcAft>
-                <a:spcPts val="500"/>
+                <a:spcPts val="800"/>
               </a:spcAft>
               <a:buNone/>
             </a:pPr>
             <a:r>
-              <a:rPr lang="en-US" sz="1750" dirty="0">
+              <a:rPr lang="en-US" sz="1900" dirty="0">
                 <a:solidFill>
                   <a:schemeClr val="tx1"/>
                 </a:solidFill>
               </a:rPr>
               <a:t>감성 점수만으로는 예측력이 없지만(−0.006), 제안 구조는 유의한 예측력(0.060)</a:t>
             </a:r>
-            <a:endParaRPr lang="en-US" sz="1750" dirty="0"/>
+            <a:endParaRPr lang="en-US" sz="1900" dirty="0"/>
           </a:p>
           <a:p>
             <a:pPr marL="228600" indent="-228600">
@@ -4296,7 +4796,7 @@
               <a:buChar char="•"/>
             </a:pPr>
             <a:r>
-              <a:rPr lang="en-US" sz="1750" b="1" dirty="0">
+              <a:rPr lang="en-US" sz="1900" b="1" dirty="0">
                 <a:solidFill>
                   <a:schemeClr val="accent1"/>
                 </a:solidFill>
@@ -4308,19 +4808,19 @@
                 <a:spcPct val="105000"/>
               </a:lnSpc>
               <a:spcAft>
-                <a:spcPts val="500"/>
+                <a:spcPts val="800"/>
               </a:spcAft>
               <a:buNone/>
             </a:pPr>
             <a:r>
-              <a:rPr lang="en-US" sz="1750" dirty="0">
+              <a:rPr lang="en-US" sz="1900" dirty="0">
                 <a:solidFill>
                   <a:schemeClr val="tx1"/>
                 </a:solidFill>
               </a:rPr>
               <a:t>최근 구간 약화(0.033), 거래비용 반영 시 수익 소멸, 어텐션은 30일에 고르게 분포</a:t>
             </a:r>
-            <a:endParaRPr lang="en-US" sz="1750" dirty="0"/>
+            <a:endParaRPr lang="en-US" sz="1900" dirty="0"/>
           </a:p>
           <a:p>
             <a:pPr marL="228600" indent="-228600">
@@ -4331,7 +4831,7 @@
               <a:buChar char="•"/>
             </a:pPr>
             <a:r>
-              <a:rPr lang="en-US" sz="1750" b="1" dirty="0">
+              <a:rPr lang="en-US" sz="1900" b="1" dirty="0">
                 <a:solidFill>
                   <a:schemeClr val="accent1"/>
                 </a:solidFill>
@@ -4343,32 +4843,32 @@
                 <a:spcPct val="105000"/>
               </a:lnSpc>
               <a:spcAft>
-                <a:spcPts val="500"/>
+                <a:spcPts val="800"/>
               </a:spcAft>
               <a:buNone/>
             </a:pPr>
             <a:r>
-              <a:rPr lang="en-US" sz="1750" dirty="0">
+              <a:rPr lang="en-US" sz="1900" dirty="0">
                 <a:solidFill>
                   <a:schemeClr val="tx1"/>
                 </a:solidFill>
               </a:rPr>
               <a:t>입력 확장·앙상블로 0.092까지 개선 확인 → 비용을 고려한 전략 검증</a:t>
             </a:r>
-            <a:endParaRPr lang="en-US" sz="1750" dirty="0"/>
+            <a:endParaRPr lang="en-US" sz="1900" dirty="0"/>
           </a:p>
         </p:txBody>
       </p:sp>
       <p:sp>
         <p:nvSpPr>
-          <p:cNvPr id="64" name="card-63"/>
+          <p:cNvPr id="90" name="card-89"/>
           <p:cNvSpPr/>
           <p:nvPr/>
         </p:nvSpPr>
         <p:spPr>
           <a:xfrm>
-            <a:off x="7742682" y="12024360"/>
-            <a:ext cx="6828282" cy="8902598"/>
+            <a:off x="548640" y="12344400"/>
+            <a:ext cx="6828282" cy="8582558"/>
           </a:xfrm>
           <a:prstGeom prst="roundRect">
             <a:avLst>
@@ -4388,13 +4888,13 @@
       </p:sp>
       <p:sp>
         <p:nvSpPr>
-          <p:cNvPr id="65" name="badge-64"/>
+          <p:cNvPr id="91" name="badge-90"/>
           <p:cNvSpPr/>
           <p:nvPr/>
         </p:nvSpPr>
         <p:spPr>
           <a:xfrm>
-            <a:off x="8062722" y="12298680"/>
+            <a:off x="868680" y="12618720"/>
             <a:ext cx="621792" cy="621792"/>
           </a:xfrm>
           <a:prstGeom prst="ellipse">
@@ -4413,13 +4913,13 @@
       </p:sp>
       <p:sp>
         <p:nvSpPr>
-          <p:cNvPr id="66" name="text-65"/>
+          <p:cNvPr id="92" name="text-91"/>
           <p:cNvSpPr txBox="1"/>
           <p:nvPr/>
         </p:nvSpPr>
         <p:spPr>
           <a:xfrm>
-            <a:off x="8062722" y="12298680"/>
+            <a:off x="868680" y="12618720"/>
             <a:ext cx="621792" cy="621792"/>
           </a:xfrm>
           <a:prstGeom prst="rect">
@@ -4449,13 +4949,13 @@
       </p:sp>
       <p:sp>
         <p:nvSpPr>
-          <p:cNvPr id="67" name="text-66"/>
+          <p:cNvPr id="93" name="text-92"/>
           <p:cNvSpPr txBox="1"/>
           <p:nvPr/>
         </p:nvSpPr>
         <p:spPr>
           <a:xfrm>
-            <a:off x="8839962" y="12298680"/>
+            <a:off x="1645920" y="12618720"/>
             <a:ext cx="5456682" cy="621792"/>
           </a:xfrm>
           <a:prstGeom prst="rect">
@@ -4485,13 +4985,13 @@
       </p:sp>
       <p:sp>
         <p:nvSpPr>
-          <p:cNvPr id="68" name="text-67"/>
+          <p:cNvPr id="94" name="text-93"/>
           <p:cNvSpPr txBox="1"/>
           <p:nvPr/>
         </p:nvSpPr>
         <p:spPr>
           <a:xfrm>
-            <a:off x="8108442" y="13167360"/>
+            <a:off x="914400" y="13487400"/>
             <a:ext cx="6096762" cy="685800"/>
           </a:xfrm>
           <a:prstGeom prst="rect">
@@ -4569,13 +5069,13 @@
       </p:sp>
       <p:sp>
         <p:nvSpPr>
-          <p:cNvPr id="69" name="stat-68"/>
+          <p:cNvPr id="95" name="stat-94"/>
           <p:cNvSpPr/>
           <p:nvPr/>
         </p:nvSpPr>
         <p:spPr>
           <a:xfrm>
-            <a:off x="8108442" y="13990320"/>
+            <a:off x="914400" y="14310360"/>
             <a:ext cx="1910334" cy="1645920"/>
           </a:xfrm>
           <a:prstGeom prst="roundRect">
@@ -4596,13 +5096,13 @@
       </p:sp>
       <p:sp>
         <p:nvSpPr>
-          <p:cNvPr id="70" name="text-69"/>
+          <p:cNvPr id="96" name="text-95"/>
           <p:cNvSpPr txBox="1"/>
           <p:nvPr/>
         </p:nvSpPr>
         <p:spPr>
           <a:xfrm>
-            <a:off x="8108442" y="14100048"/>
+            <a:off x="914400" y="14420088"/>
             <a:ext cx="1910334" cy="731520"/>
           </a:xfrm>
           <a:prstGeom prst="rect">
@@ -4632,13 +5132,13 @@
       </p:sp>
       <p:sp>
         <p:nvSpPr>
-          <p:cNvPr id="71" name="text-70"/>
+          <p:cNvPr id="97" name="text-96"/>
           <p:cNvSpPr txBox="1"/>
           <p:nvPr/>
         </p:nvSpPr>
         <p:spPr>
           <a:xfrm>
-            <a:off x="8181594" y="14831568"/>
+            <a:off x="987552" y="15151608"/>
             <a:ext cx="1764030" cy="731520"/>
           </a:xfrm>
           <a:prstGeom prst="rect">
@@ -4682,13 +5182,13 @@
       </p:sp>
       <p:sp>
         <p:nvSpPr>
-          <p:cNvPr id="72" name="stat-71"/>
+          <p:cNvPr id="98" name="stat-97"/>
           <p:cNvSpPr/>
           <p:nvPr/>
         </p:nvSpPr>
         <p:spPr>
           <a:xfrm>
-            <a:off x="10201656" y="13990320"/>
+            <a:off x="3007614" y="14310360"/>
             <a:ext cx="1910334" cy="1645920"/>
           </a:xfrm>
           <a:prstGeom prst="roundRect">
@@ -4709,13 +5209,13 @@
       </p:sp>
       <p:sp>
         <p:nvSpPr>
-          <p:cNvPr id="73" name="text-72"/>
+          <p:cNvPr id="99" name="text-98"/>
           <p:cNvSpPr txBox="1"/>
           <p:nvPr/>
         </p:nvSpPr>
         <p:spPr>
           <a:xfrm>
-            <a:off x="10201656" y="14100048"/>
+            <a:off x="3007614" y="14420088"/>
             <a:ext cx="1910334" cy="731520"/>
           </a:xfrm>
           <a:prstGeom prst="rect">
@@ -4745,13 +5245,13 @@
       </p:sp>
       <p:sp>
         <p:nvSpPr>
-          <p:cNvPr id="74" name="text-73"/>
+          <p:cNvPr id="100" name="text-99"/>
           <p:cNvSpPr txBox="1"/>
           <p:nvPr/>
         </p:nvSpPr>
         <p:spPr>
           <a:xfrm>
-            <a:off x="10274808" y="14831568"/>
+            <a:off x="3080766" y="15151608"/>
             <a:ext cx="1764030" cy="731520"/>
           </a:xfrm>
           <a:prstGeom prst="rect">
@@ -4795,13 +5295,13 @@
       </p:sp>
       <p:sp>
         <p:nvSpPr>
-          <p:cNvPr id="75" name="stat-74"/>
+          <p:cNvPr id="101" name="stat-100"/>
           <p:cNvSpPr/>
           <p:nvPr/>
         </p:nvSpPr>
         <p:spPr>
           <a:xfrm>
-            <a:off x="12294870" y="13990320"/>
+            <a:off x="5100828" y="14310360"/>
             <a:ext cx="1910334" cy="1645920"/>
           </a:xfrm>
           <a:prstGeom prst="roundRect">
@@ -4822,13 +5322,13 @@
       </p:sp>
       <p:sp>
         <p:nvSpPr>
-          <p:cNvPr id="76" name="text-75"/>
+          <p:cNvPr id="102" name="text-101"/>
           <p:cNvSpPr txBox="1"/>
           <p:nvPr/>
         </p:nvSpPr>
         <p:spPr>
           <a:xfrm>
-            <a:off x="12294870" y="14100048"/>
+            <a:off x="5100828" y="14420088"/>
             <a:ext cx="1910334" cy="731520"/>
           </a:xfrm>
           <a:prstGeom prst="rect">
@@ -4858,13 +5358,13 @@
       </p:sp>
       <p:sp>
         <p:nvSpPr>
-          <p:cNvPr id="77" name="text-76"/>
+          <p:cNvPr id="103" name="text-102"/>
           <p:cNvSpPr txBox="1"/>
           <p:nvPr/>
         </p:nvSpPr>
         <p:spPr>
           <a:xfrm>
-            <a:off x="12368022" y="14831568"/>
+            <a:off x="5173980" y="15151608"/>
             <a:ext cx="1764030" cy="731520"/>
           </a:xfrm>
           <a:prstGeom prst="rect">
@@ -4908,13 +5408,13 @@
       </p:sp>
       <p:graphicFrame>
         <p:nvGraphicFramePr>
-          <p:cNvPr id="78" name="chart-ic" descr=""/>
+          <p:cNvPr id="104" name="chart-ic" descr=""/>
           <p:cNvGraphicFramePr/>
           <p:nvPr/>
         </p:nvGraphicFramePr>
         <p:xfrm>
-          <a:off x="8108442" y="15819120"/>
-          <a:ext cx="6096762" cy="2606040"/>
+          <a:off x="914400" y="16139160"/>
+          <a:ext cx="6096762" cy="2377440"/>
         </p:xfrm>
         <a:graphic xmlns:a="http://schemas.openxmlformats.org/drawingml/2006/main">
           <a:graphicData uri="http://schemas.openxmlformats.org/drawingml/2006/chart">
@@ -4924,13 +5424,13 @@
       </p:graphicFrame>
       <p:graphicFrame>
         <p:nvGraphicFramePr>
-          <p:cNvPr id="79" name="chart-window" descr=""/>
+          <p:cNvPr id="105" name="chart-window" descr=""/>
           <p:cNvGraphicFramePr/>
           <p:nvPr/>
         </p:nvGraphicFramePr>
         <p:xfrm>
-          <a:off x="8108442" y="18562320"/>
-          <a:ext cx="6096762" cy="2136038"/>
+          <a:off x="914400" y="18653760"/>
+          <a:ext cx="6096762" cy="2044598"/>
         </p:xfrm>
         <a:graphic xmlns:a="http://schemas.openxmlformats.org/drawingml/2006/main">
           <a:graphicData uri="http://schemas.openxmlformats.org/drawingml/2006/chart">

--- a/docs/exhibition/패널_A_논문구조.pptx
+++ b/docs/exhibition/패널_A_논문구조.pptx
@@ -107,7 +107,7 @@
   <p:extLst>
     <p:ext uri="{521415D9-36F7-43E2-AB2F-B90AF26B5E84}">
       <p14:sectionLst xmlns:p14="http://schemas.microsoft.com/office/powerpoint/2010/main">
-        <p14:section name="패널" id="{41035ff9-6b9b-1f78-9c35-54327370c614}">
+        <p14:section name="패널" id="{65afbba4-acb6-5467-9a9e-e70df83f27aa}">
           <p14:sldIdLst>
             <p14:sldId id="256"/>
           </p14:sldIdLst>
@@ -4165,11 +4165,11 @@
         <p:spPr>
           <a:xfrm>
             <a:off x="7742682" y="12344400"/>
-            <a:ext cx="6828282" cy="4206240"/>
+            <a:ext cx="6828282" cy="4663440"/>
           </a:xfrm>
           <a:prstGeom prst="roundRect">
             <a:avLst>
-              <a:gd name="adj" fmla="val 3913"/>
+              <a:gd name="adj" fmla="val 3529"/>
             </a:avLst>
           </a:prstGeom>
           <a:solidFill>
@@ -4280,43 +4280,40 @@
           </a:p>
         </p:txBody>
       </p:sp>
-      <p:sp>
-        <p:nvSpPr>
-          <p:cNvPr id="82" name="code-bg-81"/>
-          <p:cNvSpPr/>
-          <p:nvPr/>
-        </p:nvSpPr>
+      <p:pic>
+        <p:nvPicPr>
+          <p:cNvPr id="82" name="qr" descr="GitHub 저장소 QR 코드">    </p:cNvPr>
+          <p:cNvPicPr>
+            <a:picLocks noChangeAspect="1"/>
+          </p:cNvPicPr>
+          <p:nvPr/>
+        </p:nvPicPr>
+        <p:blipFill>
+          <a:blip r:embed="rId1"/>
+          <a:stretch>
+            <a:fillRect/>
+          </a:stretch>
+        </p:blipFill>
         <p:spPr>
           <a:xfrm>
             <a:off x="8108442" y="13487400"/>
-            <a:ext cx="6096762" cy="1965960"/>
-          </a:xfrm>
-          <a:prstGeom prst="roundRect">
-            <a:avLst>
-              <a:gd name="adj" fmla="val 3721"/>
-            </a:avLst>
-          </a:prstGeom>
-          <a:solidFill>
-            <a:srgbClr val="1E2533"/>
-          </a:solidFill>
-          <a:ln w="12700">
-            <a:solidFill>
-              <a:srgbClr val="1E2533"/>
-            </a:solidFill>
-            <a:prstDash val="solid"/>
-          </a:ln>
-        </p:spPr>
-      </p:sp>
-      <p:sp>
-        <p:nvSpPr>
-          <p:cNvPr id="83" name="text-82"/>
+            <a:ext cx="1371600" cy="1371600"/>
+          </a:xfrm>
+          <a:prstGeom prst="rect">
+            <a:avLst/>
+          </a:prstGeom>
+        </p:spPr>
+      </p:pic>
+      <p:sp>
+        <p:nvSpPr>
+          <p:cNvPr id="83" name="text-81"/>
           <p:cNvSpPr txBox="1"/>
           <p:nvPr/>
         </p:nvSpPr>
         <p:spPr>
           <a:xfrm>
-            <a:off x="8309610" y="13597128"/>
-            <a:ext cx="5731002" cy="1746504"/>
+            <a:off x="9754362" y="13487400"/>
+            <a:ext cx="4450842" cy="1371600"/>
           </a:xfrm>
           <a:prstGeom prst="rect">
             <a:avLst/>
@@ -4329,299 +4326,901 @@
           <a:lstStyle/>
           <a:p>
             <a:pPr indent="0" marL="0">
-              <a:lnSpc>
-                <a:spcPct val="100000"/>
-              </a:lnSpc>
-              <a:buNone/>
-            </a:pPr>
-            <a:r>
-              <a:rPr lang="en-US" sz="1300" dirty="0">
-                <a:solidFill>
-                  <a:srgbClr val="8FA3BF"/>
-                </a:solidFill>
-                <a:latin typeface="Courier New" pitchFamily="34" charset="0"/>
-                <a:ea typeface="Courier New" pitchFamily="34" charset="-122"/>
-                <a:cs typeface="Courier New" pitchFamily="34" charset="-120"/>
-              </a:rPr>
-              <a:t># module 3: asymmetric cross-attention</a:t>
-            </a:r>
-            <a:endParaRPr lang="en-US" sz="1300" dirty="0"/>
+              <a:spcAft>
+                <a:spcPts val="600"/>
+              </a:spcAft>
+              <a:buNone/>
+            </a:pPr>
+            <a:r>
+              <a:rPr lang="en-US" sz="1700" b="1" dirty="0">
+                <a:solidFill>
+                  <a:schemeClr val="accent1"/>
+                </a:solidFill>
+              </a:rPr>
+              <a:t>GitHub 저장소</a:t>
+            </a:r>
+            <a:endParaRPr lang="en-US" sz="1700" dirty="0"/>
           </a:p>
           <a:p>
             <a:pPr indent="0" marL="0">
-              <a:lnSpc>
-                <a:spcPct val="100000"/>
-              </a:lnSpc>
-              <a:buNone/>
-            </a:pPr>
-            <a:r>
-              <a:rPr lang="en-US" sz="1300" dirty="0">
-                <a:solidFill>
-                  <a:srgbClr val="E8EDF4"/>
-                </a:solidFill>
-                <a:latin typeface="Courier New" pitchFamily="34" charset="0"/>
-                <a:ea typeface="Courier New" pitchFamily="34" charset="-122"/>
-                <a:cs typeface="Courier New" pitchFamily="34" charset="-120"/>
-              </a:rPr>
-              <a:t>q = self.query_proj(news)           # (B, 512)</a:t>
-            </a:r>
-            <a:endParaRPr lang="en-US" sz="1300" dirty="0"/>
+              <a:spcAft>
+                <a:spcPts val="600"/>
+              </a:spcAft>
+              <a:buNone/>
+            </a:pPr>
+            <a:r>
+              <a:rPr lang="en-US" sz="1700" b="1" dirty="0">
+                <a:solidFill>
+                  <a:schemeClr val="accent3"/>
+                </a:solidFill>
+              </a:rPr>
+              <a:t>github.com/kimsangmin1234/jolup</a:t>
+            </a:r>
+            <a:endParaRPr lang="en-US" sz="1700" dirty="0"/>
           </a:p>
           <a:p>
             <a:pPr indent="0" marL="0">
-              <a:lnSpc>
-                <a:spcPct val="100000"/>
-              </a:lnSpc>
-              <a:buNone/>
-            </a:pPr>
-            <a:r>
-              <a:rPr lang="en-US" sz="1300" dirty="0">
-                <a:solidFill>
-                  <a:srgbClr val="E8EDF4"/>
-                </a:solidFill>
-                <a:latin typeface="Courier New" pitchFamily="34" charset="0"/>
-                <a:ea typeface="Courier New" pitchFamily="34" charset="-122"/>
-                <a:cs typeface="Courier New" pitchFamily="34" charset="-120"/>
-              </a:rPr>
-              <a:t>k = self.key_proj(market)           # (B, 30, 512)</a:t>
-            </a:r>
-            <a:endParaRPr lang="en-US" sz="1300" dirty="0"/>
-          </a:p>
-          <a:p>
+              <a:spcAft>
+                <a:spcPts val="600"/>
+              </a:spcAft>
+              <a:buNone/>
+            </a:pPr>
+            <a:r>
+              <a:rPr lang="en-US" sz="1500" b="1" dirty="0">
+                <a:solidFill>
+                  <a:schemeClr val="accent1"/>
+                </a:solidFill>
+              </a:rPr>
+              <a:t>개발 환경  </a:t>
+            </a:r>
             <a:pPr indent="0" marL="0">
-              <a:lnSpc>
-                <a:spcPct val="100000"/>
-              </a:lnSpc>
-              <a:buNone/>
-            </a:pPr>
-            <a:r>
-              <a:rPr lang="en-US" sz="1300" dirty="0">
-                <a:solidFill>
-                  <a:srgbClr val="E8EDF4"/>
-                </a:solidFill>
-                <a:latin typeface="Courier New" pitchFamily="34" charset="0"/>
-                <a:ea typeface="Courier New" pitchFamily="34" charset="-122"/>
-                <a:cs typeface="Courier New" pitchFamily="34" charset="-120"/>
-              </a:rPr>
-              <a:t>v = self.value_proj(market)</a:t>
-            </a:r>
-            <a:endParaRPr lang="en-US" sz="1300" dirty="0"/>
-          </a:p>
-          <a:p>
-            <a:pPr indent="0" marL="0">
-              <a:lnSpc>
-                <a:spcPct val="100000"/>
-              </a:lnSpc>
-              <a:buNone/>
-            </a:pPr>
-            <a:r>
-              <a:rPr lang="en-US" sz="1300" dirty="0">
-                <a:solidFill>
-                  <a:srgbClr val="E8EDF4"/>
-                </a:solidFill>
-                <a:latin typeface="Courier New" pitchFamily="34" charset="0"/>
-                <a:ea typeface="Courier New" pitchFamily="34" charset="-122"/>
-                <a:cs typeface="Courier New" pitchFamily="34" charset="-120"/>
-              </a:rPr>
-              <a:t>w = softmax(einsum('bd,btd-&gt;bt', q, k) * scale)</a:t>
-            </a:r>
-            <a:endParaRPr lang="en-US" sz="1300" dirty="0"/>
-          </a:p>
-          <a:p>
-            <a:pPr indent="0" marL="0">
-              <a:lnSpc>
-                <a:spcPct val="100000"/>
-              </a:lnSpc>
-              <a:buNone/>
-            </a:pPr>
-            <a:r>
-              <a:rPr lang="en-US" sz="1300" dirty="0">
-                <a:solidFill>
-                  <a:srgbClr val="E8EDF4"/>
-                </a:solidFill>
-                <a:latin typeface="Courier New" pitchFamily="34" charset="0"/>
-                <a:ea typeface="Courier New" pitchFamily="34" charset="-122"/>
-                <a:cs typeface="Courier New" pitchFamily="34" charset="-120"/>
-              </a:rPr>
-              <a:t>c = einsum('bt,btd-&gt;bd', w, v)      # (B, 512)</a:t>
-            </a:r>
-            <a:endParaRPr lang="en-US" sz="1300" dirty="0"/>
-          </a:p>
-          <a:p>
-            <a:pPr indent="0" marL="0">
-              <a:lnSpc>
-                <a:spcPct val="100000"/>
-              </a:lnSpc>
-              <a:buNone/>
-            </a:pPr>
-            <a:r>
-              <a:rPr lang="en-US" sz="1300" dirty="0">
-                <a:solidFill>
-                  <a:srgbClr val="8FA3BF"/>
-                </a:solidFill>
-                <a:latin typeface="Courier New" pitchFamily="34" charset="0"/>
-                <a:ea typeface="Courier New" pitchFamily="34" charset="-122"/>
-                <a:cs typeface="Courier New" pitchFamily="34" charset="-120"/>
-              </a:rPr>
-              <a:t># module 4: gated residual fusion</a:t>
-            </a:r>
-            <a:endParaRPr lang="en-US" sz="1300" dirty="0"/>
-          </a:p>
-          <a:p>
-            <a:pPr indent="0" marL="0">
-              <a:lnSpc>
-                <a:spcPct val="100000"/>
-              </a:lnSpc>
-              <a:buNone/>
-            </a:pPr>
-            <a:r>
-              <a:rPr lang="en-US" sz="1300" dirty="0">
-                <a:solidFill>
-                  <a:srgbClr val="E8EDF4"/>
-                </a:solidFill>
-                <a:latin typeface="Courier New" pitchFamily="34" charset="0"/>
-                <a:ea typeface="Courier New" pitchFamily="34" charset="-122"/>
-                <a:cs typeface="Courier New" pitchFamily="34" charset="-120"/>
-              </a:rPr>
-              <a:t>g = sigmoid(self.gate_net(cat([news, c], -1)))</a:t>
-            </a:r>
-            <a:endParaRPr lang="en-US" sz="1300" dirty="0"/>
-          </a:p>
-          <a:p>
-            <a:pPr indent="0" marL="0">
-              <a:lnSpc>
-                <a:spcPct val="100000"/>
-              </a:lnSpc>
-              <a:buNone/>
-            </a:pPr>
-            <a:r>
-              <a:rPr lang="en-US" sz="1300" dirty="0">
-                <a:solidFill>
-                  <a:srgbClr val="E8EDF4"/>
-                </a:solidFill>
-                <a:latin typeface="Courier New" pitchFamily="34" charset="0"/>
-                <a:ea typeface="Courier New" pitchFamily="34" charset="-122"/>
-                <a:cs typeface="Courier New" pitchFamily="34" charset="-120"/>
-              </a:rPr>
-              <a:t>h = news + g * c                    # (B, 512)</a:t>
-            </a:r>
-            <a:endParaRPr lang="en-US" sz="1300" dirty="0"/>
+              <a:spcAft>
+                <a:spcPts val="600"/>
+              </a:spcAft>
+              <a:buNone/>
+            </a:pPr>
+            <a:r>
+              <a:rPr lang="en-US" sz="1500" dirty="0">
+                <a:solidFill>
+                  <a:schemeClr val="tx1"/>
+                </a:solidFill>
+              </a:rPr>
+              <a:t>Python · PyTorch · LightGBM · OpenAI API</a:t>
+            </a:r>
+            <a:endParaRPr lang="en-US" sz="1700" dirty="0"/>
           </a:p>
         </p:txBody>
       </p:sp>
-      <p:sp>
-        <p:nvSpPr>
-          <p:cNvPr id="84" name="text-83"/>
-          <p:cNvSpPr txBox="1"/>
-          <p:nvPr/>
-        </p:nvSpPr>
-        <p:spPr>
-          <a:xfrm>
-            <a:off x="8108442" y="15590520"/>
-            <a:ext cx="6096762" cy="685800"/>
-          </a:xfrm>
-          <a:prstGeom prst="rect">
-            <a:avLst/>
-          </a:prstGeom>
-          <a:noFill/>
-          <a:ln/>
-        </p:spPr>
-        <p:txBody>
-          <a:bodyPr wrap="square" lIns="0" tIns="0" rIns="0" bIns="0" rtlCol="0" anchor="t"/>
-          <a:lstStyle/>
-          <a:p>
-            <a:pPr indent="0" marL="0">
-              <a:lnSpc>
-                <a:spcPct val="105000"/>
-              </a:lnSpc>
-              <a:spcAft>
-                <a:spcPts val="400"/>
-              </a:spcAft>
-              <a:buNone/>
-            </a:pPr>
-            <a:r>
-              <a:rPr lang="en-US" sz="1500" b="1" dirty="0">
-                <a:solidFill>
-                  <a:schemeClr val="accent1"/>
-                </a:solidFill>
-              </a:rPr>
-              <a:t>GitHub  </a:t>
-            </a:r>
-            <a:pPr indent="0" marL="0">
-              <a:lnSpc>
-                <a:spcPct val="105000"/>
-              </a:lnSpc>
-              <a:spcAft>
-                <a:spcPts val="400"/>
-              </a:spcAft>
-              <a:buNone/>
-            </a:pPr>
-            <a:r>
-              <a:rPr lang="en-US" sz="1500" dirty="0">
-                <a:solidFill>
-                  <a:schemeClr val="accent3"/>
-                </a:solidFill>
-              </a:rPr>
-              <a:t>github.com/kimsangmin1234/jolup</a:t>
-            </a:r>
-            <a:endParaRPr lang="en-US" sz="1500" dirty="0"/>
-          </a:p>
-          <a:p>
-            <a:pPr indent="0" marL="0">
-              <a:lnSpc>
-                <a:spcPct val="105000"/>
-              </a:lnSpc>
-              <a:spcAft>
-                <a:spcPts val="400"/>
-              </a:spcAft>
-              <a:buNone/>
-            </a:pPr>
-            <a:r>
-              <a:rPr lang="en-US" sz="1500" b="1" dirty="0">
-                <a:solidFill>
-                  <a:schemeClr val="accent1"/>
-                </a:solidFill>
-                <a:latin typeface="Courier New" pitchFamily="34" charset="0"/>
-                <a:ea typeface="Courier New" pitchFamily="34" charset="-122"/>
-                <a:cs typeface="Courier New" pitchFamily="34" charset="-120"/>
-              </a:rPr>
-              <a:t>modules/  </a:t>
-            </a:r>
-            <a:pPr indent="0" marL="0">
-              <a:lnSpc>
-                <a:spcPct val="105000"/>
-              </a:lnSpc>
-              <a:spcAft>
-                <a:spcPts val="400"/>
-              </a:spcAft>
-              <a:buNone/>
-            </a:pPr>
-            <a:r>
-              <a:rPr lang="en-US" sz="1500" dirty="0">
-                <a:solidFill>
-                  <a:schemeClr val="tx1"/>
-                </a:solidFill>
-              </a:rPr>
-              <a:t>논문 모듈 1~5 (news_encoder, tcn_encoder, cross_attention, gated_fusion, return_predictor)</a:t>
-            </a:r>
-            <a:endParaRPr lang="en-US" sz="1500" dirty="0"/>
-          </a:p>
-        </p:txBody>
-      </p:sp>
-      <p:sp>
-        <p:nvSpPr>
-          <p:cNvPr id="85" name="card-84"/>
+      <p:graphicFrame>
+        <p:nvGraphicFramePr>
+          <p:cNvPr id="2" name="src-table"/>
+          <p:cNvGraphicFramePr>
+            <a:graphicFrameLocks noGrp="1"/>
+          </p:cNvGraphicFramePr>
+          <p:nvPr>
+            <p:extLst>
+              <p:ext uri="{D42A27DB-BD31-4B8C-83A1-F6EECF244321}">
+                <p14:modId xmlns:p14="http://schemas.microsoft.com/office/powerpoint/2010/main" val="1579011935"/>
+              </p:ext>
+            </p:extLst>
+          </p:nvPr>
+        </p:nvGraphicFramePr>
+        <p:xfrm>
+          <a:off x="8108442" y="14996160"/>
+          <a:ext cx="6096762" cy="914400"/>
+        </p:xfrm>
+        <a:graphic>
+          <a:graphicData uri="http://schemas.openxmlformats.org/drawingml/2006/table">
+            <a:tbl>
+              <a:tblPr/>
+              <a:tblGrid>
+                <a:gridCol w="2971800"/>
+                <a:gridCol w="3124962"/>
+              </a:tblGrid>
+              <a:tr h="292608">
+                <a:tc>
+                  <a:txBody>
+                    <a:bodyPr/>
+                    <a:lstStyle/>
+                    <a:p>
+                      <a:pPr indent="0" marL="0">
+                        <a:buNone/>
+                      </a:pPr>
+                      <a:r>
+                        <a:rPr lang="en-US" sz="1300" b="1" dirty="0">
+                          <a:solidFill>
+                            <a:schemeClr val="accent1"/>
+                          </a:solidFill>
+                          <a:latin typeface="Courier New" pitchFamily="34" charset="0"/>
+                          <a:ea typeface="Courier New" pitchFamily="34" charset="-122"/>
+                          <a:cs typeface="Courier New" pitchFamily="34" charset="-120"/>
+                        </a:rPr>
+                        <a:t>modules/news_encoder.py</a:t>
+                      </a:r>
+                      <a:endParaRPr lang="en-US" sz="1300" dirty="0">
+                        <a:latin typeface="Courier New" charset="0"/>
+                        <a:ea typeface="Courier New" charset="0"/>
+                        <a:cs typeface="Courier New" charset="0"/>
+                      </a:endParaRPr>
+                    </a:p>
+                  </a:txBody>
+                  <a:tcPr marL="73152" marR="73152" marT="0" marB="0" anchor="ctr">
+                    <a:lnL w="9525" cap="flat" cmpd="sng" algn="ctr">
+                      <a:solidFill>
+                        <a:srgbClr val="D9DEE6"/>
+                      </a:solidFill>
+                      <a:prstDash val="solid"/>
+                      <a:round/>
+                      <a:headEnd type="none" w="med" len="med"/>
+                      <a:tailEnd type="none" w="med" len="med"/>
+                    </a:lnL>
+                    <a:lnR w="9525" cap="flat" cmpd="sng" algn="ctr">
+                      <a:solidFill>
+                        <a:srgbClr val="D9DEE6"/>
+                      </a:solidFill>
+                      <a:prstDash val="solid"/>
+                      <a:round/>
+                      <a:headEnd type="none" w="med" len="med"/>
+                      <a:tailEnd type="none" w="med" len="med"/>
+                    </a:lnR>
+                    <a:lnT w="9525" cap="flat" cmpd="sng" algn="ctr">
+                      <a:solidFill>
+                        <a:srgbClr val="D9DEE6"/>
+                      </a:solidFill>
+                      <a:prstDash val="solid"/>
+                      <a:round/>
+                      <a:headEnd type="none" w="med" len="med"/>
+                      <a:tailEnd type="none" w="med" len="med"/>
+                    </a:lnT>
+                    <a:lnB w="9525" cap="flat" cmpd="sng" algn="ctr">
+                      <a:solidFill>
+                        <a:srgbClr val="D9DEE6"/>
+                      </a:solidFill>
+                      <a:prstDash val="solid"/>
+                      <a:round/>
+                      <a:headEnd type="none" w="med" len="med"/>
+                      <a:tailEnd type="none" w="med" len="med"/>
+                    </a:lnB>
+                    <a:solidFill>
+                      <a:srgbClr val="FFFFFF"/>
+                    </a:solidFill>
+                  </a:tcPr>
+                </a:tc>
+                <a:tc>
+                  <a:txBody>
+                    <a:bodyPr/>
+                    <a:lstStyle/>
+                    <a:p>
+                      <a:pPr indent="0" marL="0">
+                        <a:buNone/>
+                      </a:pPr>
+                      <a:r>
+                        <a:rPr lang="en-US" sz="1450" dirty="0">
+                          <a:solidFill>
+                            <a:schemeClr val="tx1"/>
+                          </a:solidFill>
+                        </a:rPr>
+                        <a:t>① LLM 기반 주 신호</a:t>
+                      </a:r>
+                      <a:endParaRPr lang="en-US" sz="1450" dirty="0"/>
+                    </a:p>
+                  </a:txBody>
+                  <a:tcPr marL="73152" marR="73152" marT="0" marB="0" anchor="ctr">
+                    <a:lnL w="9525" cap="flat" cmpd="sng" algn="ctr">
+                      <a:solidFill>
+                        <a:srgbClr val="D9DEE6"/>
+                      </a:solidFill>
+                      <a:prstDash val="solid"/>
+                      <a:round/>
+                      <a:headEnd type="none" w="med" len="med"/>
+                      <a:tailEnd type="none" w="med" len="med"/>
+                    </a:lnL>
+                    <a:lnR w="9525" cap="flat" cmpd="sng" algn="ctr">
+                      <a:solidFill>
+                        <a:srgbClr val="D9DEE6"/>
+                      </a:solidFill>
+                      <a:prstDash val="solid"/>
+                      <a:round/>
+                      <a:headEnd type="none" w="med" len="med"/>
+                      <a:tailEnd type="none" w="med" len="med"/>
+                    </a:lnR>
+                    <a:lnT w="9525" cap="flat" cmpd="sng" algn="ctr">
+                      <a:solidFill>
+                        <a:srgbClr val="D9DEE6"/>
+                      </a:solidFill>
+                      <a:prstDash val="solid"/>
+                      <a:round/>
+                      <a:headEnd type="none" w="med" len="med"/>
+                      <a:tailEnd type="none" w="med" len="med"/>
+                    </a:lnT>
+                    <a:lnB w="9525" cap="flat" cmpd="sng" algn="ctr">
+                      <a:solidFill>
+                        <a:srgbClr val="D9DEE6"/>
+                      </a:solidFill>
+                      <a:prstDash val="solid"/>
+                      <a:round/>
+                      <a:headEnd type="none" w="med" len="med"/>
+                      <a:tailEnd type="none" w="med" len="med"/>
+                    </a:lnB>
+                    <a:solidFill>
+                      <a:srgbClr val="FFFFFF"/>
+                    </a:solidFill>
+                  </a:tcPr>
+                </a:tc>
+              </a:tr>
+              <a:tr h="292608">
+                <a:tc>
+                  <a:txBody>
+                    <a:bodyPr/>
+                    <a:lstStyle/>
+                    <a:p>
+                      <a:pPr indent="0" marL="0">
+                        <a:buNone/>
+                      </a:pPr>
+                      <a:r>
+                        <a:rPr lang="en-US" sz="1300" b="1" dirty="0">
+                          <a:solidFill>
+                            <a:schemeClr val="accent1"/>
+                          </a:solidFill>
+                          <a:latin typeface="Courier New" pitchFamily="34" charset="0"/>
+                          <a:ea typeface="Courier New" pitchFamily="34" charset="-122"/>
+                          <a:cs typeface="Courier New" pitchFamily="34" charset="-120"/>
+                        </a:rPr>
+                        <a:t>modules/tcn_encoder.py</a:t>
+                      </a:r>
+                      <a:endParaRPr lang="en-US" sz="1300" dirty="0">
+                        <a:latin typeface="Courier New" charset="0"/>
+                        <a:ea typeface="Courier New" charset="0"/>
+                        <a:cs typeface="Courier New" charset="0"/>
+                      </a:endParaRPr>
+                    </a:p>
+                  </a:txBody>
+                  <a:tcPr marL="73152" marR="73152" marT="0" marB="0" anchor="ctr">
+                    <a:lnL w="9525" cap="flat" cmpd="sng" algn="ctr">
+                      <a:solidFill>
+                        <a:srgbClr val="D9DEE6"/>
+                      </a:solidFill>
+                      <a:prstDash val="solid"/>
+                      <a:round/>
+                      <a:headEnd type="none" w="med" len="med"/>
+                      <a:tailEnd type="none" w="med" len="med"/>
+                    </a:lnL>
+                    <a:lnR w="9525" cap="flat" cmpd="sng" algn="ctr">
+                      <a:solidFill>
+                        <a:srgbClr val="D9DEE6"/>
+                      </a:solidFill>
+                      <a:prstDash val="solid"/>
+                      <a:round/>
+                      <a:headEnd type="none" w="med" len="med"/>
+                      <a:tailEnd type="none" w="med" len="med"/>
+                    </a:lnR>
+                    <a:lnT w="9525" cap="flat" cmpd="sng" algn="ctr">
+                      <a:solidFill>
+                        <a:srgbClr val="D9DEE6"/>
+                      </a:solidFill>
+                      <a:prstDash val="solid"/>
+                      <a:round/>
+                      <a:headEnd type="none" w="med" len="med"/>
+                      <a:tailEnd type="none" w="med" len="med"/>
+                    </a:lnT>
+                    <a:lnB w="9525" cap="flat" cmpd="sng" algn="ctr">
+                      <a:solidFill>
+                        <a:srgbClr val="D9DEE6"/>
+                      </a:solidFill>
+                      <a:prstDash val="solid"/>
+                      <a:round/>
+                      <a:headEnd type="none" w="med" len="med"/>
+                      <a:tailEnd type="none" w="med" len="med"/>
+                    </a:lnB>
+                    <a:solidFill>
+                      <a:srgbClr val="FFFFFF"/>
+                    </a:solidFill>
+                  </a:tcPr>
+                </a:tc>
+                <a:tc>
+                  <a:txBody>
+                    <a:bodyPr/>
+                    <a:lstStyle/>
+                    <a:p>
+                      <a:pPr indent="0" marL="0">
+                        <a:buNone/>
+                      </a:pPr>
+                      <a:r>
+                        <a:rPr lang="en-US" sz="1450" dirty="0">
+                          <a:solidFill>
+                            <a:schemeClr val="tx1"/>
+                          </a:solidFill>
+                        </a:rPr>
+                        <a:t>② TCN 기반 보조 벡터</a:t>
+                      </a:r>
+                      <a:endParaRPr lang="en-US" sz="1450" dirty="0"/>
+                    </a:p>
+                  </a:txBody>
+                  <a:tcPr marL="73152" marR="73152" marT="0" marB="0" anchor="ctr">
+                    <a:lnL w="9525" cap="flat" cmpd="sng" algn="ctr">
+                      <a:solidFill>
+                        <a:srgbClr val="D9DEE6"/>
+                      </a:solidFill>
+                      <a:prstDash val="solid"/>
+                      <a:round/>
+                      <a:headEnd type="none" w="med" len="med"/>
+                      <a:tailEnd type="none" w="med" len="med"/>
+                    </a:lnL>
+                    <a:lnR w="9525" cap="flat" cmpd="sng" algn="ctr">
+                      <a:solidFill>
+                        <a:srgbClr val="D9DEE6"/>
+                      </a:solidFill>
+                      <a:prstDash val="solid"/>
+                      <a:round/>
+                      <a:headEnd type="none" w="med" len="med"/>
+                      <a:tailEnd type="none" w="med" len="med"/>
+                    </a:lnR>
+                    <a:lnT w="9525" cap="flat" cmpd="sng" algn="ctr">
+                      <a:solidFill>
+                        <a:srgbClr val="D9DEE6"/>
+                      </a:solidFill>
+                      <a:prstDash val="solid"/>
+                      <a:round/>
+                      <a:headEnd type="none" w="med" len="med"/>
+                      <a:tailEnd type="none" w="med" len="med"/>
+                    </a:lnT>
+                    <a:lnB w="9525" cap="flat" cmpd="sng" algn="ctr">
+                      <a:solidFill>
+                        <a:srgbClr val="D9DEE6"/>
+                      </a:solidFill>
+                      <a:prstDash val="solid"/>
+                      <a:round/>
+                      <a:headEnd type="none" w="med" len="med"/>
+                      <a:tailEnd type="none" w="med" len="med"/>
+                    </a:lnB>
+                    <a:solidFill>
+                      <a:srgbClr val="FFFFFF"/>
+                    </a:solidFill>
+                  </a:tcPr>
+                </a:tc>
+              </a:tr>
+              <a:tr h="292608">
+                <a:tc>
+                  <a:txBody>
+                    <a:bodyPr/>
+                    <a:lstStyle/>
+                    <a:p>
+                      <a:pPr indent="0" marL="0">
+                        <a:buNone/>
+                      </a:pPr>
+                      <a:r>
+                        <a:rPr lang="en-US" sz="1300" b="1" dirty="0">
+                          <a:solidFill>
+                            <a:schemeClr val="accent1"/>
+                          </a:solidFill>
+                          <a:latin typeface="Courier New" pitchFamily="34" charset="0"/>
+                          <a:ea typeface="Courier New" pitchFamily="34" charset="-122"/>
+                          <a:cs typeface="Courier New" pitchFamily="34" charset="-120"/>
+                        </a:rPr>
+                        <a:t>modules/cross_attention.py</a:t>
+                      </a:r>
+                      <a:endParaRPr lang="en-US" sz="1300" dirty="0">
+                        <a:latin typeface="Courier New" charset="0"/>
+                        <a:ea typeface="Courier New" charset="0"/>
+                        <a:cs typeface="Courier New" charset="0"/>
+                      </a:endParaRPr>
+                    </a:p>
+                  </a:txBody>
+                  <a:tcPr marL="73152" marR="73152" marT="0" marB="0" anchor="ctr">
+                    <a:lnL w="9525" cap="flat" cmpd="sng" algn="ctr">
+                      <a:solidFill>
+                        <a:srgbClr val="D9DEE6"/>
+                      </a:solidFill>
+                      <a:prstDash val="solid"/>
+                      <a:round/>
+                      <a:headEnd type="none" w="med" len="med"/>
+                      <a:tailEnd type="none" w="med" len="med"/>
+                    </a:lnL>
+                    <a:lnR w="9525" cap="flat" cmpd="sng" algn="ctr">
+                      <a:solidFill>
+                        <a:srgbClr val="D9DEE6"/>
+                      </a:solidFill>
+                      <a:prstDash val="solid"/>
+                      <a:round/>
+                      <a:headEnd type="none" w="med" len="med"/>
+                      <a:tailEnd type="none" w="med" len="med"/>
+                    </a:lnR>
+                    <a:lnT w="9525" cap="flat" cmpd="sng" algn="ctr">
+                      <a:solidFill>
+                        <a:srgbClr val="D9DEE6"/>
+                      </a:solidFill>
+                      <a:prstDash val="solid"/>
+                      <a:round/>
+                      <a:headEnd type="none" w="med" len="med"/>
+                      <a:tailEnd type="none" w="med" len="med"/>
+                    </a:lnT>
+                    <a:lnB w="9525" cap="flat" cmpd="sng" algn="ctr">
+                      <a:solidFill>
+                        <a:srgbClr val="D9DEE6"/>
+                      </a:solidFill>
+                      <a:prstDash val="solid"/>
+                      <a:round/>
+                      <a:headEnd type="none" w="med" len="med"/>
+                      <a:tailEnd type="none" w="med" len="med"/>
+                    </a:lnB>
+                    <a:solidFill>
+                      <a:srgbClr val="FFFFFF"/>
+                    </a:solidFill>
+                  </a:tcPr>
+                </a:tc>
+                <a:tc>
+                  <a:txBody>
+                    <a:bodyPr/>
+                    <a:lstStyle/>
+                    <a:p>
+                      <a:pPr indent="0" marL="0">
+                        <a:buNone/>
+                      </a:pPr>
+                      <a:r>
+                        <a:rPr lang="en-US" sz="1450" dirty="0">
+                          <a:solidFill>
+                            <a:schemeClr val="tx1"/>
+                          </a:solidFill>
+                        </a:rPr>
+                        <a:t>③ 비대칭 교차 어텐션</a:t>
+                      </a:r>
+                      <a:endParaRPr lang="en-US" sz="1450" dirty="0"/>
+                    </a:p>
+                  </a:txBody>
+                  <a:tcPr marL="73152" marR="73152" marT="0" marB="0" anchor="ctr">
+                    <a:lnL w="9525" cap="flat" cmpd="sng" algn="ctr">
+                      <a:solidFill>
+                        <a:srgbClr val="D9DEE6"/>
+                      </a:solidFill>
+                      <a:prstDash val="solid"/>
+                      <a:round/>
+                      <a:headEnd type="none" w="med" len="med"/>
+                      <a:tailEnd type="none" w="med" len="med"/>
+                    </a:lnL>
+                    <a:lnR w="9525" cap="flat" cmpd="sng" algn="ctr">
+                      <a:solidFill>
+                        <a:srgbClr val="D9DEE6"/>
+                      </a:solidFill>
+                      <a:prstDash val="solid"/>
+                      <a:round/>
+                      <a:headEnd type="none" w="med" len="med"/>
+                      <a:tailEnd type="none" w="med" len="med"/>
+                    </a:lnR>
+                    <a:lnT w="9525" cap="flat" cmpd="sng" algn="ctr">
+                      <a:solidFill>
+                        <a:srgbClr val="D9DEE6"/>
+                      </a:solidFill>
+                      <a:prstDash val="solid"/>
+                      <a:round/>
+                      <a:headEnd type="none" w="med" len="med"/>
+                      <a:tailEnd type="none" w="med" len="med"/>
+                    </a:lnT>
+                    <a:lnB w="9525" cap="flat" cmpd="sng" algn="ctr">
+                      <a:solidFill>
+                        <a:srgbClr val="D9DEE6"/>
+                      </a:solidFill>
+                      <a:prstDash val="solid"/>
+                      <a:round/>
+                      <a:headEnd type="none" w="med" len="med"/>
+                      <a:tailEnd type="none" w="med" len="med"/>
+                    </a:lnB>
+                    <a:solidFill>
+                      <a:srgbClr val="FFFFFF"/>
+                    </a:solidFill>
+                  </a:tcPr>
+                </a:tc>
+              </a:tr>
+              <a:tr h="292608">
+                <a:tc>
+                  <a:txBody>
+                    <a:bodyPr/>
+                    <a:lstStyle/>
+                    <a:p>
+                      <a:pPr indent="0" marL="0">
+                        <a:buNone/>
+                      </a:pPr>
+                      <a:r>
+                        <a:rPr lang="en-US" sz="1300" b="1" dirty="0">
+                          <a:solidFill>
+                            <a:schemeClr val="accent1"/>
+                          </a:solidFill>
+                          <a:latin typeface="Courier New" pitchFamily="34" charset="0"/>
+                          <a:ea typeface="Courier New" pitchFamily="34" charset="-122"/>
+                          <a:cs typeface="Courier New" pitchFamily="34" charset="-120"/>
+                        </a:rPr>
+                        <a:t>modules/gated_fusion.py</a:t>
+                      </a:r>
+                      <a:endParaRPr lang="en-US" sz="1300" dirty="0">
+                        <a:latin typeface="Courier New" charset="0"/>
+                        <a:ea typeface="Courier New" charset="0"/>
+                        <a:cs typeface="Courier New" charset="0"/>
+                      </a:endParaRPr>
+                    </a:p>
+                  </a:txBody>
+                  <a:tcPr marL="73152" marR="73152" marT="0" marB="0" anchor="ctr">
+                    <a:lnL w="9525" cap="flat" cmpd="sng" algn="ctr">
+                      <a:solidFill>
+                        <a:srgbClr val="D9DEE6"/>
+                      </a:solidFill>
+                      <a:prstDash val="solid"/>
+                      <a:round/>
+                      <a:headEnd type="none" w="med" len="med"/>
+                      <a:tailEnd type="none" w="med" len="med"/>
+                    </a:lnL>
+                    <a:lnR w="9525" cap="flat" cmpd="sng" algn="ctr">
+                      <a:solidFill>
+                        <a:srgbClr val="D9DEE6"/>
+                      </a:solidFill>
+                      <a:prstDash val="solid"/>
+                      <a:round/>
+                      <a:headEnd type="none" w="med" len="med"/>
+                      <a:tailEnd type="none" w="med" len="med"/>
+                    </a:lnR>
+                    <a:lnT w="9525" cap="flat" cmpd="sng" algn="ctr">
+                      <a:solidFill>
+                        <a:srgbClr val="D9DEE6"/>
+                      </a:solidFill>
+                      <a:prstDash val="solid"/>
+                      <a:round/>
+                      <a:headEnd type="none" w="med" len="med"/>
+                      <a:tailEnd type="none" w="med" len="med"/>
+                    </a:lnT>
+                    <a:lnB w="9525" cap="flat" cmpd="sng" algn="ctr">
+                      <a:solidFill>
+                        <a:srgbClr val="D9DEE6"/>
+                      </a:solidFill>
+                      <a:prstDash val="solid"/>
+                      <a:round/>
+                      <a:headEnd type="none" w="med" len="med"/>
+                      <a:tailEnd type="none" w="med" len="med"/>
+                    </a:lnB>
+                    <a:solidFill>
+                      <a:srgbClr val="FFFFFF"/>
+                    </a:solidFill>
+                  </a:tcPr>
+                </a:tc>
+                <a:tc>
+                  <a:txBody>
+                    <a:bodyPr/>
+                    <a:lstStyle/>
+                    <a:p>
+                      <a:pPr indent="0" marL="0">
+                        <a:buNone/>
+                      </a:pPr>
+                      <a:r>
+                        <a:rPr lang="en-US" sz="1450" dirty="0">
+                          <a:solidFill>
+                            <a:schemeClr val="tx1"/>
+                          </a:solidFill>
+                        </a:rPr>
+                        <a:t>④ 게이트 기반 잔차 결합</a:t>
+                      </a:r>
+                      <a:endParaRPr lang="en-US" sz="1450" dirty="0"/>
+                    </a:p>
+                  </a:txBody>
+                  <a:tcPr marL="73152" marR="73152" marT="0" marB="0" anchor="ctr">
+                    <a:lnL w="9525" cap="flat" cmpd="sng" algn="ctr">
+                      <a:solidFill>
+                        <a:srgbClr val="D9DEE6"/>
+                      </a:solidFill>
+                      <a:prstDash val="solid"/>
+                      <a:round/>
+                      <a:headEnd type="none" w="med" len="med"/>
+                      <a:tailEnd type="none" w="med" len="med"/>
+                    </a:lnL>
+                    <a:lnR w="9525" cap="flat" cmpd="sng" algn="ctr">
+                      <a:solidFill>
+                        <a:srgbClr val="D9DEE6"/>
+                      </a:solidFill>
+                      <a:prstDash val="solid"/>
+                      <a:round/>
+                      <a:headEnd type="none" w="med" len="med"/>
+                      <a:tailEnd type="none" w="med" len="med"/>
+                    </a:lnR>
+                    <a:lnT w="9525" cap="flat" cmpd="sng" algn="ctr">
+                      <a:solidFill>
+                        <a:srgbClr val="D9DEE6"/>
+                      </a:solidFill>
+                      <a:prstDash val="solid"/>
+                      <a:round/>
+                      <a:headEnd type="none" w="med" len="med"/>
+                      <a:tailEnd type="none" w="med" len="med"/>
+                    </a:lnT>
+                    <a:lnB w="9525" cap="flat" cmpd="sng" algn="ctr">
+                      <a:solidFill>
+                        <a:srgbClr val="D9DEE6"/>
+                      </a:solidFill>
+                      <a:prstDash val="solid"/>
+                      <a:round/>
+                      <a:headEnd type="none" w="med" len="med"/>
+                      <a:tailEnd type="none" w="med" len="med"/>
+                    </a:lnB>
+                    <a:solidFill>
+                      <a:srgbClr val="FFFFFF"/>
+                    </a:solidFill>
+                  </a:tcPr>
+                </a:tc>
+              </a:tr>
+              <a:tr h="292608">
+                <a:tc>
+                  <a:txBody>
+                    <a:bodyPr/>
+                    <a:lstStyle/>
+                    <a:p>
+                      <a:pPr indent="0" marL="0">
+                        <a:buNone/>
+                      </a:pPr>
+                      <a:r>
+                        <a:rPr lang="en-US" sz="1300" b="1" dirty="0">
+                          <a:solidFill>
+                            <a:schemeClr val="accent1"/>
+                          </a:solidFill>
+                          <a:latin typeface="Courier New" pitchFamily="34" charset="0"/>
+                          <a:ea typeface="Courier New" pitchFamily="34" charset="-122"/>
+                          <a:cs typeface="Courier New" pitchFamily="34" charset="-120"/>
+                        </a:rPr>
+                        <a:t>modules/return_predictor.py</a:t>
+                      </a:r>
+                      <a:endParaRPr lang="en-US" sz="1300" dirty="0">
+                        <a:latin typeface="Courier New" charset="0"/>
+                        <a:ea typeface="Courier New" charset="0"/>
+                        <a:cs typeface="Courier New" charset="0"/>
+                      </a:endParaRPr>
+                    </a:p>
+                  </a:txBody>
+                  <a:tcPr marL="73152" marR="73152" marT="0" marB="0" anchor="ctr">
+                    <a:lnL w="9525" cap="flat" cmpd="sng" algn="ctr">
+                      <a:solidFill>
+                        <a:srgbClr val="D9DEE6"/>
+                      </a:solidFill>
+                      <a:prstDash val="solid"/>
+                      <a:round/>
+                      <a:headEnd type="none" w="med" len="med"/>
+                      <a:tailEnd type="none" w="med" len="med"/>
+                    </a:lnL>
+                    <a:lnR w="9525" cap="flat" cmpd="sng" algn="ctr">
+                      <a:solidFill>
+                        <a:srgbClr val="D9DEE6"/>
+                      </a:solidFill>
+                      <a:prstDash val="solid"/>
+                      <a:round/>
+                      <a:headEnd type="none" w="med" len="med"/>
+                      <a:tailEnd type="none" w="med" len="med"/>
+                    </a:lnR>
+                    <a:lnT w="9525" cap="flat" cmpd="sng" algn="ctr">
+                      <a:solidFill>
+                        <a:srgbClr val="D9DEE6"/>
+                      </a:solidFill>
+                      <a:prstDash val="solid"/>
+                      <a:round/>
+                      <a:headEnd type="none" w="med" len="med"/>
+                      <a:tailEnd type="none" w="med" len="med"/>
+                    </a:lnT>
+                    <a:lnB w="9525" cap="flat" cmpd="sng" algn="ctr">
+                      <a:solidFill>
+                        <a:srgbClr val="D9DEE6"/>
+                      </a:solidFill>
+                      <a:prstDash val="solid"/>
+                      <a:round/>
+                      <a:headEnd type="none" w="med" len="med"/>
+                      <a:tailEnd type="none" w="med" len="med"/>
+                    </a:lnB>
+                    <a:solidFill>
+                      <a:srgbClr val="FFFFFF"/>
+                    </a:solidFill>
+                  </a:tcPr>
+                </a:tc>
+                <a:tc>
+                  <a:txBody>
+                    <a:bodyPr/>
+                    <a:lstStyle/>
+                    <a:p>
+                      <a:pPr indent="0" marL="0">
+                        <a:buNone/>
+                      </a:pPr>
+                      <a:r>
+                        <a:rPr lang="en-US" sz="1450" dirty="0">
+                          <a:solidFill>
+                            <a:schemeClr val="tx1"/>
+                          </a:solidFill>
+                        </a:rPr>
+                        <a:t>⑤ 등락률 예측</a:t>
+                      </a:r>
+                      <a:endParaRPr lang="en-US" sz="1450" dirty="0"/>
+                    </a:p>
+                  </a:txBody>
+                  <a:tcPr marL="73152" marR="73152" marT="0" marB="0" anchor="ctr">
+                    <a:lnL w="9525" cap="flat" cmpd="sng" algn="ctr">
+                      <a:solidFill>
+                        <a:srgbClr val="D9DEE6"/>
+                      </a:solidFill>
+                      <a:prstDash val="solid"/>
+                      <a:round/>
+                      <a:headEnd type="none" w="med" len="med"/>
+                      <a:tailEnd type="none" w="med" len="med"/>
+                    </a:lnL>
+                    <a:lnR w="9525" cap="flat" cmpd="sng" algn="ctr">
+                      <a:solidFill>
+                        <a:srgbClr val="D9DEE6"/>
+                      </a:solidFill>
+                      <a:prstDash val="solid"/>
+                      <a:round/>
+                      <a:headEnd type="none" w="med" len="med"/>
+                      <a:tailEnd type="none" w="med" len="med"/>
+                    </a:lnR>
+                    <a:lnT w="9525" cap="flat" cmpd="sng" algn="ctr">
+                      <a:solidFill>
+                        <a:srgbClr val="D9DEE6"/>
+                      </a:solidFill>
+                      <a:prstDash val="solid"/>
+                      <a:round/>
+                      <a:headEnd type="none" w="med" len="med"/>
+                      <a:tailEnd type="none" w="med" len="med"/>
+                    </a:lnT>
+                    <a:lnB w="9525" cap="flat" cmpd="sng" algn="ctr">
+                      <a:solidFill>
+                        <a:srgbClr val="D9DEE6"/>
+                      </a:solidFill>
+                      <a:prstDash val="solid"/>
+                      <a:round/>
+                      <a:headEnd type="none" w="med" len="med"/>
+                      <a:tailEnd type="none" w="med" len="med"/>
+                    </a:lnB>
+                    <a:solidFill>
+                      <a:srgbClr val="FFFFFF"/>
+                    </a:solidFill>
+                  </a:tcPr>
+                </a:tc>
+              </a:tr>
+              <a:tr h="292608">
+                <a:tc>
+                  <a:txBody>
+                    <a:bodyPr/>
+                    <a:lstStyle/>
+                    <a:p>
+                      <a:pPr indent="0" marL="0">
+                        <a:buNone/>
+                      </a:pPr>
+                      <a:r>
+                        <a:rPr lang="en-US" sz="1300" b="1" dirty="0">
+                          <a:solidFill>
+                            <a:schemeClr val="accent1"/>
+                          </a:solidFill>
+                          <a:latin typeface="Courier New" pitchFamily="34" charset="0"/>
+                          <a:ea typeface="Courier New" pitchFamily="34" charset="-122"/>
+                          <a:cs typeface="Courier New" pitchFamily="34" charset="-120"/>
+                        </a:rPr>
+                        <a:t>run_edt_suite2.py</a:t>
+                      </a:r>
+                      <a:endParaRPr lang="en-US" sz="1300" dirty="0">
+                        <a:latin typeface="Courier New" charset="0"/>
+                        <a:ea typeface="Courier New" charset="0"/>
+                        <a:cs typeface="Courier New" charset="0"/>
+                      </a:endParaRPr>
+                    </a:p>
+                  </a:txBody>
+                  <a:tcPr marL="73152" marR="73152" marT="0" marB="0" anchor="ctr">
+                    <a:lnL w="9525" cap="flat" cmpd="sng" algn="ctr">
+                      <a:solidFill>
+                        <a:srgbClr val="D9DEE6"/>
+                      </a:solidFill>
+                      <a:prstDash val="solid"/>
+                      <a:round/>
+                      <a:headEnd type="none" w="med" len="med"/>
+                      <a:tailEnd type="none" w="med" len="med"/>
+                    </a:lnL>
+                    <a:lnR w="9525" cap="flat" cmpd="sng" algn="ctr">
+                      <a:solidFill>
+                        <a:srgbClr val="D9DEE6"/>
+                      </a:solidFill>
+                      <a:prstDash val="solid"/>
+                      <a:round/>
+                      <a:headEnd type="none" w="med" len="med"/>
+                      <a:tailEnd type="none" w="med" len="med"/>
+                    </a:lnR>
+                    <a:lnT w="9525" cap="flat" cmpd="sng" algn="ctr">
+                      <a:solidFill>
+                        <a:srgbClr val="D9DEE6"/>
+                      </a:solidFill>
+                      <a:prstDash val="solid"/>
+                      <a:round/>
+                      <a:headEnd type="none" w="med" len="med"/>
+                      <a:tailEnd type="none" w="med" len="med"/>
+                    </a:lnT>
+                    <a:lnB w="9525" cap="flat" cmpd="sng" algn="ctr">
+                      <a:solidFill>
+                        <a:srgbClr val="D9DEE6"/>
+                      </a:solidFill>
+                      <a:prstDash val="solid"/>
+                      <a:round/>
+                      <a:headEnd type="none" w="med" len="med"/>
+                      <a:tailEnd type="none" w="med" len="med"/>
+                    </a:lnB>
+                    <a:solidFill>
+                      <a:srgbClr val="FFFFFF"/>
+                    </a:solidFill>
+                  </a:tcPr>
+                </a:tc>
+                <a:tc>
+                  <a:txBody>
+                    <a:bodyPr/>
+                    <a:lstStyle/>
+                    <a:p>
+                      <a:pPr indent="0" marL="0">
+                        <a:buNone/>
+                      </a:pPr>
+                      <a:r>
+                        <a:rPr lang="en-US" sz="1450" dirty="0">
+                          <a:solidFill>
+                            <a:schemeClr val="tx1"/>
+                          </a:solidFill>
+                        </a:rPr>
+                        <a:t>학습 · 평가</a:t>
+                      </a:r>
+                      <a:endParaRPr lang="en-US" sz="1450" dirty="0"/>
+                    </a:p>
+                  </a:txBody>
+                  <a:tcPr marL="73152" marR="73152" marT="0" marB="0" anchor="ctr">
+                    <a:lnL w="9525" cap="flat" cmpd="sng" algn="ctr">
+                      <a:solidFill>
+                        <a:srgbClr val="D9DEE6"/>
+                      </a:solidFill>
+                      <a:prstDash val="solid"/>
+                      <a:round/>
+                      <a:headEnd type="none" w="med" len="med"/>
+                      <a:tailEnd type="none" w="med" len="med"/>
+                    </a:lnL>
+                    <a:lnR w="9525" cap="flat" cmpd="sng" algn="ctr">
+                      <a:solidFill>
+                        <a:srgbClr val="D9DEE6"/>
+                      </a:solidFill>
+                      <a:prstDash val="solid"/>
+                      <a:round/>
+                      <a:headEnd type="none" w="med" len="med"/>
+                      <a:tailEnd type="none" w="med" len="med"/>
+                    </a:lnR>
+                    <a:lnT w="9525" cap="flat" cmpd="sng" algn="ctr">
+                      <a:solidFill>
+                        <a:srgbClr val="D9DEE6"/>
+                      </a:solidFill>
+                      <a:prstDash val="solid"/>
+                      <a:round/>
+                      <a:headEnd type="none" w="med" len="med"/>
+                      <a:tailEnd type="none" w="med" len="med"/>
+                    </a:lnT>
+                    <a:lnB w="9525" cap="flat" cmpd="sng" algn="ctr">
+                      <a:solidFill>
+                        <a:srgbClr val="D9DEE6"/>
+                      </a:solidFill>
+                      <a:prstDash val="solid"/>
+                      <a:round/>
+                      <a:headEnd type="none" w="med" len="med"/>
+                      <a:tailEnd type="none" w="med" len="med"/>
+                    </a:lnB>
+                    <a:solidFill>
+                      <a:srgbClr val="FFFFFF"/>
+                    </a:solidFill>
+                  </a:tcPr>
+                </a:tc>
+              </a:tr>
+            </a:tbl>
+          </a:graphicData>
+        </a:graphic>
+      </p:graphicFrame>
+      <p:sp>
+        <p:nvSpPr>
+          <p:cNvPr id="85" name="card-82"/>
           <p:cNvSpPr/>
           <p:nvPr/>
         </p:nvSpPr>
         <p:spPr>
           <a:xfrm>
-            <a:off x="7742682" y="16824960"/>
-            <a:ext cx="6828282" cy="4101998"/>
+            <a:off x="7742682" y="17282160"/>
+            <a:ext cx="6828282" cy="3644798"/>
           </a:xfrm>
           <a:prstGeom prst="roundRect">
             <a:avLst>
-              <a:gd name="adj" fmla="val 4012"/>
+              <a:gd name="adj" fmla="val 4516"/>
             </a:avLst>
           </a:prstGeom>
           <a:solidFill>
@@ -4637,13 +5236,13 @@
       </p:sp>
       <p:sp>
         <p:nvSpPr>
-          <p:cNvPr id="86" name="badge-85"/>
+          <p:cNvPr id="86" name="badge-83"/>
           <p:cNvSpPr/>
           <p:nvPr/>
         </p:nvSpPr>
         <p:spPr>
           <a:xfrm>
-            <a:off x="8062722" y="17099280"/>
+            <a:off x="8062722" y="17556480"/>
             <a:ext cx="621792" cy="621792"/>
           </a:xfrm>
           <a:prstGeom prst="ellipse">
@@ -4662,13 +5261,13 @@
       </p:sp>
       <p:sp>
         <p:nvSpPr>
-          <p:cNvPr id="87" name="text-86"/>
+          <p:cNvPr id="87" name="text-84"/>
           <p:cNvSpPr txBox="1"/>
           <p:nvPr/>
         </p:nvSpPr>
         <p:spPr>
           <a:xfrm>
-            <a:off x="8062722" y="17099280"/>
+            <a:off x="8062722" y="17556480"/>
             <a:ext cx="621792" cy="621792"/>
           </a:xfrm>
           <a:prstGeom prst="rect">
@@ -4698,13 +5297,13 @@
       </p:sp>
       <p:sp>
         <p:nvSpPr>
-          <p:cNvPr id="88" name="text-87"/>
+          <p:cNvPr id="88" name="text-85"/>
           <p:cNvSpPr txBox="1"/>
           <p:nvPr/>
         </p:nvSpPr>
         <p:spPr>
           <a:xfrm>
-            <a:off x="8839962" y="17099280"/>
+            <a:off x="8839962" y="17556480"/>
             <a:ext cx="5456682" cy="621792"/>
           </a:xfrm>
           <a:prstGeom prst="rect">
@@ -4734,14 +5333,14 @@
       </p:sp>
       <p:sp>
         <p:nvSpPr>
-          <p:cNvPr id="89" name="text-88"/>
+          <p:cNvPr id="89" name="text-86"/>
           <p:cNvSpPr txBox="1"/>
           <p:nvPr/>
         </p:nvSpPr>
         <p:spPr>
           <a:xfrm>
-            <a:off x="8108442" y="17967960"/>
-            <a:ext cx="6096762" cy="2684678"/>
+            <a:off x="8108442" y="18425160"/>
+            <a:ext cx="6096762" cy="2227478"/>
           </a:xfrm>
           <a:prstGeom prst="rect">
             <a:avLst/>
@@ -4861,7 +5460,7 @@
       </p:sp>
       <p:sp>
         <p:nvSpPr>
-          <p:cNvPr id="90" name="card-89"/>
+          <p:cNvPr id="90" name="card-87"/>
           <p:cNvSpPr/>
           <p:nvPr/>
         </p:nvSpPr>
@@ -4888,7 +5487,7 @@
       </p:sp>
       <p:sp>
         <p:nvSpPr>
-          <p:cNvPr id="91" name="badge-90"/>
+          <p:cNvPr id="91" name="badge-88"/>
           <p:cNvSpPr/>
           <p:nvPr/>
         </p:nvSpPr>
@@ -4913,7 +5512,7 @@
       </p:sp>
       <p:sp>
         <p:nvSpPr>
-          <p:cNvPr id="92" name="text-91"/>
+          <p:cNvPr id="92" name="text-89"/>
           <p:cNvSpPr txBox="1"/>
           <p:nvPr/>
         </p:nvSpPr>
@@ -4949,7 +5548,7 @@
       </p:sp>
       <p:sp>
         <p:nvSpPr>
-          <p:cNvPr id="93" name="text-92"/>
+          <p:cNvPr id="93" name="text-90"/>
           <p:cNvSpPr txBox="1"/>
           <p:nvPr/>
         </p:nvSpPr>
@@ -4985,7 +5584,7 @@
       </p:sp>
       <p:sp>
         <p:nvSpPr>
-          <p:cNvPr id="94" name="text-93"/>
+          <p:cNvPr id="94" name="text-91"/>
           <p:cNvSpPr txBox="1"/>
           <p:nvPr/>
         </p:nvSpPr>
@@ -5069,7 +5668,7 @@
       </p:sp>
       <p:sp>
         <p:nvSpPr>
-          <p:cNvPr id="95" name="stat-94"/>
+          <p:cNvPr id="95" name="stat-92"/>
           <p:cNvSpPr/>
           <p:nvPr/>
         </p:nvSpPr>
@@ -5096,7 +5695,7 @@
       </p:sp>
       <p:sp>
         <p:nvSpPr>
-          <p:cNvPr id="96" name="text-95"/>
+          <p:cNvPr id="96" name="text-93"/>
           <p:cNvSpPr txBox="1"/>
           <p:nvPr/>
         </p:nvSpPr>
@@ -5132,7 +5731,7 @@
       </p:sp>
       <p:sp>
         <p:nvSpPr>
-          <p:cNvPr id="97" name="text-96"/>
+          <p:cNvPr id="97" name="text-94"/>
           <p:cNvSpPr txBox="1"/>
           <p:nvPr/>
         </p:nvSpPr>
@@ -5182,7 +5781,7 @@
       </p:sp>
       <p:sp>
         <p:nvSpPr>
-          <p:cNvPr id="98" name="stat-97"/>
+          <p:cNvPr id="98" name="stat-95"/>
           <p:cNvSpPr/>
           <p:nvPr/>
         </p:nvSpPr>
@@ -5209,7 +5808,7 @@
       </p:sp>
       <p:sp>
         <p:nvSpPr>
-          <p:cNvPr id="99" name="text-98"/>
+          <p:cNvPr id="99" name="text-96"/>
           <p:cNvSpPr txBox="1"/>
           <p:nvPr/>
         </p:nvSpPr>
@@ -5245,7 +5844,7 @@
       </p:sp>
       <p:sp>
         <p:nvSpPr>
-          <p:cNvPr id="100" name="text-99"/>
+          <p:cNvPr id="100" name="text-97"/>
           <p:cNvSpPr txBox="1"/>
           <p:nvPr/>
         </p:nvSpPr>
@@ -5295,7 +5894,7 @@
       </p:sp>
       <p:sp>
         <p:nvSpPr>
-          <p:cNvPr id="101" name="stat-100"/>
+          <p:cNvPr id="101" name="stat-98"/>
           <p:cNvSpPr/>
           <p:nvPr/>
         </p:nvSpPr>
@@ -5322,7 +5921,7 @@
       </p:sp>
       <p:sp>
         <p:nvSpPr>
-          <p:cNvPr id="102" name="text-101"/>
+          <p:cNvPr id="102" name="text-99"/>
           <p:cNvSpPr txBox="1"/>
           <p:nvPr/>
         </p:nvSpPr>
@@ -5358,7 +5957,7 @@
       </p:sp>
       <p:sp>
         <p:nvSpPr>
-          <p:cNvPr id="103" name="text-102"/>
+          <p:cNvPr id="103" name="text-100"/>
           <p:cNvSpPr txBox="1"/>
           <p:nvPr/>
         </p:nvSpPr>
@@ -5418,7 +6017,7 @@
         </p:xfrm>
         <a:graphic xmlns:a="http://schemas.openxmlformats.org/drawingml/2006/main">
           <a:graphicData uri="http://schemas.openxmlformats.org/drawingml/2006/chart">
-            <c:chart xmlns:c="http://schemas.openxmlformats.org/drawingml/2006/chart" r:id="rId1"/>
+            <c:chart xmlns:c="http://schemas.openxmlformats.org/drawingml/2006/chart" r:id="rId2"/>
           </a:graphicData>
         </a:graphic>
       </p:graphicFrame>
@@ -5434,7 +6033,7 @@
         </p:xfrm>
         <a:graphic xmlns:a="http://schemas.openxmlformats.org/drawingml/2006/main">
           <a:graphicData uri="http://schemas.openxmlformats.org/drawingml/2006/chart">
-            <c:chart xmlns:c="http://schemas.openxmlformats.org/drawingml/2006/chart" r:id="rId2"/>
+            <c:chart xmlns:c="http://schemas.openxmlformats.org/drawingml/2006/chart" r:id="rId3"/>
           </a:graphicData>
         </a:graphic>
       </p:graphicFrame>

--- a/docs/exhibition/패널_A_논문구조.pptx
+++ b/docs/exhibition/패널_A_논문구조.pptx
@@ -107,7 +107,7 @@
   <p:extLst>
     <p:ext uri="{521415D9-36F7-43E2-AB2F-B90AF26B5E84}">
       <p14:sectionLst xmlns:p14="http://schemas.microsoft.com/office/powerpoint/2010/main">
-        <p14:section name="패널" id="{65afbba4-acb6-5467-9a9e-e70df83f27aa}">
+        <p14:section name="패널" id="{dfa80cf7-3160-4edb-3ea7-4686a5194520}">
           <p14:sldIdLst>
             <p14:sldId id="256"/>
           </p14:sldIdLst>
@@ -4165,11 +4165,11 @@
         <p:spPr>
           <a:xfrm>
             <a:off x="7742682" y="12344400"/>
-            <a:ext cx="6828282" cy="4663440"/>
+            <a:ext cx="6828282" cy="4297680"/>
           </a:xfrm>
           <a:prstGeom prst="roundRect">
             <a:avLst>
-              <a:gd name="adj" fmla="val 3529"/>
+              <a:gd name="adj" fmla="val 3830"/>
             </a:avLst>
           </a:prstGeom>
           <a:solidFill>
@@ -4280,40 +4280,16 @@
           </a:p>
         </p:txBody>
       </p:sp>
-      <p:pic>
-        <p:nvPicPr>
-          <p:cNvPr id="82" name="qr" descr="GitHub 저장소 QR 코드">    </p:cNvPr>
-          <p:cNvPicPr>
-            <a:picLocks noChangeAspect="1"/>
-          </p:cNvPicPr>
-          <p:nvPr/>
-        </p:nvPicPr>
-        <p:blipFill>
-          <a:blip r:embed="rId1"/>
-          <a:stretch>
-            <a:fillRect/>
-          </a:stretch>
-        </p:blipFill>
+      <p:sp>
+        <p:nvSpPr>
+          <p:cNvPr id="82" name="text-81"/>
+          <p:cNvSpPr txBox="1"/>
+          <p:nvPr/>
+        </p:nvSpPr>
         <p:spPr>
           <a:xfrm>
             <a:off x="8108442" y="13487400"/>
-            <a:ext cx="1371600" cy="1371600"/>
-          </a:xfrm>
-          <a:prstGeom prst="rect">
-            <a:avLst/>
-          </a:prstGeom>
-        </p:spPr>
-      </p:pic>
-      <p:sp>
-        <p:nvSpPr>
-          <p:cNvPr id="83" name="text-81"/>
-          <p:cNvSpPr txBox="1"/>
-          <p:nvPr/>
-        </p:nvSpPr>
-        <p:spPr>
-          <a:xfrm>
-            <a:off x="9754362" y="13487400"/>
-            <a:ext cx="4450842" cy="1371600"/>
+            <a:ext cx="6096762" cy="1005840"/>
           </a:xfrm>
           <a:prstGeom prst="rect">
             <a:avLst/>
@@ -4337,11 +4313,8 @@
                   <a:schemeClr val="accent1"/>
                 </a:solidFill>
               </a:rPr>
-              <a:t>GitHub 저장소</a:t>
-            </a:r>
-            <a:endParaRPr lang="en-US" sz="1700" dirty="0"/>
-          </a:p>
-          <a:p>
+              <a:t>GitHub  </a:t>
+            </a:r>
             <a:pPr indent="0" marL="0">
               <a:spcAft>
                 <a:spcPts val="600"/>
@@ -4406,7 +4379,7 @@
           </p:nvPr>
         </p:nvGraphicFramePr>
         <p:xfrm>
-          <a:off x="8108442" y="14996160"/>
+          <a:off x="8108442" y="14630400"/>
           <a:ext cx="6096762" cy="914400"/>
         </p:xfrm>
         <a:graphic>
@@ -5209,18 +5182,18 @@
       </p:graphicFrame>
       <p:sp>
         <p:nvSpPr>
-          <p:cNvPr id="85" name="card-82"/>
+          <p:cNvPr id="84" name="card-82"/>
           <p:cNvSpPr/>
           <p:nvPr/>
         </p:nvSpPr>
         <p:spPr>
           <a:xfrm>
-            <a:off x="7742682" y="17282160"/>
-            <a:ext cx="6828282" cy="3644798"/>
+            <a:off x="7742682" y="16916400"/>
+            <a:ext cx="6828282" cy="4010558"/>
           </a:xfrm>
           <a:prstGeom prst="roundRect">
             <a:avLst>
-              <a:gd name="adj" fmla="val 4516"/>
+              <a:gd name="adj" fmla="val 4104"/>
             </a:avLst>
           </a:prstGeom>
           <a:solidFill>
@@ -5236,13 +5209,13 @@
       </p:sp>
       <p:sp>
         <p:nvSpPr>
-          <p:cNvPr id="86" name="badge-83"/>
+          <p:cNvPr id="85" name="badge-83"/>
           <p:cNvSpPr/>
           <p:nvPr/>
         </p:nvSpPr>
         <p:spPr>
           <a:xfrm>
-            <a:off x="8062722" y="17556480"/>
+            <a:off x="8062722" y="17190720"/>
             <a:ext cx="621792" cy="621792"/>
           </a:xfrm>
           <a:prstGeom prst="ellipse">
@@ -5261,13 +5234,13 @@
       </p:sp>
       <p:sp>
         <p:nvSpPr>
-          <p:cNvPr id="87" name="text-84"/>
+          <p:cNvPr id="86" name="text-84"/>
           <p:cNvSpPr txBox="1"/>
           <p:nvPr/>
         </p:nvSpPr>
         <p:spPr>
           <a:xfrm>
-            <a:off x="8062722" y="17556480"/>
+            <a:off x="8062722" y="17190720"/>
             <a:ext cx="621792" cy="621792"/>
           </a:xfrm>
           <a:prstGeom prst="rect">
@@ -5297,13 +5270,13 @@
       </p:sp>
       <p:sp>
         <p:nvSpPr>
-          <p:cNvPr id="88" name="text-85"/>
+          <p:cNvPr id="87" name="text-85"/>
           <p:cNvSpPr txBox="1"/>
           <p:nvPr/>
         </p:nvSpPr>
         <p:spPr>
           <a:xfrm>
-            <a:off x="8839962" y="17556480"/>
+            <a:off x="8839962" y="17190720"/>
             <a:ext cx="5456682" cy="621792"/>
           </a:xfrm>
           <a:prstGeom prst="rect">
@@ -5333,14 +5306,14 @@
       </p:sp>
       <p:sp>
         <p:nvSpPr>
-          <p:cNvPr id="89" name="text-86"/>
+          <p:cNvPr id="88" name="text-86"/>
           <p:cNvSpPr txBox="1"/>
           <p:nvPr/>
         </p:nvSpPr>
         <p:spPr>
           <a:xfrm>
-            <a:off x="8108442" y="18425160"/>
-            <a:ext cx="6096762" cy="2227478"/>
+            <a:off x="8108442" y="18059400"/>
+            <a:ext cx="6096762" cy="2593238"/>
           </a:xfrm>
           <a:prstGeom prst="rect">
             <a:avLst/>
@@ -5460,7 +5433,7 @@
       </p:sp>
       <p:sp>
         <p:nvSpPr>
-          <p:cNvPr id="90" name="card-87"/>
+          <p:cNvPr id="89" name="card-87"/>
           <p:cNvSpPr/>
           <p:nvPr/>
         </p:nvSpPr>
@@ -5487,7 +5460,7 @@
       </p:sp>
       <p:sp>
         <p:nvSpPr>
-          <p:cNvPr id="91" name="badge-88"/>
+          <p:cNvPr id="90" name="badge-88"/>
           <p:cNvSpPr/>
           <p:nvPr/>
         </p:nvSpPr>
@@ -5512,7 +5485,7 @@
       </p:sp>
       <p:sp>
         <p:nvSpPr>
-          <p:cNvPr id="92" name="text-89"/>
+          <p:cNvPr id="91" name="text-89"/>
           <p:cNvSpPr txBox="1"/>
           <p:nvPr/>
         </p:nvSpPr>
@@ -5548,7 +5521,7 @@
       </p:sp>
       <p:sp>
         <p:nvSpPr>
-          <p:cNvPr id="93" name="text-90"/>
+          <p:cNvPr id="92" name="text-90"/>
           <p:cNvSpPr txBox="1"/>
           <p:nvPr/>
         </p:nvSpPr>
@@ -5584,7 +5557,7 @@
       </p:sp>
       <p:sp>
         <p:nvSpPr>
-          <p:cNvPr id="94" name="text-91"/>
+          <p:cNvPr id="93" name="text-91"/>
           <p:cNvSpPr txBox="1"/>
           <p:nvPr/>
         </p:nvSpPr>
@@ -5668,7 +5641,7 @@
       </p:sp>
       <p:sp>
         <p:nvSpPr>
-          <p:cNvPr id="95" name="stat-92"/>
+          <p:cNvPr id="94" name="stat-92"/>
           <p:cNvSpPr/>
           <p:nvPr/>
         </p:nvSpPr>
@@ -5695,7 +5668,7 @@
       </p:sp>
       <p:sp>
         <p:nvSpPr>
-          <p:cNvPr id="96" name="text-93"/>
+          <p:cNvPr id="95" name="text-93"/>
           <p:cNvSpPr txBox="1"/>
           <p:nvPr/>
         </p:nvSpPr>
@@ -5731,7 +5704,7 @@
       </p:sp>
       <p:sp>
         <p:nvSpPr>
-          <p:cNvPr id="97" name="text-94"/>
+          <p:cNvPr id="96" name="text-94"/>
           <p:cNvSpPr txBox="1"/>
           <p:nvPr/>
         </p:nvSpPr>
@@ -5781,7 +5754,7 @@
       </p:sp>
       <p:sp>
         <p:nvSpPr>
-          <p:cNvPr id="98" name="stat-95"/>
+          <p:cNvPr id="97" name="stat-95"/>
           <p:cNvSpPr/>
           <p:nvPr/>
         </p:nvSpPr>
@@ -5808,7 +5781,7 @@
       </p:sp>
       <p:sp>
         <p:nvSpPr>
-          <p:cNvPr id="99" name="text-96"/>
+          <p:cNvPr id="98" name="text-96"/>
           <p:cNvSpPr txBox="1"/>
           <p:nvPr/>
         </p:nvSpPr>
@@ -5844,7 +5817,7 @@
       </p:sp>
       <p:sp>
         <p:nvSpPr>
-          <p:cNvPr id="100" name="text-97"/>
+          <p:cNvPr id="99" name="text-97"/>
           <p:cNvSpPr txBox="1"/>
           <p:nvPr/>
         </p:nvSpPr>
@@ -5894,7 +5867,7 @@
       </p:sp>
       <p:sp>
         <p:nvSpPr>
-          <p:cNvPr id="101" name="stat-98"/>
+          <p:cNvPr id="100" name="stat-98"/>
           <p:cNvSpPr/>
           <p:nvPr/>
         </p:nvSpPr>
@@ -5921,7 +5894,7 @@
       </p:sp>
       <p:sp>
         <p:nvSpPr>
-          <p:cNvPr id="102" name="text-99"/>
+          <p:cNvPr id="101" name="text-99"/>
           <p:cNvSpPr txBox="1"/>
           <p:nvPr/>
         </p:nvSpPr>
@@ -5957,7 +5930,7 @@
       </p:sp>
       <p:sp>
         <p:nvSpPr>
-          <p:cNvPr id="103" name="text-100"/>
+          <p:cNvPr id="102" name="text-100"/>
           <p:cNvSpPr txBox="1"/>
           <p:nvPr/>
         </p:nvSpPr>
@@ -6007,7 +5980,7 @@
       </p:sp>
       <p:graphicFrame>
         <p:nvGraphicFramePr>
-          <p:cNvPr id="104" name="chart-ic" descr=""/>
+          <p:cNvPr id="103" name="chart-ic" descr=""/>
           <p:cNvGraphicFramePr/>
           <p:nvPr/>
         </p:nvGraphicFramePr>
@@ -6017,13 +5990,13 @@
         </p:xfrm>
         <a:graphic xmlns:a="http://schemas.openxmlformats.org/drawingml/2006/main">
           <a:graphicData uri="http://schemas.openxmlformats.org/drawingml/2006/chart">
-            <c:chart xmlns:c="http://schemas.openxmlformats.org/drawingml/2006/chart" r:id="rId2"/>
+            <c:chart xmlns:c="http://schemas.openxmlformats.org/drawingml/2006/chart" r:id="rId1"/>
           </a:graphicData>
         </a:graphic>
       </p:graphicFrame>
       <p:graphicFrame>
         <p:nvGraphicFramePr>
-          <p:cNvPr id="105" name="chart-window" descr=""/>
+          <p:cNvPr id="104" name="chart-window" descr=""/>
           <p:cNvGraphicFramePr/>
           <p:nvPr/>
         </p:nvGraphicFramePr>
@@ -6033,7 +6006,7 @@
         </p:xfrm>
         <a:graphic xmlns:a="http://schemas.openxmlformats.org/drawingml/2006/main">
           <a:graphicData uri="http://schemas.openxmlformats.org/drawingml/2006/chart">
-            <c:chart xmlns:c="http://schemas.openxmlformats.org/drawingml/2006/chart" r:id="rId3"/>
+            <c:chart xmlns:c="http://schemas.openxmlformats.org/drawingml/2006/chart" r:id="rId2"/>
           </a:graphicData>
         </a:graphic>
       </p:graphicFrame>

--- a/docs/exhibition/패널_A_논문구조.pptx
+++ b/docs/exhibition/패널_A_논문구조.pptx
@@ -107,7 +107,7 @@
   <p:extLst>
     <p:ext uri="{521415D9-36F7-43E2-AB2F-B90AF26B5E84}">
       <p14:sectionLst xmlns:p14="http://schemas.microsoft.com/office/powerpoint/2010/main">
-        <p14:section name="패널" id="{dfa80cf7-3160-4edb-3ea7-4686a5194520}">
+        <p14:section name="패널" id="{84c47d44-a3c6-a2bb-6e85-e1479fb99457}">
           <p14:sldIdLst>
             <p14:sldId id="256"/>
           </p14:sldIdLst>
@@ -1670,11 +1670,11 @@
         <p:spPr>
           <a:xfrm>
             <a:off x="548640" y="2926080"/>
-            <a:ext cx="6828282" cy="4343400"/>
+            <a:ext cx="6828282" cy="3931920"/>
           </a:xfrm>
           <a:prstGeom prst="roundRect">
             <a:avLst>
-              <a:gd name="adj" fmla="val 3789"/>
+              <a:gd name="adj" fmla="val 4186"/>
             </a:avLst>
           </a:prstGeom>
           <a:solidFill>
@@ -1794,7 +1794,7 @@
         <p:spPr>
           <a:xfrm>
             <a:off x="914400" y="4069080"/>
-            <a:ext cx="6096762" cy="2926080"/>
+            <a:ext cx="6096762" cy="2514600"/>
           </a:xfrm>
           <a:prstGeom prst="rect">
             <a:avLst/>
@@ -1906,7 +1906,7 @@
                   <a:schemeClr val="tx1"/>
                 </a:solidFill>
               </a:rPr>
-              <a:t>뉴스의 의미·감성(주 신호)과 과거 30일 시장 상태(보조 신호)를 결합해 뉴스 발표 후 1일 초과수익률 예측</a:t>
+              <a:t>뉴스의 의미·감성(주 신호)과 과거 30일 시장 상태(보조 신호)를 결합해 1일 초과수익률 예측</a:t>
             </a:r>
             <a:endParaRPr lang="en-US" sz="1900" dirty="0"/>
           </a:p>
@@ -1941,7 +1941,7 @@
                   <a:schemeClr val="tx1"/>
                 </a:solidFill>
               </a:rPr>
-              <a:t>실제 기업 보도자료 6.3만 건, 미래 정보 누수 없는 표본 외 평가</a:t>
+              <a:t>기업 보도자료 6.3만 건, 미래 정보 누수 없는 표본 외 평가</a:t>
             </a:r>
             <a:endParaRPr lang="en-US" sz="1900" dirty="0"/>
           </a:p>
@@ -1955,12 +1955,12 @@
         </p:nvSpPr>
         <p:spPr>
           <a:xfrm>
-            <a:off x="548640" y="7543800"/>
-            <a:ext cx="6828282" cy="4526280"/>
+            <a:off x="548640" y="7132320"/>
+            <a:ext cx="6828282" cy="4937760"/>
           </a:xfrm>
           <a:prstGeom prst="roundRect">
             <a:avLst>
-              <a:gd name="adj" fmla="val 3636"/>
+              <a:gd name="adj" fmla="val 3333"/>
             </a:avLst>
           </a:prstGeom>
           <a:solidFill>
@@ -1982,7 +1982,7 @@
         </p:nvSpPr>
         <p:spPr>
           <a:xfrm>
-            <a:off x="868680" y="7818120"/>
+            <a:off x="868680" y="7406640"/>
             <a:ext cx="621792" cy="621792"/>
           </a:xfrm>
           <a:prstGeom prst="ellipse">
@@ -2007,7 +2007,7 @@
         </p:nvSpPr>
         <p:spPr>
           <a:xfrm>
-            <a:off x="868680" y="7818120"/>
+            <a:off x="868680" y="7406640"/>
             <a:ext cx="621792" cy="621792"/>
           </a:xfrm>
           <a:prstGeom prst="rect">
@@ -2043,7 +2043,7 @@
         </p:nvSpPr>
         <p:spPr>
           <a:xfrm>
-            <a:off x="1645920" y="7818120"/>
+            <a:off x="1645920" y="7406640"/>
             <a:ext cx="5456682" cy="621792"/>
           </a:xfrm>
           <a:prstGeom prst="rect">
@@ -2079,8 +2079,8 @@
         </p:nvSpPr>
         <p:spPr>
           <a:xfrm>
-            <a:off x="914400" y="8686800"/>
-            <a:ext cx="6096762" cy="3108960"/>
+            <a:off x="914400" y="8275320"/>
+            <a:ext cx="6096762" cy="3520440"/>
           </a:xfrm>
           <a:prstGeom prst="rect">
             <a:avLst/>
@@ -2100,7 +2100,7 @@
               <a:buChar char="•"/>
             </a:pPr>
             <a:r>
-              <a:rPr lang="en-US" sz="1800" b="1" dirty="0">
+              <a:rPr lang="en-US" sz="1750" b="1" dirty="0">
                 <a:solidFill>
                   <a:schemeClr val="accent1"/>
                 </a:solidFill>
@@ -2112,19 +2112,19 @@
                 <a:spcPct val="105000"/>
               </a:lnSpc>
               <a:spcAft>
-                <a:spcPts val="700"/>
+                <a:spcPts val="800"/>
               </a:spcAft>
               <a:buNone/>
             </a:pPr>
             <a:r>
-              <a:rPr lang="en-US" sz="1800" dirty="0">
+              <a:rPr lang="en-US" sz="1750" dirty="0">
                 <a:solidFill>
                   <a:schemeClr val="tx1"/>
                 </a:solidFill>
               </a:rPr>
               <a:t>GPT-4o-mini 요약·감성 점수 + 요약문 임베딩(1536차원) → 완전연결층 → 512차원</a:t>
             </a:r>
-            <a:endParaRPr lang="en-US" sz="1800" dirty="0"/>
+            <a:endParaRPr lang="en-US" sz="1750" dirty="0"/>
           </a:p>
           <a:p>
             <a:pPr marL="228600" indent="-228600">
@@ -2135,7 +2135,7 @@
               <a:buChar char="•"/>
             </a:pPr>
             <a:r>
-              <a:rPr lang="en-US" sz="1800" b="1" dirty="0">
+              <a:rPr lang="en-US" sz="1750" b="1" dirty="0">
                 <a:solidFill>
                   <a:schemeClr val="accent1"/>
                 </a:solidFill>
@@ -2147,19 +2147,19 @@
                 <a:spcPct val="105000"/>
               </a:lnSpc>
               <a:spcAft>
-                <a:spcPts val="700"/>
+                <a:spcPts val="800"/>
               </a:spcAft>
               <a:buNone/>
             </a:pPr>
             <a:r>
-              <a:rPr lang="en-US" sz="1800" dirty="0">
+              <a:rPr lang="en-US" sz="1750" dirty="0">
                 <a:solidFill>
                   <a:schemeClr val="tx1"/>
                 </a:solidFill>
               </a:rPr>
-              <a:t>기술적 지표 9종 × 30일 → 인과적 TCN → 시점별 512차원</a:t>
-            </a:r>
-            <a:endParaRPr lang="en-US" sz="1800" dirty="0"/>
+              <a:t>과거 30일 지표 9종을 TCN으로 읽어 하루마다 512차원 벡터로 요약 (미래 정보 차단)</a:t>
+            </a:r>
+            <a:endParaRPr lang="en-US" sz="1750" dirty="0"/>
           </a:p>
           <a:p>
             <a:pPr marL="228600" indent="-228600">
@@ -2170,7 +2170,7 @@
               <a:buChar char="•"/>
             </a:pPr>
             <a:r>
-              <a:rPr lang="en-US" sz="1800" b="1" dirty="0">
+              <a:rPr lang="en-US" sz="1750" b="1" dirty="0">
                 <a:solidFill>
                   <a:schemeClr val="accent1"/>
                 </a:solidFill>
@@ -2182,19 +2182,19 @@
                 <a:spcPct val="105000"/>
               </a:lnSpc>
               <a:spcAft>
-                <a:spcPts val="700"/>
+                <a:spcPts val="800"/>
               </a:spcAft>
               <a:buNone/>
             </a:pPr>
             <a:r>
-              <a:rPr lang="en-US" sz="1800" dirty="0">
+              <a:rPr lang="en-US" sz="1750" dirty="0">
                 <a:solidFill>
                   <a:schemeClr val="tx1"/>
                 </a:solidFill>
               </a:rPr>
-              <a:t>주 신호(Q)로 30개 보조 벡터(K·V)를 softmax 가중 평균</a:t>
-            </a:r>
-            <a:endParaRPr lang="en-US" sz="1800" dirty="0"/>
+              <a:t>뉴스 벡터(Q)와 30일 각 지표 벡터(K)의 관련도를 내적으로 계산 → softmax 가중치(합 1) → 지표 벡터(V)를 가중 평균해 뉴스와 관련 깊은 날을 더 반영. 뉴스 1개가 30일을 한 방향으로만 참조해 '비대칭'</a:t>
+            </a:r>
+            <a:endParaRPr lang="en-US" sz="1750" dirty="0"/>
           </a:p>
           <a:p>
             <a:pPr marL="228600" indent="-228600">
@@ -2205,7 +2205,7 @@
               <a:buChar char="•"/>
             </a:pPr>
             <a:r>
-              <a:rPr lang="en-US" sz="1800" b="1" dirty="0">
+              <a:rPr lang="en-US" sz="1750" b="1" dirty="0">
                 <a:solidFill>
                   <a:schemeClr val="accent1"/>
                 </a:solidFill>
@@ -2217,19 +2217,19 @@
                 <a:spcPct val="105000"/>
               </a:lnSpc>
               <a:spcAft>
-                <a:spcPts val="700"/>
+                <a:spcPts val="800"/>
               </a:spcAft>
               <a:buNone/>
             </a:pPr>
             <a:r>
-              <a:rPr lang="en-US" sz="1800" dirty="0">
+              <a:rPr lang="en-US" sz="1750" dirty="0">
                 <a:solidFill>
                   <a:schemeClr val="tx1"/>
                 </a:solidFill>
               </a:rPr>
-              <a:t>h = p + σ(W[p; c]) ⊙ c, 보조 정보 반영 정도를 학습</a:t>
-            </a:r>
-            <a:endParaRPr lang="en-US" sz="1800" dirty="0"/>
+              <a:t>h = p + σ(W[p; c]) ⊙ c, 보조 정보 반영 정도 학습</a:t>
+            </a:r>
+            <a:endParaRPr lang="en-US" sz="1750" dirty="0"/>
           </a:p>
           <a:p>
             <a:pPr marL="228600" indent="-228600">
@@ -2240,7 +2240,7 @@
               <a:buChar char="•"/>
             </a:pPr>
             <a:r>
-              <a:rPr lang="en-US" sz="1800" b="1" dirty="0">
+              <a:rPr lang="en-US" sz="1750" b="1" dirty="0">
                 <a:solidFill>
                   <a:schemeClr val="accent1"/>
                 </a:solidFill>
@@ -2252,19 +2252,19 @@
                 <a:spcPct val="105000"/>
               </a:lnSpc>
               <a:spcAft>
-                <a:spcPts val="700"/>
+                <a:spcPts val="800"/>
               </a:spcAft>
               <a:buNone/>
             </a:pPr>
             <a:r>
-              <a:rPr lang="en-US" sz="1800" dirty="0">
+              <a:rPr lang="en-US" sz="1750" dirty="0">
                 <a:solidFill>
                   <a:schemeClr val="tx1"/>
                 </a:solidFill>
               </a:rPr>
               <a:t>MLP 512 → 256 → 64 → 1</a:t>
             </a:r>
-            <a:endParaRPr lang="en-US" sz="1800" dirty="0"/>
+            <a:endParaRPr lang="en-US" sz="1750" dirty="0"/>
           </a:p>
         </p:txBody>
       </p:sp>

--- a/docs/exhibition/패널_A_논문구조.pptx
+++ b/docs/exhibition/패널_A_논문구조.pptx
@@ -4,14 +4,14 @@
   <p:sldMasterIdLst>
     <p:sldMasterId id="2147483648" r:id="rId1"/>
   </p:sldMasterIdLst>
+  <p:notesMasterIdLst>
+    <p:notesMasterId r:id="rId3"/>
+  </p:notesMasterIdLst>
   <p:sldIdLst>
     <p:sldId id="256" r:id="rId2"/>
   </p:sldIdLst>
-  <p:notesMasterIdLst>
-    <p:notesMasterId r:id="rId3"/>
-  </p:notesMasterIdLst>
-  <p:sldSz cx="15119604" cy="21384158"/>
-  <p:notesSz cx="21384158" cy="15119604"/>
+  <p:sldSz cx="15119350" cy="21383625"/>
+  <p:notesSz cx="21383625" cy="15119350"/>
   <p:defaultTextStyle>
     <a:lvl1pPr marL="0" algn="l" defTabSz="914400" rtl="0" eaLnBrk="1" latinLnBrk="0" hangingPunct="1">
       <a:defRPr sz="1800" kern="1200">
@@ -107,7 +107,7 @@
   <p:extLst>
     <p:ext uri="{521415D9-36F7-43E2-AB2F-B90AF26B5E84}">
       <p14:sectionLst xmlns:p14="http://schemas.microsoft.com/office/powerpoint/2010/main">
-        <p14:section name="패널" id="{84c47d44-a3c6-a2bb-6e85-e1479fb99457}">
+        <p14:section name="패널" id="{DFA80CF7-3160-4EDB-3EA7-4686A5194520}">
           <p14:sldIdLst>
             <p14:sldId id="256"/>
           </p14:sldIdLst>
@@ -122,9 +122,11 @@
 </file>
 
 <file path=ppt/charts/chart1.xml><?xml version="1.0" encoding="utf-8"?>
-<c:chartSpace xmlns:c="http://schemas.openxmlformats.org/drawingml/2006/chart" xmlns:a="http://schemas.openxmlformats.org/drawingml/2006/main" xmlns:r="http://schemas.openxmlformats.org/officeDocument/2006/relationships">
+<c:chartSpace xmlns:c="http://schemas.openxmlformats.org/drawingml/2006/chart" xmlns:a="http://schemas.openxmlformats.org/drawingml/2006/main" xmlns:r="http://schemas.openxmlformats.org/officeDocument/2006/relationships" xmlns:c16r2="http://schemas.microsoft.com/office/drawing/2015/06/chart">
   <c:date1904 val="0"/>
+  <c:lang val="ko-KR"/>
   <c:roundedCorners val="1"/>
+  <c:style val="2"/>
   <c:chart>
     <c:title>
       <c:tx>
@@ -141,18 +143,44 @@
               </a:defRPr>
             </a:pPr>
             <a:r>
-              <a:rPr sz="1700" b="0" i="0" u="none" strike="noStrike">
+              <a:rPr lang="ko-KR" altLang="en-US" sz="1700" b="0" i="0" u="none" strike="noStrike">
                 <a:solidFill>
                   <a:srgbClr val="14233F"/>
                 </a:solidFill>
                 <a:latin typeface="+mn-lt"/>
               </a:rPr>
-              <a:t>모델별 순위 IC (3개 구간 합산)</a:t>
+              <a:t>모델별 순위 IC (높을수록 정확)</a:t>
+            </a:r>
+            <a:r>
+              <a:rPr lang="en-US" altLang="ko-KR" sz="1700" b="0" i="0" u="none" strike="noStrike">
+                <a:solidFill>
+                  <a:srgbClr val="14233F"/>
+                </a:solidFill>
+                <a:latin typeface="+mn-lt"/>
+              </a:rPr>
+              <a:t/>
+            </a:r>
+            <a:r>
+              <a:rPr lang="ko-KR" altLang="en-US" sz="1700" b="0" i="0" u="none" strike="noStrike">
+                <a:solidFill>
+                  <a:srgbClr val="14233F"/>
+                </a:solidFill>
+                <a:latin typeface="+mn-lt"/>
+              </a:rPr>
+              <a:t/>
+            </a:r>
+            <a:r>
+              <a:rPr lang="en-US" altLang="ko-KR" sz="1700" b="0" i="0" u="none" strike="noStrike">
+                <a:solidFill>
+                  <a:srgbClr val="14233F"/>
+                </a:solidFill>
+                <a:latin typeface="+mn-lt"/>
+              </a:rPr>
+              <a:t/>
             </a:r>
           </a:p>
         </c:rich>
       </c:tx>
-      <c:layout/>
       <c:overlay val="0"/>
     </c:title>
     <c:autoTitleDeleted val="0"/>
@@ -183,30 +211,6 @@
             <a:effectLst/>
           </c:spPr>
           <c:invertIfNegative val="0"/>
-          <c:dLbls>
-            <c:numFmt formatCode="0.000" sourceLinked="0"/>
-            <c:txPr>
-              <a:bodyPr/>
-              <a:lstStyle/>
-              <a:p>
-                <a:pPr>
-                  <a:defRPr b="0" i="0" strike="noStrike" sz="1500" u="none">
-                    <a:solidFill>
-                      <a:srgbClr val="000000"/>
-                    </a:solidFill>
-                    <a:latin typeface="+mn-lt"/>
-                  </a:defRPr>
-                </a:pPr>
-              </a:p>
-            </c:txPr>
-            <c:showLegendKey val="0"/>
-            <c:showVal val="1"/>
-            <c:showCatName val="0"/>
-            <c:showSerName val="0"/>
-            <c:showPercent val="0"/>
-            <c:showBubbleSize val="0"/>
-            <c:showLeaderLines val="0"/>
-          </c:dLbls>
           <c:dPt>
             <c:idx val="0"/>
             <c:invertIfNegative val="0"/>
@@ -217,6 +221,11 @@
               </a:solidFill>
               <a:effectLst/>
             </c:spPr>
+            <c:extLst>
+              <c:ext xmlns:c16="http://schemas.microsoft.com/office/drawing/2014/chart" uri="{C3380CC4-5D6E-409C-BE32-E72D297353CC}">
+                <c16:uniqueId val="{00000001-0817-44ED-8E7C-C02718DE7F71}"/>
+              </c:ext>
+            </c:extLst>
           </c:dPt>
           <c:dPt>
             <c:idx val="1"/>
@@ -228,6 +237,11 @@
               </a:solidFill>
               <a:effectLst/>
             </c:spPr>
+            <c:extLst>
+              <c:ext xmlns:c16="http://schemas.microsoft.com/office/drawing/2014/chart" uri="{C3380CC4-5D6E-409C-BE32-E72D297353CC}">
+                <c16:uniqueId val="{00000003-0817-44ED-8E7C-C02718DE7F71}"/>
+              </c:ext>
+            </c:extLst>
           </c:dPt>
           <c:dPt>
             <c:idx val="2"/>
@@ -239,6 +253,11 @@
               </a:solidFill>
               <a:effectLst/>
             </c:spPr>
+            <c:extLst>
+              <c:ext xmlns:c16="http://schemas.microsoft.com/office/drawing/2014/chart" uri="{C3380CC4-5D6E-409C-BE32-E72D297353CC}">
+                <c16:uniqueId val="{00000005-0817-44ED-8E7C-C02718DE7F71}"/>
+              </c:ext>
+            </c:extLst>
           </c:dPt>
           <c:dPt>
             <c:idx val="3"/>
@@ -250,28 +269,68 @@
               </a:solidFill>
               <a:effectLst/>
             </c:spPr>
+            <c:extLst>
+              <c:ext xmlns:c16="http://schemas.microsoft.com/office/drawing/2014/chart" uri="{C3380CC4-5D6E-409C-BE32-E72D297353CC}">
+                <c16:uniqueId val="{00000007-0817-44ED-8E7C-C02718DE7F71}"/>
+              </c:ext>
+            </c:extLst>
           </c:dPt>
+          <c:dLbls>
+            <c:numFmt formatCode="0.000" sourceLinked="0"/>
+            <c:spPr>
+              <a:noFill/>
+              <a:ln>
+                <a:noFill/>
+              </a:ln>
+              <a:effectLst/>
+            </c:spPr>
+            <c:txPr>
+              <a:bodyPr/>
+              <a:lstStyle/>
+              <a:p>
+                <a:pPr>
+                  <a:defRPr sz="1500" b="0" i="0" u="none" strike="noStrike">
+                    <a:solidFill>
+                      <a:srgbClr val="000000"/>
+                    </a:solidFill>
+                    <a:latin typeface="+mn-lt"/>
+                  </a:defRPr>
+                </a:pPr>
+                <a:endParaRPr lang="ko-KR"/>
+              </a:p>
+            </c:txPr>
+            <c:showLegendKey val="0"/>
+            <c:showVal val="1"/>
+            <c:showCatName val="0"/>
+            <c:showSerName val="0"/>
+            <c:showPercent val="0"/>
+            <c:showBubbleSize val="0"/>
+            <c:showLeaderLines val="0"/>
+            <c:extLst>
+              <c:ext xmlns:c15="http://schemas.microsoft.com/office/drawing/2012/chart" uri="{CE6537A1-D6FC-4f65-9D91-7224C49458BB}">
+                <c15:showLeaderLines val="0"/>
+              </c:ext>
+            </c:extLst>
+          </c:dLbls>
           <c:cat>
-            <c:multiLvlStrRef>
+            <c:strRef>
               <c:f>Sheet1!$A$2:$A$5</c:f>
-              <c:multiLvlStrCache>
+              <c:strCache>
                 <c:ptCount val="4"/>
-                <c:lvl>
-                  <c:pt idx="0">
-                    <c:v>감성 점수만</c:v>
-                  </c:pt>
-                  <c:pt idx="1">
-                    <c:v>LLM 방향 규칙</c:v>
-                  </c:pt>
-                  <c:pt idx="2">
-                    <c:v>논문 구조 (P0)</c:v>
-                  </c:pt>
-                  <c:pt idx="3">
-                    <c:v>추가 개선 실험</c:v>
-                  </c:pt>
-                </c:lvl>
-              </c:multiLvlStrCache>
-            </c:multiLvlStrRef>
+                <c:pt idx="0">
+                  <c:v>감성 점수만</c:v>
+                </c:pt>
+                <c:pt idx="1">
+                  <c:v>LLM 호재·악재 판단</c:v>
+                </c:pt>
+                <c:pt idx="2">
+                  <c:v>논문 구조 (P0)</c:v>
+                </c:pt>
+                <c:pt idx="3">
+                  <c:v>추가 개선 실험</c:v>
+                </c:pt>
+              </c:strCache>
+            </c:strRef>
           </c:cat>
           <c:val>
             <c:numRef>
@@ -280,7 +339,7 @@
                 <c:formatCode>General</c:formatCode>
                 <c:ptCount val="4"/>
                 <c:pt idx="0">
-                  <c:v>-0.006</c:v>
+                  <c:v>-6.0000000000000001E-3</c:v>
                 </c:pt>
                 <c:pt idx="1">
                   <c:v>0</c:v>
@@ -289,41 +348,28 @@
                   <c:v>0.06</c:v>
                 </c:pt>
                 <c:pt idx="3">
-                  <c:v>0.092</c:v>
+                  <c:v>9.1999999999999998E-2</c:v>
                 </c:pt>
               </c:numCache>
             </c:numRef>
           </c:val>
+          <c:extLst>
+            <c:ext xmlns:c16="http://schemas.microsoft.com/office/drawing/2014/chart" uri="{C3380CC4-5D6E-409C-BE32-E72D297353CC}">
+              <c16:uniqueId val="{00000008-0817-44ED-8E7C-C02718DE7F71}"/>
+            </c:ext>
+          </c:extLst>
         </c:ser>
         <c:dLbls>
-          <c:numFmt formatCode="0.000" sourceLinked="0"/>
-          <c:txPr>
-            <a:bodyPr/>
-            <a:lstStyle/>
-            <a:p>
-              <a:pPr>
-                <a:defRPr b="0" i="0" strike="noStrike" sz="1500" u="none">
-                  <a:solidFill>
-                    <a:srgbClr val="000000"/>
-                  </a:solidFill>
-                  <a:latin typeface="+mn-lt"/>
-                </a:defRPr>
-              </a:pPr>
-            </a:p>
-          </c:txPr>
           <c:showLegendKey val="0"/>
           <c:showVal val="1"/>
           <c:showCatName val="0"/>
           <c:showSerName val="0"/>
           <c:showPercent val="0"/>
           <c:showBubbleSize val="0"/>
-          <c:showLeaderLines val="0"/>
         </c:dLbls>
         <c:gapWidth val="45"/>
-        <c:overlap val="0"/>
         <c:axId val="2094734554"/>
         <c:axId val="2094734552"/>
-        <c:axId val="2094734556"/>
       </c:barChart>
       <c:catAx>
         <c:axId val="2094734554"/>
@@ -364,6 +410,7 @@
         <c:crosses val="autoZero"/>
         <c:auto val="1"/>
         <c:lblAlgn val="ctr"/>
+        <c:lblOffset val="100"/>
         <c:noMultiLvlLbl val="1"/>
       </c:catAx>
       <c:valAx>
@@ -429,6 +476,7 @@
     </c:plotArea>
     <c:plotVisOnly val="1"/>
     <c:dispBlanksAs val="span"/>
+    <c:showDLblsOverMax val="1"/>
   </c:chart>
   <c:spPr>
     <a:noFill/>
@@ -444,9 +492,11 @@
 </file>
 
 <file path=ppt/charts/chart2.xml><?xml version="1.0" encoding="utf-8"?>
-<c:chartSpace xmlns:c="http://schemas.openxmlformats.org/drawingml/2006/chart" xmlns:a="http://schemas.openxmlformats.org/drawingml/2006/main" xmlns:r="http://schemas.openxmlformats.org/officeDocument/2006/relationships">
+<c:chartSpace xmlns:c="http://schemas.openxmlformats.org/drawingml/2006/chart" xmlns:a="http://schemas.openxmlformats.org/drawingml/2006/main" xmlns:r="http://schemas.openxmlformats.org/officeDocument/2006/relationships" xmlns:c16r2="http://schemas.microsoft.com/office/drawing/2015/06/chart">
   <c:date1904 val="0"/>
+  <c:lang val="ko-KR"/>
   <c:roundedCorners val="1"/>
+  <c:style val="2"/>
   <c:chart>
     <c:title>
       <c:tx>
@@ -463,18 +513,26 @@
               </a:defRPr>
             </a:pPr>
             <a:r>
-              <a:rPr sz="1700" b="0" i="0" u="none" strike="noStrike">
+              <a:rPr lang="ko-KR" altLang="en-US" sz="1700" b="0" i="0" u="none" strike="noStrike">
                 <a:solidFill>
                   <a:srgbClr val="14233F"/>
                 </a:solidFill>
                 <a:latin typeface="+mn-lt"/>
               </a:rPr>
-              <a:t>평가 구간별 순위 IC</a:t>
+              <a:t>평가 기간별 순위 IC (모두 0보다 큼)</a:t>
+            </a:r>
+            <a:r>
+              <a:rPr lang="en-US" altLang="ko-KR" sz="1700" b="0" i="0" u="none" strike="noStrike">
+                <a:solidFill>
+                  <a:srgbClr val="14233F"/>
+                </a:solidFill>
+                <a:latin typeface="+mn-lt"/>
+              </a:rPr>
+              <a:t/>
             </a:r>
           </a:p>
         </c:rich>
       </c:tx>
-      <c:layout/>
       <c:overlay val="0"/>
     </c:title>
     <c:autoTitleDeleted val="0"/>
@@ -507,18 +565,26 @@
           <c:invertIfNegative val="0"/>
           <c:dLbls>
             <c:numFmt formatCode="0.000" sourceLinked="0"/>
+            <c:spPr>
+              <a:noFill/>
+              <a:ln>
+                <a:noFill/>
+              </a:ln>
+              <a:effectLst/>
+            </c:spPr>
             <c:txPr>
               <a:bodyPr/>
               <a:lstStyle/>
               <a:p>
                 <a:pPr>
-                  <a:defRPr b="0" i="0" strike="noStrike" sz="1500" u="none">
+                  <a:defRPr sz="1500" b="0" i="0" u="none" strike="noStrike">
                     <a:solidFill>
                       <a:srgbClr val="000000"/>
                     </a:solidFill>
                     <a:latin typeface="+mn-lt"/>
                   </a:defRPr>
                 </a:pPr>
+                <a:endParaRPr lang="ko-KR"/>
               </a:p>
             </c:txPr>
             <c:showLegendKey val="0"/>
@@ -528,25 +594,28 @@
             <c:showPercent val="0"/>
             <c:showBubbleSize val="0"/>
             <c:showLeaderLines val="0"/>
+            <c:extLst>
+              <c:ext xmlns:c15="http://schemas.microsoft.com/office/drawing/2012/chart" uri="{CE6537A1-D6FC-4f65-9D91-7224C49458BB}">
+                <c15:showLeaderLines val="0"/>
+              </c:ext>
+            </c:extLst>
           </c:dLbls>
           <c:cat>
-            <c:multiLvlStrRef>
+            <c:strRef>
               <c:f>Sheet1!$A$2:$A$4</c:f>
-              <c:multiLvlStrCache>
+              <c:strCache>
                 <c:ptCount val="3"/>
-                <c:lvl>
-                  <c:pt idx="0">
-                    <c:v>20.11~12</c:v>
-                  </c:pt>
-                  <c:pt idx="1">
-                    <c:v>21.01~02</c:v>
-                  </c:pt>
-                  <c:pt idx="2">
-                    <c:v>21.03~05</c:v>
-                  </c:pt>
-                </c:lvl>
-              </c:multiLvlStrCache>
-            </c:multiLvlStrRef>
+                <c:pt idx="0">
+                  <c:v>20.11~12</c:v>
+                </c:pt>
+                <c:pt idx="1">
+                  <c:v>21.01~02</c:v>
+                </c:pt>
+                <c:pt idx="2">
+                  <c:v>21.03~05</c:v>
+                </c:pt>
+              </c:strCache>
+            </c:strRef>
           </c:cat>
           <c:val>
             <c:numRef>
@@ -555,47 +624,34 @@
                 <c:formatCode>General</c:formatCode>
                 <c:ptCount val="3"/>
                 <c:pt idx="0">
-                  <c:v>0.079</c:v>
+                  <c:v>7.9000000000000001E-2</c:v>
                 </c:pt>
                 <c:pt idx="1">
-                  <c:v>0.067</c:v>
+                  <c:v>6.7000000000000004E-2</c:v>
                 </c:pt>
                 <c:pt idx="2">
-                  <c:v>0.033</c:v>
+                  <c:v>3.3000000000000002E-2</c:v>
                 </c:pt>
               </c:numCache>
             </c:numRef>
           </c:val>
+          <c:extLst>
+            <c:ext xmlns:c16="http://schemas.microsoft.com/office/drawing/2014/chart" uri="{C3380CC4-5D6E-409C-BE32-E72D297353CC}">
+              <c16:uniqueId val="{00000000-475C-4B90-A36D-FA963F58C6D3}"/>
+            </c:ext>
+          </c:extLst>
         </c:ser>
         <c:dLbls>
-          <c:numFmt formatCode="0.000" sourceLinked="0"/>
-          <c:txPr>
-            <a:bodyPr/>
-            <a:lstStyle/>
-            <a:p>
-              <a:pPr>
-                <a:defRPr b="0" i="0" strike="noStrike" sz="1500" u="none">
-                  <a:solidFill>
-                    <a:srgbClr val="000000"/>
-                  </a:solidFill>
-                  <a:latin typeface="+mn-lt"/>
-                </a:defRPr>
-              </a:pPr>
-            </a:p>
-          </c:txPr>
           <c:showLegendKey val="0"/>
           <c:showVal val="1"/>
           <c:showCatName val="0"/>
           <c:showSerName val="0"/>
           <c:showPercent val="0"/>
           <c:showBubbleSize val="0"/>
-          <c:showLeaderLines val="0"/>
         </c:dLbls>
         <c:gapWidth val="60"/>
-        <c:overlap val="0"/>
         <c:axId val="2094734554"/>
         <c:axId val="2094734552"/>
-        <c:axId val="2094734556"/>
       </c:barChart>
       <c:catAx>
         <c:axId val="2094734554"/>
@@ -636,6 +692,7 @@
         <c:crosses val="autoZero"/>
         <c:auto val="1"/>
         <c:lblAlgn val="ctr"/>
+        <c:lblOffset val="100"/>
         <c:noMultiLvlLbl val="1"/>
       </c:catAx>
       <c:valAx>
@@ -701,6 +758,7 @@
     </c:plotArea>
     <c:plotVisOnly val="1"/>
     <c:dispBlanksAs val="span"/>
+    <c:showDLblsOverMax val="1"/>
   </c:chart>
   <c:spPr>
     <a:noFill/>
@@ -737,240 +795,16 @@
           <a:chExt cx="0" cy="0"/>
         </a:xfrm>
       </p:grpSpPr>
-      <p:sp>
-        <p:nvSpPr>
-          <p:cNvPr id="2" name="Header Placeholder 1"/>
-          <p:cNvSpPr>
-            <a:spLocks noGrp="1"/>
-          </p:cNvSpPr>
-          <p:nvPr>
-            <p:ph type="hdr" sz="quarter"/>
-          </p:nvPr>
-        </p:nvSpPr>
-        <p:spPr>
-          <a:xfrm>
-            <a:off x="0" y="0"/>
-            <a:ext cx="2971800" cy="458788"/>
-          </a:xfrm>
-          <a:prstGeom prst="rect">
-            <a:avLst/>
-          </a:prstGeom>
-        </p:spPr>
-        <p:txBody>
-          <a:bodyPr vert="horz" lIns="91440" tIns="45720" rIns="91440" bIns="45720" rtlCol="0"/>
-          <a:lstStyle>
-            <a:lvl1pPr algn="l">
-              <a:defRPr sz="1200"/>
-            </a:lvl1pPr>
-          </a:lstStyle>
-          <a:p>
-            <a:endParaRPr lang="en-US"/>
-          </a:p>
-        </p:txBody>
-      </p:sp>
-      <p:sp>
-        <p:nvSpPr>
-          <p:cNvPr id="3" name="Date Placeholder 2"/>
-          <p:cNvSpPr>
-            <a:spLocks noGrp="1"/>
-          </p:cNvSpPr>
-          <p:nvPr>
-            <p:ph type="dt" idx="1"/>
-          </p:nvPr>
-        </p:nvSpPr>
-        <p:spPr>
-          <a:xfrm>
-            <a:off x="3884613" y="0"/>
-            <a:ext cx="2971800" cy="458788"/>
-          </a:xfrm>
-          <a:prstGeom prst="rect">
-            <a:avLst/>
-          </a:prstGeom>
-        </p:spPr>
-        <p:txBody>
-          <a:bodyPr vert="horz" lIns="91440" tIns="45720" rIns="91440" bIns="45720" rtlCol="0"/>
-          <a:lstStyle>
-            <a:lvl1pPr algn="r">
-              <a:defRPr sz="1200"/>
-            </a:lvl1pPr>
-          </a:lstStyle>
-          <a:p>
-            <a:fld id="{5282F153-3F37-0F45-9E97-73ACFA13230C}" type="datetimeFigureOut">
-              <a:rPr lang="en-US"/>
-              <a:t>7/23/19</a:t>
-            </a:fld>
-            <a:endParaRPr lang="en-US"/>
-          </a:p>
-        </p:txBody>
-      </p:sp>
-      <p:sp>
-        <p:nvSpPr>
-          <p:cNvPr id="4" name="Slide Image Placeholder 3"/>
-          <p:cNvSpPr>
-            <a:spLocks noGrp="1" noRot="1" noChangeAspect="1"/>
-          </p:cNvSpPr>
-          <p:nvPr>
-            <p:ph type="sldImg" idx="2"/>
-          </p:nvPr>
-        </p:nvSpPr>
-        <p:spPr>
-          <a:xfrm>
-            <a:off x="685800" y="1143000"/>
-            <a:ext cx="5486400" cy="3086100"/>
-          </a:xfrm>
-          <a:prstGeom prst="rect">
-            <a:avLst/>
-          </a:prstGeom>
-          <a:noFill/>
-          <a:ln w="12700">
-            <a:solidFill>
-              <a:prstClr val="black"/>
-            </a:solidFill>
-          </a:ln>
-        </p:spPr>
-        <p:txBody>
-          <a:bodyPr vert="horz" lIns="91440" tIns="45720" rIns="91440" bIns="45720" rtlCol="0" anchor="ctr"/>
-          <a:lstStyle/>
-          <a:p>
-            <a:endParaRPr lang="en-US"/>
-          </a:p>
-        </p:txBody>
-      </p:sp>
-      <p:sp>
-        <p:nvSpPr>
-          <p:cNvPr id="5" name="Notes Placeholder 4"/>
-          <p:cNvSpPr>
-            <a:spLocks noGrp="1"/>
-          </p:cNvSpPr>
-          <p:nvPr>
-            <p:ph type="body" sz="quarter" idx="3"/>
-          </p:nvPr>
-        </p:nvSpPr>
-        <p:spPr>
-          <a:xfrm>
-            <a:off x="685800" y="4400550"/>
-            <a:ext cx="5486400" cy="3600450"/>
-          </a:xfrm>
-          <a:prstGeom prst="rect">
-            <a:avLst/>
-          </a:prstGeom>
-        </p:spPr>
-        <p:txBody>
-          <a:bodyPr vert="horz" lIns="91440" tIns="45720" rIns="91440" bIns="45720" rtlCol="0"/>
-          <a:lstStyle/>
-          <a:p>
-            <a:pPr lvl="0"/>
-            <a:r>
-              <a:rPr lang="en-US"/>
-              <a:t>Click to edit Master text styles</a:t>
-            </a:r>
-          </a:p>
-          <a:p>
-            <a:pPr lvl="1"/>
-            <a:r>
-              <a:rPr lang="en-US"/>
-              <a:t>Second level</a:t>
-            </a:r>
-          </a:p>
-          <a:p>
-            <a:pPr lvl="2"/>
-            <a:r>
-              <a:rPr lang="en-US"/>
-              <a:t>Third level</a:t>
-            </a:r>
-          </a:p>
-          <a:p>
-            <a:pPr lvl="3"/>
-            <a:r>
-              <a:rPr lang="en-US"/>
-              <a:t>Fourth level</a:t>
-            </a:r>
-          </a:p>
-          <a:p>
-            <a:pPr lvl="4"/>
-            <a:r>
-              <a:rPr lang="en-US"/>
-              <a:t>Fifth level</a:t>
-            </a:r>
-          </a:p>
-        </p:txBody>
-      </p:sp>
-      <p:sp>
-        <p:nvSpPr>
-          <p:cNvPr id="6" name="Footer Placeholder 5"/>
-          <p:cNvSpPr>
-            <a:spLocks noGrp="1"/>
-          </p:cNvSpPr>
-          <p:nvPr>
-            <p:ph type="ftr" sz="quarter" idx="4"/>
-          </p:nvPr>
-        </p:nvSpPr>
-        <p:spPr>
-          <a:xfrm>
-            <a:off x="0" y="8685213"/>
-            <a:ext cx="2971800" cy="458787"/>
-          </a:xfrm>
-          <a:prstGeom prst="rect">
-            <a:avLst/>
-          </a:prstGeom>
-        </p:spPr>
-        <p:txBody>
-          <a:bodyPr vert="horz" lIns="91440" tIns="45720" rIns="91440" bIns="45720" rtlCol="0" anchor="b"/>
-          <a:lstStyle>
-            <a:lvl1pPr algn="l">
-              <a:defRPr sz="1200"/>
-            </a:lvl1pPr>
-          </a:lstStyle>
-          <a:p>
-            <a:endParaRPr lang="en-US"/>
-          </a:p>
-        </p:txBody>
-      </p:sp>
-      <p:sp>
-        <p:nvSpPr>
-          <p:cNvPr id="7" name="Slide Number Placeholder 6"/>
-          <p:cNvSpPr>
-            <a:spLocks noGrp="1"/>
-          </p:cNvSpPr>
-          <p:nvPr>
-            <p:ph type="sldNum" sz="quarter" idx="5"/>
-          </p:nvPr>
-        </p:nvSpPr>
-        <p:spPr>
-          <a:xfrm>
-            <a:off x="3884613" y="8685213"/>
-            <a:ext cx="2971800" cy="458787"/>
-          </a:xfrm>
-          <a:prstGeom prst="rect">
-            <a:avLst/>
-          </a:prstGeom>
-        </p:spPr>
-        <p:txBody>
-          <a:bodyPr vert="horz" lIns="91440" tIns="45720" rIns="91440" bIns="45720" rtlCol="0" anchor="b"/>
-          <a:lstStyle>
-            <a:lvl1pPr algn="r">
-              <a:defRPr sz="1200"/>
-            </a:lvl1pPr>
-          </a:lstStyle>
-          <a:p>
-            <a:fld id="{CE5E9CC1-C706-0F49-92D6-E571CC5EEA8F}" type="slidenum">
-              <a:rPr lang="en-US"/>
-              <a:t>‹#›</a:t>
-            </a:fld>
-            <a:endParaRPr lang="en-US"/>
-          </a:p>
-        </p:txBody>
-      </p:sp>
     </p:spTree>
     <p:extLst>
       <p:ext uri="{BB962C8B-B14F-4D97-AF65-F5344CB8AC3E}">
-        <p14:creationId xmlns:p14="http://schemas.microsoft.com/office/powerpoint/2010/main" val="1024086991"/>
+        <p14:creationId xmlns:p14="http://schemas.microsoft.com/office/powerpoint/2010/main" val="725369715"/>
       </p:ext>
     </p:extLst>
   </p:cSld>
   <p:clrMap bg1="lt1" tx1="dk1" bg2="lt2" tx2="dk2" accent1="accent1" accent2="accent2" accent3="accent3" accent4="accent4" accent5="accent5" accent6="accent6" hlink="hlink" folHlink="folHlink"/>
   <p:notesStyle>
-    <a:lvl1pPr marL="0" algn="l" defTabSz="914400" rtl="0" eaLnBrk="1" latinLnBrk="0" hangingPunct="1">
+    <a:lvl1pPr marL="0" algn="l" defTabSz="914400" rtl="0" eaLnBrk="1" latinLnBrk="1" hangingPunct="1">
       <a:defRPr sz="1200" kern="1200">
         <a:solidFill>
           <a:schemeClr val="tx1"/>
@@ -980,7 +814,7 @@
         <a:cs typeface="+mn-cs"/>
       </a:defRPr>
     </a:lvl1pPr>
-    <a:lvl2pPr marL="457200" algn="l" defTabSz="914400" rtl="0" eaLnBrk="1" latinLnBrk="0" hangingPunct="1">
+    <a:lvl2pPr marL="457200" algn="l" defTabSz="914400" rtl="0" eaLnBrk="1" latinLnBrk="1" hangingPunct="1">
       <a:defRPr sz="1200" kern="1200">
         <a:solidFill>
           <a:schemeClr val="tx1"/>
@@ -990,7 +824,7 @@
         <a:cs typeface="+mn-cs"/>
       </a:defRPr>
     </a:lvl2pPr>
-    <a:lvl3pPr marL="914400" algn="l" defTabSz="914400" rtl="0" eaLnBrk="1" latinLnBrk="0" hangingPunct="1">
+    <a:lvl3pPr marL="914400" algn="l" defTabSz="914400" rtl="0" eaLnBrk="1" latinLnBrk="1" hangingPunct="1">
       <a:defRPr sz="1200" kern="1200">
         <a:solidFill>
           <a:schemeClr val="tx1"/>
@@ -1000,7 +834,7 @@
         <a:cs typeface="+mn-cs"/>
       </a:defRPr>
     </a:lvl3pPr>
-    <a:lvl4pPr marL="1371600" algn="l" defTabSz="914400" rtl="0" eaLnBrk="1" latinLnBrk="0" hangingPunct="1">
+    <a:lvl4pPr marL="1371600" algn="l" defTabSz="914400" rtl="0" eaLnBrk="1" latinLnBrk="1" hangingPunct="1">
       <a:defRPr sz="1200" kern="1200">
         <a:solidFill>
           <a:schemeClr val="tx1"/>
@@ -1010,7 +844,7 @@
         <a:cs typeface="+mn-cs"/>
       </a:defRPr>
     </a:lvl4pPr>
-    <a:lvl5pPr marL="1828800" algn="l" defTabSz="914400" rtl="0" eaLnBrk="1" latinLnBrk="0" hangingPunct="1">
+    <a:lvl5pPr marL="1828800" algn="l" defTabSz="914400" rtl="0" eaLnBrk="1" latinLnBrk="1" hangingPunct="1">
       <a:defRPr sz="1200" kern="1200">
         <a:solidFill>
           <a:schemeClr val="tx1"/>
@@ -1020,7 +854,7 @@
         <a:cs typeface="+mn-cs"/>
       </a:defRPr>
     </a:lvl5pPr>
-    <a:lvl6pPr marL="2286000" algn="l" defTabSz="914400" rtl="0" eaLnBrk="1" latinLnBrk="0" hangingPunct="1">
+    <a:lvl6pPr marL="2286000" algn="l" defTabSz="914400" rtl="0" eaLnBrk="1" latinLnBrk="1" hangingPunct="1">
       <a:defRPr sz="1200" kern="1200">
         <a:solidFill>
           <a:schemeClr val="tx1"/>
@@ -1030,7 +864,7 @@
         <a:cs typeface="+mn-cs"/>
       </a:defRPr>
     </a:lvl6pPr>
-    <a:lvl7pPr marL="2743200" algn="l" defTabSz="914400" rtl="0" eaLnBrk="1" latinLnBrk="0" hangingPunct="1">
+    <a:lvl7pPr marL="2743200" algn="l" defTabSz="914400" rtl="0" eaLnBrk="1" latinLnBrk="1" hangingPunct="1">
       <a:defRPr sz="1200" kern="1200">
         <a:solidFill>
           <a:schemeClr val="tx1"/>
@@ -1040,7 +874,7 @@
         <a:cs typeface="+mn-cs"/>
       </a:defRPr>
     </a:lvl7pPr>
-    <a:lvl8pPr marL="3200400" algn="l" defTabSz="914400" rtl="0" eaLnBrk="1" latinLnBrk="0" hangingPunct="1">
+    <a:lvl8pPr marL="3200400" algn="l" defTabSz="914400" rtl="0" eaLnBrk="1" latinLnBrk="1" hangingPunct="1">
       <a:defRPr sz="1200" kern="1200">
         <a:solidFill>
           <a:schemeClr val="tx1"/>
@@ -1050,7 +884,7 @@
         <a:cs typeface="+mn-cs"/>
       </a:defRPr>
     </a:lvl8pPr>
-    <a:lvl9pPr marL="3657600" algn="l" defTabSz="914400" rtl="0" eaLnBrk="1" latinLnBrk="0" hangingPunct="1">
+    <a:lvl9pPr marL="3657600" algn="l" defTabSz="914400" rtl="0" eaLnBrk="1" latinLnBrk="1" hangingPunct="1">
       <a:defRPr sz="1200" kern="1200">
         <a:solidFill>
           <a:schemeClr val="tx1"/>
@@ -1112,7 +946,6 @@
               <a:rPr lang="en-US" dirty="0"/>
               <a:t>버전 A: 논문 구조 그대로(P0) 중심. 수치는 EDT 3개 평가 구간 32,926건, 날짜 블록 부트스트랩 95% 신뢰구간. 추가 개선 실험(0.092)은 입력 확장·앙상블 결과. 참고: Ridge 선형 기준선은 0.071.</a:t>
             </a:r>
-            <a:endParaRPr lang="en-US" dirty="0"/>
           </a:p>
         </p:txBody>
       </p:sp>
@@ -1190,6 +1023,7 @@
         <a:solidFill>
           <a:schemeClr val="accent1"/>
         </a:solidFill>
+        <a:effectLst/>
       </p:bgPr>
     </p:bg>
     <p:spTree>
@@ -1217,6 +1051,11 @@
 <file path=ppt/slideMasters/slideMaster1.xml><?xml version="1.0" encoding="utf-8"?>
 <p:sldMaster xmlns:a="http://schemas.openxmlformats.org/drawingml/2006/main" xmlns:r="http://schemas.openxmlformats.org/officeDocument/2006/relationships" xmlns:p="http://schemas.openxmlformats.org/presentationml/2006/main">
   <p:cSld>
+    <p:bg>
+      <p:bgRef idx="1001">
+        <a:schemeClr val="bg1"/>
+      </p:bgRef>
+    </p:bg>
     <p:spTree>
       <p:nvGrpSpPr>
         <p:cNvPr id="1" name=""/>
@@ -1530,16 +1369,112 @@
           <a:bodyPr wrap="square" lIns="0" tIns="0" rIns="0" bIns="0" rtlCol="0" anchor="ctr"/>
           <a:lstStyle/>
           <a:p>
-            <a:pPr algn="ctr" indent="0" marL="0">
+            <a:pPr marL="0" indent="0" algn="ctr">
               <a:buNone/>
             </a:pPr>
             <a:r>
+              <a:rPr lang="en-US" sz="6400" b="1" dirty="0" err="1">
+                <a:solidFill>
+                  <a:schemeClr val="bg1"/>
+                </a:solidFill>
+              </a:rPr>
+              <a:t>뉴스</a:t>
+            </a:r>
+            <a:r>
               <a:rPr lang="en-US" sz="6400" b="1" dirty="0">
                 <a:solidFill>
                   <a:schemeClr val="bg1"/>
                 </a:solidFill>
               </a:rPr>
-              <a:t>뉴스 이벤트 기반 주식 가격 예측 모델</a:t>
+              <a:t> </a:t>
+            </a:r>
+            <a:r>
+              <a:rPr lang="en-US" sz="6400" b="1" dirty="0" err="1">
+                <a:solidFill>
+                  <a:schemeClr val="bg1"/>
+                </a:solidFill>
+              </a:rPr>
+              <a:t>이벤트</a:t>
+            </a:r>
+            <a:r>
+              <a:rPr lang="en-US" sz="6400" b="1" dirty="0">
+                <a:solidFill>
+                  <a:schemeClr val="bg1"/>
+                </a:solidFill>
+              </a:rPr>
+              <a:t> </a:t>
+            </a:r>
+            <a:r>
+              <a:rPr lang="en-US" sz="6400" b="1" dirty="0" err="1">
+                <a:solidFill>
+                  <a:schemeClr val="bg1"/>
+                </a:solidFill>
+              </a:rPr>
+              <a:t>기반</a:t>
+            </a:r>
+            <a:r>
+              <a:rPr lang="en-US" sz="6400" b="1" dirty="0">
+                <a:solidFill>
+                  <a:schemeClr val="bg1"/>
+                </a:solidFill>
+              </a:rPr>
+              <a:t> </a:t>
+            </a:r>
+            <a:r>
+              <a:rPr lang="en-US" sz="6400" b="1" dirty="0" err="1">
+                <a:solidFill>
+                  <a:schemeClr val="bg1"/>
+                </a:solidFill>
+              </a:rPr>
+              <a:t>주식</a:t>
+            </a:r>
+            <a:r>
+              <a:rPr lang="en-US" sz="6400" b="1" dirty="0">
+                <a:solidFill>
+                  <a:schemeClr val="bg1"/>
+                </a:solidFill>
+              </a:rPr>
+              <a:t> </a:t>
+            </a:r>
+            <a:r>
+              <a:rPr lang="en-US" sz="6400" b="1" dirty="0" err="1">
+                <a:solidFill>
+                  <a:schemeClr val="bg1"/>
+                </a:solidFill>
+              </a:rPr>
+              <a:t>가격</a:t>
+            </a:r>
+            <a:r>
+              <a:rPr lang="en-US" sz="6400" b="1" dirty="0">
+                <a:solidFill>
+                  <a:schemeClr val="bg1"/>
+                </a:solidFill>
+              </a:rPr>
+              <a:t> </a:t>
+            </a:r>
+            <a:r>
+              <a:rPr lang="en-US" sz="6400" b="1" dirty="0" err="1">
+                <a:solidFill>
+                  <a:schemeClr val="bg1"/>
+                </a:solidFill>
+              </a:rPr>
+              <a:t>예측</a:t>
+            </a:r>
+            <a:r>
+              <a:rPr lang="en-US" sz="6400" b="1" dirty="0">
+                <a:solidFill>
+                  <a:schemeClr val="bg1"/>
+                </a:solidFill>
+              </a:rPr>
+              <a:t> </a:t>
+            </a:r>
+            <a:r>
+              <a:rPr lang="en-US" sz="6400" b="1" dirty="0" err="1">
+                <a:solidFill>
+                  <a:schemeClr val="bg1"/>
+                </a:solidFill>
+              </a:rPr>
+              <a:t>모델</a:t>
             </a:r>
             <a:endParaRPr lang="en-US" sz="6400" dirty="0"/>
           </a:p>
@@ -1566,7 +1501,7 @@
           <a:bodyPr wrap="square" lIns="0" tIns="0" rIns="0" bIns="0" rtlCol="0" anchor="ctr"/>
           <a:lstStyle/>
           <a:p>
-            <a:pPr algn="ctr" indent="0" marL="0">
+            <a:pPr marL="0" indent="0" algn="ctr">
               <a:buNone/>
             </a:pPr>
             <a:r>
@@ -1602,7 +1537,7 @@
           <a:bodyPr wrap="square" lIns="0" tIns="0" rIns="0" bIns="0" rtlCol="0" anchor="ctr"/>
           <a:lstStyle/>
           <a:p>
-            <a:pPr algn="ctr" indent="0" marL="0">
+            <a:pPr marL="0" indent="0" algn="ctr">
               <a:buNone/>
             </a:pPr>
             <a:r>
@@ -1613,9 +1548,6 @@
               </a:rPr>
               <a:t>충북대학교 정보통신공학부</a:t>
             </a:r>
-            <a:pPr algn="ctr" indent="0" marL="0">
-              <a:buNone/>
-            </a:pPr>
             <a:r>
               <a:rPr lang="en-US" sz="2500" b="1" dirty="0">
                 <a:solidFill>
@@ -1624,9 +1556,6 @@
               </a:rPr>
               <a:t>     지도교수  </a:t>
             </a:r>
-            <a:pPr algn="ctr" indent="0" marL="0">
-              <a:buNone/>
-            </a:pPr>
             <a:r>
               <a:rPr lang="en-US" sz="2500" dirty="0">
                 <a:solidFill>
@@ -1635,27 +1564,37 @@
               </a:rPr>
               <a:t>유재수 교수님</a:t>
             </a:r>
-            <a:pPr algn="ctr" indent="0" marL="0">
-              <a:buNone/>
-            </a:pPr>
             <a:r>
               <a:rPr lang="en-US" sz="2500" b="1" dirty="0">
                 <a:solidFill>
                   <a:schemeClr val="accent2"/>
                 </a:solidFill>
               </a:rPr>
-              <a:t>     참여학생  </a:t>
-            </a:r>
-            <a:pPr algn="ctr" indent="0" marL="0">
-              <a:buNone/>
-            </a:pPr>
+              <a:t>     </a:t>
+            </a:r>
+            <a:r>
+              <a:rPr lang="en-US" sz="2500" b="1" dirty="0" err="1">
+                <a:solidFill>
+                  <a:schemeClr val="accent2"/>
+                </a:solidFill>
+              </a:rPr>
+              <a:t>참여학생</a:t>
+            </a:r>
+            <a:r>
+              <a:rPr lang="en-US" sz="2500" b="1" dirty="0">
+                <a:solidFill>
+                  <a:schemeClr val="accent2"/>
+                </a:solidFill>
+              </a:rPr>
+              <a:t>  </a:t>
+            </a:r>
             <a:r>
               <a:rPr lang="en-US" sz="2500" dirty="0">
                 <a:solidFill>
                   <a:schemeClr val="bg1"/>
                 </a:solidFill>
               </a:rPr>
-              <a:t>김상민 · 성우제</a:t>
+              <a:t>김상민</a:t>
             </a:r>
             <a:endParaRPr lang="en-US" sz="2500" dirty="0"/>
           </a:p>
@@ -1670,11 +1609,11 @@
         <p:spPr>
           <a:xfrm>
             <a:off x="548640" y="2926080"/>
-            <a:ext cx="6828282" cy="3931920"/>
+            <a:ext cx="6828282" cy="4343400"/>
           </a:xfrm>
           <a:prstGeom prst="roundRect">
             <a:avLst>
-              <a:gd name="adj" fmla="val 4186"/>
+              <a:gd name="adj" fmla="val 3789"/>
             </a:avLst>
           </a:prstGeom>
           <a:solidFill>
@@ -1734,7 +1673,7 @@
           <a:bodyPr wrap="square" lIns="0" tIns="0" rIns="0" bIns="0" rtlCol="0" anchor="ctr"/>
           <a:lstStyle/>
           <a:p>
-            <a:pPr algn="ctr" indent="0" marL="0">
+            <a:pPr marL="0" indent="0" algn="ctr">
               <a:buNone/>
             </a:pPr>
             <a:r>
@@ -1770,7 +1709,7 @@
           <a:bodyPr wrap="square" lIns="0" tIns="0" rIns="0" bIns="0" rtlCol="0" anchor="ctr"/>
           <a:lstStyle/>
           <a:p>
-            <a:pPr indent="0" marL="0">
+            <a:pPr marL="0" indent="0">
               <a:buNone/>
             </a:pPr>
             <a:r>
@@ -1794,7 +1733,7 @@
         <p:spPr>
           <a:xfrm>
             <a:off x="914400" y="4069080"/>
-            <a:ext cx="6096762" cy="2514600"/>
+            <a:ext cx="6096762" cy="2926080"/>
           </a:xfrm>
           <a:prstGeom prst="rect">
             <a:avLst/>
@@ -1814,29 +1753,68 @@
               <a:buChar char="•"/>
             </a:pPr>
             <a:r>
+              <a:rPr lang="en-US" sz="1900" b="1" dirty="0" err="1">
+                <a:solidFill>
+                  <a:schemeClr val="accent1"/>
+                </a:solidFill>
+              </a:rPr>
+              <a:t>필요성</a:t>
+            </a:r>
+            <a:r>
               <a:rPr lang="en-US" sz="1900" b="1" dirty="0">
                 <a:solidFill>
                   <a:schemeClr val="accent1"/>
                 </a:solidFill>
               </a:rPr>
-              <a:t>필요성  </a:t>
-            </a:r>
-            <a:pPr indent="0" marL="0">
-              <a:lnSpc>
-                <a:spcPct val="105000"/>
-              </a:lnSpc>
-              <a:spcAft>
-                <a:spcPts val="700"/>
-              </a:spcAft>
-              <a:buNone/>
-            </a:pPr>
+              <a:t>  </a:t>
+            </a:r>
+            <a:r>
+              <a:rPr lang="en-US" sz="1900" dirty="0" err="1">
+                <a:solidFill>
+                  <a:schemeClr val="tx1"/>
+                </a:solidFill>
+              </a:rPr>
+              <a:t>단기</a:t>
+            </a:r>
             <a:r>
               <a:rPr lang="en-US" sz="1900" dirty="0">
                 <a:solidFill>
                   <a:schemeClr val="tx1"/>
                 </a:solidFill>
               </a:rPr>
-              <a:t>단기 주가는 기술적 지표만으로 설명하기 어려운 뉴스 이벤트에 크게 반응</a:t>
+              <a:t> 주가는 기술적 지표만으로 </a:t>
+            </a:r>
+            <a:r>
+              <a:rPr lang="en-US" sz="1900" dirty="0" err="1">
+                <a:solidFill>
+                  <a:schemeClr val="tx1"/>
+                </a:solidFill>
+              </a:rPr>
+              <a:t>설명하기</a:t>
+            </a:r>
+            <a:r>
+              <a:rPr lang="en-US" sz="1900" dirty="0">
+                <a:solidFill>
+                  <a:schemeClr val="tx1"/>
+                </a:solidFill>
+              </a:rPr>
+              <a:t> </a:t>
+            </a:r>
+            <a:r>
+              <a:rPr lang="en-US" sz="1900" dirty="0" err="1">
+                <a:solidFill>
+                  <a:schemeClr val="tx1"/>
+                </a:solidFill>
+              </a:rPr>
+              <a:t>어려운</a:t>
+            </a:r>
+            <a:r>
+              <a:rPr lang="en-US" sz="1900" dirty="0">
+                <a:solidFill>
+                  <a:schemeClr val="tx1"/>
+                </a:solidFill>
+              </a:rPr>
+              <a:t> 뉴스 이벤트에 크게 반응</a:t>
             </a:r>
             <a:endParaRPr lang="en-US" sz="1900" dirty="0"/>
           </a:p>
@@ -1849,29 +1827,60 @@
               <a:buChar char="•"/>
             </a:pPr>
             <a:r>
+              <a:rPr lang="en-US" sz="1900" b="1" dirty="0" err="1">
+                <a:solidFill>
+                  <a:schemeClr val="accent1"/>
+                </a:solidFill>
+              </a:rPr>
+              <a:t>기존</a:t>
+            </a:r>
+            <a:r>
               <a:rPr lang="en-US" sz="1900" b="1" dirty="0">
                 <a:solidFill>
                   <a:schemeClr val="accent1"/>
                 </a:solidFill>
               </a:rPr>
-              <a:t>기존 연구  </a:t>
-            </a:r>
-            <a:pPr indent="0" marL="0">
-              <a:lnSpc>
-                <a:spcPct val="105000"/>
-              </a:lnSpc>
-              <a:spcAft>
-                <a:spcPts val="700"/>
-              </a:spcAft>
-              <a:buNone/>
-            </a:pPr>
+              <a:t> </a:t>
+            </a:r>
+            <a:r>
+              <a:rPr lang="en-US" sz="1900" b="1" dirty="0" err="1">
+                <a:solidFill>
+                  <a:schemeClr val="accent1"/>
+                </a:solidFill>
+              </a:rPr>
+              <a:t>연구</a:t>
+            </a:r>
+            <a:r>
+              <a:rPr lang="en-US" sz="1900" b="1" dirty="0">
+                <a:solidFill>
+                  <a:schemeClr val="accent1"/>
+                </a:solidFill>
+              </a:rPr>
+              <a:t>  </a:t>
+            </a:r>
             <a:r>
               <a:rPr lang="en-US" sz="1900" dirty="0">
                 <a:solidFill>
                   <a:schemeClr val="tx1"/>
                 </a:solidFill>
               </a:rPr>
-              <a:t>LLM 감성 점수 또는 텍스트 임베딩 중 하나만 사용</a:t>
+              <a:t>LLM 감성 점수 또는 텍스트 임베딩 중 </a:t>
+            </a:r>
+            <a:r>
+              <a:rPr lang="en-US" sz="1900" dirty="0" err="1">
+                <a:solidFill>
+                  <a:schemeClr val="tx1"/>
+                </a:solidFill>
+              </a:rPr>
+              <a:t>하나만</a:t>
+            </a:r>
+            <a:r>
+              <a:rPr lang="en-US" sz="1900" dirty="0">
+                <a:solidFill>
+                  <a:schemeClr val="tx1"/>
+                </a:solidFill>
+              </a:rPr>
+              <a:t> 사용</a:t>
             </a:r>
             <a:endParaRPr lang="en-US" sz="1900" dirty="0"/>
           </a:p>
@@ -1884,29 +1893,60 @@
               <a:buChar char="•"/>
             </a:pPr>
             <a:r>
+              <a:rPr lang="en-US" sz="1900" b="1" dirty="0" err="1">
+                <a:solidFill>
+                  <a:schemeClr val="accent1"/>
+                </a:solidFill>
+              </a:rPr>
+              <a:t>연구</a:t>
+            </a:r>
+            <a:r>
               <a:rPr lang="en-US" sz="1900" b="1" dirty="0">
                 <a:solidFill>
                   <a:schemeClr val="accent1"/>
                 </a:solidFill>
               </a:rPr>
-              <a:t>연구 내용  </a:t>
-            </a:r>
-            <a:pPr indent="0" marL="0">
-              <a:lnSpc>
-                <a:spcPct val="105000"/>
-              </a:lnSpc>
-              <a:spcAft>
-                <a:spcPts val="700"/>
-              </a:spcAft>
-              <a:buNone/>
-            </a:pPr>
+              <a:t> </a:t>
+            </a:r>
+            <a:r>
+              <a:rPr lang="en-US" sz="1900" b="1" dirty="0" err="1">
+                <a:solidFill>
+                  <a:schemeClr val="accent1"/>
+                </a:solidFill>
+              </a:rPr>
+              <a:t>내용</a:t>
+            </a:r>
+            <a:r>
+              <a:rPr lang="en-US" sz="1900" b="1" dirty="0">
+                <a:solidFill>
+                  <a:schemeClr val="accent1"/>
+                </a:solidFill>
+              </a:rPr>
+              <a:t>  </a:t>
+            </a:r>
             <a:r>
               <a:rPr lang="en-US" sz="1900" dirty="0">
                 <a:solidFill>
                   <a:schemeClr val="tx1"/>
                 </a:solidFill>
               </a:rPr>
-              <a:t>뉴스의 의미·감성(주 신호)과 과거 30일 시장 상태(보조 신호)를 결합해 1일 초과수익률 예측</a:t>
+              <a:t>뉴스의 의미·감성(주 신호)과 과거 30일 </a:t>
+            </a:r>
+            <a:r>
+              <a:rPr lang="en-US" sz="1900" dirty="0" err="1">
+                <a:solidFill>
+                  <a:schemeClr val="tx1"/>
+                </a:solidFill>
+              </a:rPr>
+              <a:t>시장</a:t>
+            </a:r>
+            <a:r>
+              <a:rPr lang="en-US" sz="1900" dirty="0">
+                <a:solidFill>
+                  <a:schemeClr val="tx1"/>
+                </a:solidFill>
+              </a:rPr>
+              <a:t> 상태(보조 신호)를 결합해 뉴스 발표 후 1일 초과수익률 예측</a:t>
             </a:r>
             <a:endParaRPr lang="en-US" sz="1900" dirty="0"/>
           </a:p>
@@ -1926,22 +1966,101 @@
               </a:rPr>
               <a:t>검증  </a:t>
             </a:r>
-            <a:pPr indent="0" marL="0">
-              <a:lnSpc>
-                <a:spcPct val="105000"/>
-              </a:lnSpc>
-              <a:spcAft>
-                <a:spcPts val="700"/>
-              </a:spcAft>
-              <a:buNone/>
-            </a:pPr>
             <a:r>
               <a:rPr lang="en-US" sz="1900" dirty="0">
                 <a:solidFill>
                   <a:schemeClr val="tx1"/>
                 </a:solidFill>
               </a:rPr>
-              <a:t>기업 보도자료 6.3만 건, 미래 정보 누수 없는 표본 외 평가</a:t>
+              <a:t>실제 기업 보도자료 6.3만 건, </a:t>
+            </a:r>
+            <a:r>
+              <a:rPr lang="en-US" sz="1900" dirty="0" err="1">
+                <a:solidFill>
+                  <a:schemeClr val="tx1"/>
+                </a:solidFill>
+              </a:rPr>
+              <a:t>미래</a:t>
+            </a:r>
+            <a:r>
+              <a:rPr lang="en-US" sz="1900" dirty="0">
+                <a:solidFill>
+                  <a:schemeClr val="tx1"/>
+                </a:solidFill>
+              </a:rPr>
+              <a:t> </a:t>
+            </a:r>
+            <a:r>
+              <a:rPr lang="en-US" sz="1900" dirty="0" err="1">
+                <a:solidFill>
+                  <a:schemeClr val="tx1"/>
+                </a:solidFill>
+              </a:rPr>
+              <a:t>정보</a:t>
+            </a:r>
+            <a:r>
+              <a:rPr lang="en-US" sz="1900" dirty="0">
+                <a:solidFill>
+                  <a:schemeClr val="tx1"/>
+                </a:solidFill>
+              </a:rPr>
+              <a:t> </a:t>
+            </a:r>
+            <a:r>
+              <a:rPr lang="en-US" sz="1900" dirty="0" err="1">
+                <a:solidFill>
+                  <a:schemeClr val="tx1"/>
+                </a:solidFill>
+              </a:rPr>
+              <a:t>누수</a:t>
+            </a:r>
+            <a:r>
+              <a:rPr lang="en-US" sz="1900" dirty="0">
+                <a:solidFill>
+                  <a:schemeClr val="tx1"/>
+                </a:solidFill>
+              </a:rPr>
+              <a:t> </a:t>
+            </a:r>
+            <a:r>
+              <a:rPr lang="en-US" sz="1900" dirty="0" err="1">
+                <a:solidFill>
+                  <a:schemeClr val="tx1"/>
+                </a:solidFill>
+              </a:rPr>
+              <a:t>없는</a:t>
+            </a:r>
+            <a:r>
+              <a:rPr lang="en-US" sz="1900" dirty="0">
+                <a:solidFill>
+                  <a:schemeClr val="tx1"/>
+                </a:solidFill>
+              </a:rPr>
+              <a:t> </a:t>
+            </a:r>
+            <a:r>
+              <a:rPr lang="en-US" sz="1900" dirty="0" err="1">
+                <a:solidFill>
+                  <a:schemeClr val="tx1"/>
+                </a:solidFill>
+              </a:rPr>
+              <a:t>표본</a:t>
+            </a:r>
+            <a:r>
+              <a:rPr lang="en-US" sz="1900" dirty="0">
+                <a:solidFill>
+                  <a:schemeClr val="tx1"/>
+                </a:solidFill>
+              </a:rPr>
+              <a:t> 외 </a:t>
+            </a:r>
+            <a:r>
+              <a:rPr lang="en-US" sz="1900" dirty="0" err="1">
+                <a:solidFill>
+                  <a:schemeClr val="tx1"/>
+                </a:solidFill>
+              </a:rPr>
+              <a:t>평가</a:t>
             </a:r>
             <a:endParaRPr lang="en-US" sz="1900" dirty="0"/>
           </a:p>
@@ -1955,12 +2074,12 @@
         </p:nvSpPr>
         <p:spPr>
           <a:xfrm>
-            <a:off x="548640" y="7132320"/>
-            <a:ext cx="6828282" cy="4937760"/>
+            <a:off x="548640" y="7543800"/>
+            <a:ext cx="6828282" cy="4861560"/>
           </a:xfrm>
           <a:prstGeom prst="roundRect">
             <a:avLst>
-              <a:gd name="adj" fmla="val 3333"/>
+              <a:gd name="adj" fmla="val 3636"/>
             </a:avLst>
           </a:prstGeom>
           <a:solidFill>
@@ -1982,7 +2101,7 @@
         </p:nvSpPr>
         <p:spPr>
           <a:xfrm>
-            <a:off x="868680" y="7406640"/>
+            <a:off x="868680" y="7818120"/>
             <a:ext cx="621792" cy="621792"/>
           </a:xfrm>
           <a:prstGeom prst="ellipse">
@@ -2007,7 +2126,7 @@
         </p:nvSpPr>
         <p:spPr>
           <a:xfrm>
-            <a:off x="868680" y="7406640"/>
+            <a:off x="868680" y="7818120"/>
             <a:ext cx="621792" cy="621792"/>
           </a:xfrm>
           <a:prstGeom prst="rect">
@@ -2020,7 +2139,7 @@
           <a:bodyPr wrap="square" lIns="0" tIns="0" rIns="0" bIns="0" rtlCol="0" anchor="ctr"/>
           <a:lstStyle/>
           <a:p>
-            <a:pPr algn="ctr" indent="0" marL="0">
+            <a:pPr marL="0" indent="0" algn="ctr">
               <a:buNone/>
             </a:pPr>
             <a:r>
@@ -2043,7 +2162,7 @@
         </p:nvSpPr>
         <p:spPr>
           <a:xfrm>
-            <a:off x="1645920" y="7406640"/>
+            <a:off x="1645920" y="7818120"/>
             <a:ext cx="5456682" cy="621792"/>
           </a:xfrm>
           <a:prstGeom prst="rect">
@@ -2056,7 +2175,7 @@
           <a:bodyPr wrap="square" lIns="0" tIns="0" rIns="0" bIns="0" rtlCol="0" anchor="ctr"/>
           <a:lstStyle/>
           <a:p>
-            <a:pPr indent="0" marL="0">
+            <a:pPr marL="0" indent="0">
               <a:buNone/>
             </a:pPr>
             <a:r>
@@ -2079,8 +2198,8 @@
         </p:nvSpPr>
         <p:spPr>
           <a:xfrm>
-            <a:off x="914400" y="8275320"/>
-            <a:ext cx="6096762" cy="3520440"/>
+            <a:off x="914400" y="8686800"/>
+            <a:ext cx="6096762" cy="3108960"/>
           </a:xfrm>
           <a:prstGeom prst="rect">
             <a:avLst/>
@@ -2100,31 +2219,62 @@
               <a:buChar char="•"/>
             </a:pPr>
             <a:r>
-              <a:rPr lang="en-US" sz="1750" b="1" dirty="0">
+              <a:rPr lang="en-US" sz="1800" b="1" dirty="0">
                 <a:solidFill>
                   <a:schemeClr val="accent1"/>
                 </a:solidFill>
               </a:rPr>
-              <a:t>① LLM 기반 주 신호  </a:t>
-            </a:r>
-            <a:pPr indent="0" marL="0">
-              <a:lnSpc>
-                <a:spcPct val="105000"/>
-              </a:lnSpc>
-              <a:spcAft>
-                <a:spcPts val="800"/>
-              </a:spcAft>
-              <a:buNone/>
-            </a:pPr>
-            <a:r>
-              <a:rPr lang="en-US" sz="1750" dirty="0">
+              <a:t>① LLM 기반 주 </a:t>
+            </a:r>
+            <a:r>
+              <a:rPr lang="en-US" sz="1800" b="1" dirty="0" err="1">
+                <a:solidFill>
+                  <a:schemeClr val="accent1"/>
+                </a:solidFill>
+              </a:rPr>
+              <a:t>신호</a:t>
+            </a:r>
+            <a:r>
+              <a:rPr lang="en-US" sz="1800" b="1" dirty="0">
+                <a:solidFill>
+                  <a:schemeClr val="accent1"/>
+                </a:solidFill>
+              </a:rPr>
+              <a:t>  </a:t>
+            </a:r>
+            <a:r>
+              <a:rPr lang="ko-KR" altLang="en-US" sz="1800" dirty="0">
+                <a:solidFill>
+                  <a:schemeClr val="accent1"/>
+                </a:solidFill>
+              </a:rPr>
+              <a:t>뉴스 이벤트를 </a:t>
+            </a:r>
+            <a:r>
+              <a:rPr lang="en-US" sz="1800" dirty="0">
                 <a:solidFill>
                   <a:schemeClr val="tx1"/>
                 </a:solidFill>
               </a:rPr>
-              <a:t>GPT-4o-mini 요약·감성 점수 + 요약문 임베딩(1536차원) → 완전연결층 → 512차원</a:t>
-            </a:r>
-            <a:endParaRPr lang="en-US" sz="1750" dirty="0"/>
+              <a:t>GPT-4o-mini</a:t>
+            </a:r>
+            <a:r>
+              <a:rPr lang="ko-KR" altLang="en-US" sz="1800" dirty="0">
+                <a:solidFill>
+                  <a:schemeClr val="tx1"/>
+                </a:solidFill>
+              </a:rPr>
+              <a:t>로</a:t>
+            </a:r>
+            <a:r>
+              <a:rPr lang="en-US" sz="1800" dirty="0">
+                <a:solidFill>
+                  <a:schemeClr val="tx1"/>
+                </a:solidFill>
+              </a:rPr>
+              <a:t> 요약·감성 점수 + 요약문 임베딩(1536차원) → 완전연결층 → 512차원</a:t>
+            </a:r>
+            <a:endParaRPr lang="en-US" sz="1800" dirty="0"/>
           </a:p>
           <a:p>
             <a:pPr marL="228600" indent="-228600">
@@ -2135,136 +2285,208 @@
               <a:buChar char="•"/>
             </a:pPr>
             <a:r>
-              <a:rPr lang="en-US" sz="1750" b="1" dirty="0">
+              <a:rPr lang="en-US" sz="1800" b="1" dirty="0">
                 <a:solidFill>
                   <a:schemeClr val="accent1"/>
                 </a:solidFill>
               </a:rPr>
               <a:t>② TCN 기반 보조 벡터  </a:t>
             </a:r>
-            <a:pPr indent="0" marL="0">
-              <a:lnSpc>
-                <a:spcPct val="105000"/>
-              </a:lnSpc>
-              <a:spcAft>
-                <a:spcPts val="800"/>
-              </a:spcAft>
-              <a:buNone/>
-            </a:pPr>
-            <a:r>
-              <a:rPr lang="en-US" sz="1750" dirty="0">
+            <a:r>
+              <a:rPr lang="en-US" sz="1800" dirty="0">
                 <a:solidFill>
                   <a:schemeClr val="tx1"/>
                 </a:solidFill>
               </a:rPr>
-              <a:t>과거 30일 지표 9종을 TCN으로 읽어 하루마다 512차원 벡터로 요약 (미래 정보 차단)</a:t>
-            </a:r>
-            <a:endParaRPr lang="en-US" sz="1750" dirty="0"/>
+              <a:t>기술적 지표 9종 × 30일 → TCN(</a:t>
+            </a:r>
+            <a:r>
+              <a:rPr lang="ko-KR" altLang="en-US" dirty="0"/>
+              <a:t>과거 정보만 사용</a:t>
+            </a:r>
+            <a:r>
+              <a:rPr lang="en-US" altLang="ko-KR" dirty="0"/>
+              <a:t>)</a:t>
+            </a:r>
+            <a:r>
+              <a:rPr lang="en-US" sz="1800" dirty="0">
+                <a:solidFill>
+                  <a:schemeClr val="tx1"/>
+                </a:solidFill>
+              </a:rPr>
+              <a:t> → </a:t>
+            </a:r>
+            <a:r>
+              <a:rPr lang="ko-KR" altLang="en-US" dirty="0"/>
+              <a:t>하루마다 </a:t>
+            </a:r>
+            <a:r>
+              <a:rPr lang="en-US" sz="1800" dirty="0">
+                <a:solidFill>
+                  <a:schemeClr val="tx1"/>
+                </a:solidFill>
+              </a:rPr>
+              <a:t>512차원 </a:t>
+            </a:r>
+            <a:r>
+              <a:rPr lang="ko-KR" altLang="en-US" sz="1800" dirty="0">
+                <a:solidFill>
+                  <a:schemeClr val="tx1"/>
+                </a:solidFill>
+              </a:rPr>
+              <a:t>벡터 생성</a:t>
+            </a:r>
+            <a:endParaRPr lang="en-US" sz="1800" dirty="0"/>
           </a:p>
           <a:p>
             <a:pPr marL="228600" indent="-228600">
               <a:lnSpc>
-                <a:spcPct val="105000"/>
+                <a:spcPct val="100000"/>
               </a:lnSpc>
               <a:buSzPct val="100000"/>
               <a:buChar char="•"/>
             </a:pPr>
             <a:r>
-              <a:rPr lang="en-US" sz="1750" b="1" dirty="0">
+              <a:rPr lang="en-US" sz="1800" b="1" dirty="0">
                 <a:solidFill>
                   <a:schemeClr val="accent1"/>
                 </a:solidFill>
               </a:rPr>
-              <a:t>③ 비대칭 교차 어텐션  </a:t>
-            </a:r>
-            <a:pPr indent="0" marL="0">
-              <a:lnSpc>
-                <a:spcPct val="105000"/>
-              </a:lnSpc>
-              <a:spcAft>
-                <a:spcPts val="800"/>
-              </a:spcAft>
-              <a:buNone/>
-            </a:pPr>
-            <a:r>
-              <a:rPr lang="en-US" sz="1750" dirty="0">
-                <a:solidFill>
-                  <a:schemeClr val="tx1"/>
-                </a:solidFill>
-              </a:rPr>
-              <a:t>뉴스 벡터(Q)와 30일 각 지표 벡터(K)의 관련도를 내적으로 계산 → softmax 가중치(합 1) → 지표 벡터(V)를 가중 평균해 뉴스와 관련 깊은 날을 더 반영. 뉴스 1개가 30일을 한 방향으로만 참조해 '비대칭'</a:t>
-            </a:r>
-            <a:endParaRPr lang="en-US" sz="1750" dirty="0"/>
+              <a:t>③ </a:t>
+            </a:r>
+            <a:r>
+              <a:rPr lang="en-US" sz="1800" b="1" dirty="0" err="1">
+                <a:solidFill>
+                  <a:schemeClr val="accent1"/>
+                </a:solidFill>
+              </a:rPr>
+              <a:t>교차</a:t>
+            </a:r>
+            <a:r>
+              <a:rPr lang="en-US" sz="1800" b="1" dirty="0">
+                <a:solidFill>
+                  <a:schemeClr val="accent1"/>
+                </a:solidFill>
+              </a:rPr>
+              <a:t> </a:t>
+            </a:r>
+            <a:r>
+              <a:rPr lang="en-US" sz="1800" b="1" dirty="0" err="1">
+                <a:solidFill>
+                  <a:schemeClr val="accent1"/>
+                </a:solidFill>
+              </a:rPr>
+              <a:t>어텐션</a:t>
+            </a:r>
+            <a:r>
+              <a:rPr lang="en-US" sz="1800" b="1" dirty="0">
+                <a:solidFill>
+                  <a:schemeClr val="accent1"/>
+                </a:solidFill>
+              </a:rPr>
+              <a:t>  </a:t>
+            </a:r>
+            <a:r>
+              <a:rPr lang="ko-KR" altLang="ko-KR" dirty="0"/>
+              <a:t>뉴스 벡터(</a:t>
+            </a:r>
+            <a:r>
+              <a:rPr lang="ko-KR" altLang="ko-KR" dirty="0" err="1"/>
+              <a:t>Q</a:t>
+            </a:r>
+            <a:r>
+              <a:rPr lang="ko-KR" altLang="ko-KR" dirty="0"/>
+              <a:t>)와 30일 각 지표 벡터(K)의 관련도를 내적으로 계산 → </a:t>
+            </a:r>
+            <a:r>
+              <a:rPr lang="ko-KR" altLang="ko-KR" dirty="0" err="1"/>
+              <a:t>softmax</a:t>
+            </a:r>
+            <a:r>
+              <a:rPr lang="ko-KR" altLang="ko-KR" dirty="0"/>
+              <a:t> 가중치(합 1) → 지표 벡터(</a:t>
+            </a:r>
+            <a:r>
+              <a:rPr lang="ko-KR" altLang="ko-KR" dirty="0" err="1"/>
+              <a:t>V</a:t>
+            </a:r>
+            <a:r>
+              <a:rPr lang="ko-KR" altLang="ko-KR" dirty="0"/>
+              <a:t>)를 가중 평균해 뉴스와 관련 깊은 날을 더 반영.</a:t>
+            </a:r>
+            <a:endParaRPr lang="en-US" altLang="ko-KR" dirty="0"/>
           </a:p>
           <a:p>
             <a:pPr marL="228600" indent="-228600">
               <a:lnSpc>
-                <a:spcPct val="105000"/>
+                <a:spcPct val="100000"/>
               </a:lnSpc>
               <a:buSzPct val="100000"/>
               <a:buChar char="•"/>
             </a:pPr>
             <a:r>
-              <a:rPr lang="en-US" sz="1750" b="1" dirty="0">
+              <a:rPr lang="en-US" sz="1800" b="1" dirty="0">
                 <a:solidFill>
                   <a:schemeClr val="accent1"/>
                 </a:solidFill>
               </a:rPr>
-              <a:t>④ 게이트 기반 잔차 결합  </a:t>
-            </a:r>
-            <a:pPr indent="0" marL="0">
-              <a:lnSpc>
-                <a:spcPct val="105000"/>
-              </a:lnSpc>
-              <a:spcAft>
-                <a:spcPts val="800"/>
-              </a:spcAft>
-              <a:buNone/>
-            </a:pPr>
-            <a:r>
-              <a:rPr lang="en-US" sz="1750" dirty="0">
-                <a:solidFill>
-                  <a:schemeClr val="tx1"/>
-                </a:solidFill>
-              </a:rPr>
-              <a:t>h = p + σ(W[p; c]) ⊙ c, 보조 정보 반영 정도 학습</a:t>
-            </a:r>
-            <a:endParaRPr lang="en-US" sz="1750" dirty="0"/>
+              <a:t>④</a:t>
+            </a:r>
+            <a:r>
+              <a:rPr lang="ko-KR" altLang="en-US" sz="1800" b="1" dirty="0">
+                <a:solidFill>
+                  <a:schemeClr val="accent1"/>
+                </a:solidFill>
+              </a:rPr>
+              <a:t>게이트 기반 </a:t>
+            </a:r>
+            <a:r>
+              <a:rPr lang="ko-KR" altLang="en-US" sz="1800" b="1" dirty="0" err="1">
+                <a:solidFill>
+                  <a:schemeClr val="accent1"/>
+                </a:solidFill>
+              </a:rPr>
+              <a:t>잔차</a:t>
+            </a:r>
+            <a:r>
+              <a:rPr lang="ko-KR" altLang="en-US" sz="1800" b="1" dirty="0">
+                <a:solidFill>
+                  <a:schemeClr val="accent1"/>
+                </a:solidFill>
+              </a:rPr>
+              <a:t> 결합 </a:t>
+            </a:r>
+            <a:r>
+              <a:rPr lang="ko-KR" altLang="ko-KR" dirty="0"/>
+              <a:t>뉴스 정보는 그대로 두고, 시장 정보는 게이트(0~1)로 필요한 만큼만 더함. 게이트 값은 학습된 계산식이 뉴스마다 계산</a:t>
+            </a:r>
+            <a:endParaRPr lang="en-US" altLang="ko-KR" dirty="0"/>
           </a:p>
           <a:p>
             <a:pPr marL="228600" indent="-228600">
               <a:lnSpc>
-                <a:spcPct val="105000"/>
+                <a:spcPct val="100000"/>
               </a:lnSpc>
               <a:buSzPct val="100000"/>
               <a:buChar char="•"/>
             </a:pPr>
             <a:r>
-              <a:rPr lang="en-US" sz="1750" b="1" dirty="0">
+              <a:rPr lang="en-US" sz="1800" b="1" dirty="0">
                 <a:solidFill>
                   <a:schemeClr val="accent1"/>
                 </a:solidFill>
               </a:rPr>
               <a:t>⑤ 등락률 예측  </a:t>
             </a:r>
-            <a:pPr indent="0" marL="0">
-              <a:lnSpc>
-                <a:spcPct val="105000"/>
-              </a:lnSpc>
-              <a:spcAft>
-                <a:spcPts val="800"/>
-              </a:spcAft>
-              <a:buNone/>
-            </a:pPr>
-            <a:r>
-              <a:rPr lang="en-US" sz="1750" dirty="0">
+            <a:r>
+              <a:rPr lang="en-US" sz="1800" dirty="0">
                 <a:solidFill>
                   <a:schemeClr val="tx1"/>
                 </a:solidFill>
               </a:rPr>
               <a:t>MLP 512 → 256 → 64 → 1</a:t>
             </a:r>
-            <a:endParaRPr lang="en-US" sz="1750" dirty="0"/>
+            <a:endParaRPr lang="en-US" sz="1800" dirty="0"/>
           </a:p>
         </p:txBody>
       </p:sp>
@@ -2277,7 +2499,7 @@
         <p:spPr>
           <a:xfrm>
             <a:off x="7742682" y="2926080"/>
-            <a:ext cx="6828282" cy="9144000"/>
+            <a:ext cx="6828282" cy="9479280"/>
           </a:xfrm>
           <a:prstGeom prst="roundRect">
             <a:avLst>
@@ -2341,7 +2563,7 @@
           <a:bodyPr wrap="square" lIns="0" tIns="0" rIns="0" bIns="0" rtlCol="0" anchor="ctr"/>
           <a:lstStyle/>
           <a:p>
-            <a:pPr algn="ctr" indent="0" marL="0">
+            <a:pPr marL="0" indent="0" algn="ctr">
               <a:buNone/>
             </a:pPr>
             <a:r>
@@ -2377,7 +2599,7 @@
           <a:bodyPr wrap="square" lIns="0" tIns="0" rIns="0" bIns="0" rtlCol="0" anchor="ctr"/>
           <a:lstStyle/>
           <a:p>
-            <a:pPr indent="0" marL="0">
+            <a:pPr marL="0" indent="0">
               <a:buNone/>
             </a:pPr>
             <a:r>
@@ -2467,7 +2689,7 @@
           <a:bodyPr wrap="square" lIns="0" tIns="0" rIns="0" bIns="0" rtlCol="0" anchor="ctr"/>
           <a:lstStyle/>
           <a:p>
-            <a:pPr algn="ctr" indent="0" marL="0">
+            <a:pPr marL="0" indent="0" algn="ctr">
               <a:buNone/>
             </a:pPr>
             <a:r>
@@ -2503,7 +2725,7 @@
           <a:bodyPr wrap="square" lIns="0" tIns="0" rIns="0" bIns="0" rtlCol="0" anchor="ctr"/>
           <a:lstStyle/>
           <a:p>
-            <a:pPr algn="ctr" indent="0" marL="0">
+            <a:pPr marL="0" indent="0" algn="ctr">
               <a:lnSpc>
                 <a:spcPct val="95000"/>
               </a:lnSpc>
@@ -2520,7 +2742,7 @@
             <a:endParaRPr lang="en-US" sz="1600" dirty="0"/>
           </a:p>
           <a:p>
-            <a:pPr algn="ctr" indent="0" marL="0">
+            <a:pPr marL="0" indent="0" algn="ctr">
               <a:lnSpc>
                 <a:spcPct val="95000"/>
               </a:lnSpc>
@@ -2586,7 +2808,7 @@
           <a:bodyPr wrap="square" lIns="0" tIns="0" rIns="0" bIns="0" rtlCol="0" anchor="ctr"/>
           <a:lstStyle/>
           <a:p>
-            <a:pPr algn="ctr" indent="0" marL="0">
+            <a:pPr marL="0" indent="0" algn="ctr">
               <a:lnSpc>
                 <a:spcPct val="95000"/>
               </a:lnSpc>
@@ -2676,7 +2898,7 @@
           <a:bodyPr wrap="square" lIns="0" tIns="0" rIns="0" bIns="0" rtlCol="0" anchor="ctr"/>
           <a:lstStyle/>
           <a:p>
-            <a:pPr algn="ctr" indent="0" marL="0">
+            <a:pPr marL="0" indent="0" algn="ctr">
               <a:lnSpc>
                 <a:spcPct val="95000"/>
               </a:lnSpc>
@@ -2836,7 +3058,7 @@
           <a:bodyPr wrap="square" lIns="0" tIns="0" rIns="0" bIns="0" rtlCol="0" anchor="ctr"/>
           <a:lstStyle/>
           <a:p>
-            <a:pPr algn="ctr" indent="0" marL="0">
+            <a:pPr marL="0" indent="0" algn="ctr">
               <a:lnSpc>
                 <a:spcPct val="95000"/>
               </a:lnSpc>
@@ -2902,7 +3124,7 @@
           <a:bodyPr wrap="square" lIns="0" tIns="0" rIns="0" bIns="0" rtlCol="0" anchor="ctr"/>
           <a:lstStyle/>
           <a:p>
-            <a:pPr algn="ctr" indent="0" marL="0">
+            <a:pPr marL="0" indent="0" algn="ctr">
               <a:lnSpc>
                 <a:spcPct val="95000"/>
               </a:lnSpc>
@@ -2992,7 +3214,7 @@
           <a:bodyPr wrap="square" lIns="0" tIns="0" rIns="0" bIns="0" rtlCol="0" anchor="ctr"/>
           <a:lstStyle/>
           <a:p>
-            <a:pPr algn="ctr" indent="0" marL="0">
+            <a:pPr marL="0" indent="0" algn="ctr">
               <a:lnSpc>
                 <a:spcPct val="95000"/>
               </a:lnSpc>
@@ -3106,7 +3328,7 @@
           <a:bodyPr wrap="square" lIns="0" tIns="0" rIns="0" bIns="0" rtlCol="0" anchor="ctr"/>
           <a:lstStyle/>
           <a:p>
-            <a:pPr algn="ctr" indent="0" marL="0">
+            <a:pPr marL="0" indent="0" algn="ctr">
               <a:lnSpc>
                 <a:spcPct val="95000"/>
               </a:lnSpc>
@@ -3172,7 +3394,7 @@
           <a:bodyPr wrap="square" lIns="0" tIns="0" rIns="0" bIns="0" rtlCol="0" anchor="ctr"/>
           <a:lstStyle/>
           <a:p>
-            <a:pPr algn="ctr" indent="0" marL="0">
+            <a:pPr marL="0" indent="0" algn="ctr">
               <a:lnSpc>
                 <a:spcPct val="95000"/>
               </a:lnSpc>
@@ -3262,7 +3484,7 @@
           <a:bodyPr wrap="square" lIns="0" tIns="0" rIns="0" bIns="0" rtlCol="0" anchor="ctr"/>
           <a:lstStyle/>
           <a:p>
-            <a:pPr algn="ctr" indent="0" marL="0">
+            <a:pPr marL="0" indent="0" algn="ctr">
               <a:lnSpc>
                 <a:spcPct val="95000"/>
               </a:lnSpc>
@@ -3376,7 +3598,7 @@
           <a:bodyPr wrap="square" lIns="0" tIns="0" rIns="0" bIns="0" rtlCol="0" anchor="ctr"/>
           <a:lstStyle/>
           <a:p>
-            <a:pPr algn="ctr" indent="0" marL="0">
+            <a:pPr marL="0" indent="0" algn="ctr">
               <a:lnSpc>
                 <a:spcPct val="95000"/>
               </a:lnSpc>
@@ -3442,7 +3664,7 @@
           <a:bodyPr wrap="square" lIns="0" tIns="0" rIns="0" bIns="0" rtlCol="0" anchor="ctr"/>
           <a:lstStyle/>
           <a:p>
-            <a:pPr algn="ctr" indent="0" marL="0">
+            <a:pPr marL="0" indent="0" algn="ctr">
               <a:lnSpc>
                 <a:spcPct val="95000"/>
               </a:lnSpc>
@@ -3459,7 +3681,7 @@
             <a:endParaRPr lang="en-US" sz="1450" dirty="0"/>
           </a:p>
           <a:p>
-            <a:pPr algn="ctr" indent="0" marL="0">
+            <a:pPr marL="0" indent="0" algn="ctr">
               <a:lnSpc>
                 <a:spcPct val="95000"/>
               </a:lnSpc>
@@ -3618,7 +3840,7 @@
           <a:bodyPr wrap="square" lIns="0" tIns="0" rIns="0" bIns="0" rtlCol="0" anchor="ctr"/>
           <a:lstStyle/>
           <a:p>
-            <a:pPr algn="ctr" indent="0" marL="0">
+            <a:pPr marL="0" indent="0" algn="ctr">
               <a:lnSpc>
                 <a:spcPct val="95000"/>
               </a:lnSpc>
@@ -3630,7 +3852,7 @@
                   <a:schemeClr val="tx1"/>
                 </a:solidFill>
               </a:rPr>
-              <a:t>3. 비대칭 교차 어텐션</a:t>
+              <a:t>3. 교차 어텐션</a:t>
             </a:r>
             <a:endParaRPr lang="en-US" sz="1700" dirty="0"/>
           </a:p>
@@ -3708,7 +3930,7 @@
           <a:bodyPr wrap="square" lIns="0" tIns="0" rIns="0" bIns="0" rtlCol="0" anchor="ctr"/>
           <a:lstStyle/>
           <a:p>
-            <a:pPr algn="ctr" indent="0" marL="0">
+            <a:pPr marL="0" indent="0" algn="ctr">
               <a:lnSpc>
                 <a:spcPct val="95000"/>
               </a:lnSpc>
@@ -3798,7 +4020,7 @@
           <a:bodyPr wrap="square" lIns="0" tIns="0" rIns="0" bIns="0" rtlCol="0" anchor="ctr"/>
           <a:lstStyle/>
           <a:p>
-            <a:pPr algn="ctr" indent="0" marL="0">
+            <a:pPr marL="0" indent="0" algn="ctr">
               <a:lnSpc>
                 <a:spcPct val="95000"/>
               </a:lnSpc>
@@ -3958,7 +4180,7 @@
           <a:bodyPr wrap="square" lIns="0" tIns="0" rIns="0" bIns="0" rtlCol="0" anchor="ctr"/>
           <a:lstStyle/>
           <a:p>
-            <a:pPr algn="ctr" indent="0" marL="0">
+            <a:pPr marL="0" indent="0" algn="ctr">
               <a:lnSpc>
                 <a:spcPct val="95000"/>
               </a:lnSpc>
@@ -4048,7 +4270,7 @@
           <a:bodyPr wrap="square" lIns="0" tIns="0" rIns="0" bIns="0" rtlCol="0" anchor="ctr"/>
           <a:lstStyle/>
           <a:p>
-            <a:pPr algn="ctr" indent="0" marL="0">
+            <a:pPr marL="0" indent="0" algn="ctr">
               <a:lnSpc>
                 <a:spcPct val="95000"/>
               </a:lnSpc>
@@ -4138,7 +4360,7 @@
           <a:bodyPr wrap="square" lIns="0" tIns="0" rIns="0" bIns="0" rtlCol="0" anchor="ctr"/>
           <a:lstStyle/>
           <a:p>
-            <a:pPr algn="ctr" indent="0" marL="0">
+            <a:pPr marL="0" indent="0" algn="ctr">
               <a:lnSpc>
                 <a:spcPct val="95000"/>
               </a:lnSpc>
@@ -4164,7 +4386,7 @@
         </p:nvSpPr>
         <p:spPr>
           <a:xfrm>
-            <a:off x="7742682" y="12344400"/>
+            <a:off x="7742682" y="12618720"/>
             <a:ext cx="6828282" cy="4297680"/>
           </a:xfrm>
           <a:prstGeom prst="roundRect">
@@ -4191,7 +4413,7 @@
         </p:nvSpPr>
         <p:spPr>
           <a:xfrm>
-            <a:off x="8062722" y="12618720"/>
+            <a:off x="8062722" y="12893040"/>
             <a:ext cx="621792" cy="621792"/>
           </a:xfrm>
           <a:prstGeom prst="ellipse">
@@ -4216,7 +4438,7 @@
         </p:nvSpPr>
         <p:spPr>
           <a:xfrm>
-            <a:off x="8062722" y="12618720"/>
+            <a:off x="8062722" y="12893040"/>
             <a:ext cx="621792" cy="621792"/>
           </a:xfrm>
           <a:prstGeom prst="rect">
@@ -4229,7 +4451,7 @@
           <a:bodyPr wrap="square" lIns="0" tIns="0" rIns="0" bIns="0" rtlCol="0" anchor="ctr"/>
           <a:lstStyle/>
           <a:p>
-            <a:pPr algn="ctr" indent="0" marL="0">
+            <a:pPr marL="0" indent="0" algn="ctr">
               <a:buNone/>
             </a:pPr>
             <a:r>
@@ -4238,7 +4460,7 @@
                   <a:schemeClr val="accent1"/>
                 </a:solidFill>
               </a:rPr>
-              <a:t>4</a:t>
+              <a:t>5</a:t>
             </a:r>
             <a:endParaRPr lang="en-US" sz="2600" dirty="0"/>
           </a:p>
@@ -4252,7 +4474,7 @@
         </p:nvSpPr>
         <p:spPr>
           <a:xfrm>
-            <a:off x="8839962" y="12618720"/>
+            <a:off x="8839962" y="12893040"/>
             <a:ext cx="5456682" cy="621792"/>
           </a:xfrm>
           <a:prstGeom prst="rect">
@@ -4265,7 +4487,7 @@
           <a:bodyPr wrap="square" lIns="0" tIns="0" rIns="0" bIns="0" rtlCol="0" anchor="ctr"/>
           <a:lstStyle/>
           <a:p>
-            <a:pPr indent="0" marL="0">
+            <a:pPr marL="0" indent="0">
               <a:buNone/>
             </a:pPr>
             <a:r>
@@ -4288,7 +4510,7 @@
         </p:nvSpPr>
         <p:spPr>
           <a:xfrm>
-            <a:off x="8108442" y="13487400"/>
+            <a:off x="8108442" y="13761720"/>
             <a:ext cx="6096762" cy="1005840"/>
           </a:xfrm>
           <a:prstGeom prst="rect">
@@ -4301,7 +4523,7 @@
           <a:bodyPr wrap="square" lIns="0" tIns="0" rIns="0" bIns="0" rtlCol="0" anchor="ctr"/>
           <a:lstStyle/>
           <a:p>
-            <a:pPr indent="0" marL="0">
+            <a:pPr marL="0" indent="0">
               <a:spcAft>
                 <a:spcPts val="600"/>
               </a:spcAft>
@@ -4315,30 +4537,24 @@
               </a:rPr>
               <a:t>GitHub  </a:t>
             </a:r>
-            <a:pPr indent="0" marL="0">
+            <a:r>
+              <a:rPr lang="en-US" sz="1700" b="1" dirty="0">
+                <a:solidFill>
+                  <a:schemeClr val="accent3"/>
+                </a:solidFill>
+              </a:rPr>
+              <a:t>github.com/kimsangmin1234/jolup</a:t>
+            </a:r>
+            <a:endParaRPr lang="en-US" sz="1700" dirty="0"/>
+          </a:p>
+          <a:p>
+            <a:pPr marL="0" indent="0">
               <a:spcAft>
                 <a:spcPts val="600"/>
               </a:spcAft>
               <a:buNone/>
             </a:pPr>
             <a:r>
-              <a:rPr lang="en-US" sz="1700" b="1" dirty="0">
-                <a:solidFill>
-                  <a:schemeClr val="accent3"/>
-                </a:solidFill>
-              </a:rPr>
-              <a:t>github.com/kimsangmin1234/jolup</a:t>
-            </a:r>
-            <a:endParaRPr lang="en-US" sz="1700" dirty="0"/>
-          </a:p>
-          <a:p>
-            <a:pPr indent="0" marL="0">
-              <a:spcAft>
-                <a:spcPts val="600"/>
-              </a:spcAft>
-              <a:buNone/>
-            </a:pPr>
-            <a:r>
               <a:rPr lang="en-US" sz="1500" b="1" dirty="0">
                 <a:solidFill>
                   <a:schemeClr val="accent1"/>
@@ -4346,12 +4562,6 @@
               </a:rPr>
               <a:t>개발 환경  </a:t>
             </a:r>
-            <a:pPr indent="0" marL="0">
-              <a:spcAft>
-                <a:spcPts val="600"/>
-              </a:spcAft>
-              <a:buNone/>
-            </a:pPr>
             <a:r>
               <a:rPr lang="en-US" sz="1500" dirty="0">
                 <a:solidFill>
@@ -4366,29 +4576,41 @@
       </p:sp>
       <p:graphicFrame>
         <p:nvGraphicFramePr>
-          <p:cNvPr id="2" name="src-table"/>
+          <p:cNvPr id="83" name="src-table"/>
           <p:cNvGraphicFramePr>
             <a:graphicFrameLocks noGrp="1"/>
           </p:cNvGraphicFramePr>
           <p:nvPr>
             <p:extLst>
               <p:ext uri="{D42A27DB-BD31-4B8C-83A1-F6EECF244321}">
-                <p14:modId xmlns:p14="http://schemas.microsoft.com/office/powerpoint/2010/main" val="1579011935"/>
+                <p14:modId xmlns:p14="http://schemas.microsoft.com/office/powerpoint/2010/main" val="3700325996"/>
               </p:ext>
             </p:extLst>
           </p:nvPr>
         </p:nvGraphicFramePr>
         <p:xfrm>
-          <a:off x="8108442" y="14630400"/>
-          <a:ext cx="6096762" cy="914400"/>
+          <a:off x="8108442" y="14904720"/>
+          <a:ext cx="6096762" cy="1755648"/>
         </p:xfrm>
         <a:graphic>
           <a:graphicData uri="http://schemas.openxmlformats.org/drawingml/2006/table">
             <a:tbl>
               <a:tblPr/>
               <a:tblGrid>
-                <a:gridCol w="2971800"/>
-                <a:gridCol w="3124962"/>
+                <a:gridCol w="2971800">
+                  <a:extLst>
+                    <a:ext uri="{9D8B030D-6E8A-4147-A177-3AD203B41FA5}">
+                      <a16:colId xmlns:a16="http://schemas.microsoft.com/office/drawing/2014/main" val="20000"/>
+                    </a:ext>
+                  </a:extLst>
+                </a:gridCol>
+                <a:gridCol w="3124962">
+                  <a:extLst>
+                    <a:ext uri="{9D8B030D-6E8A-4147-A177-3AD203B41FA5}">
+                      <a16:colId xmlns:a16="http://schemas.microsoft.com/office/drawing/2014/main" val="20001"/>
+                    </a:ext>
+                  </a:extLst>
+                </a:gridCol>
               </a:tblGrid>
               <a:tr h="292608">
                 <a:tc>
@@ -4396,7 +4618,7 @@
                     <a:bodyPr/>
                     <a:lstStyle/>
                     <a:p>
-                      <a:pPr indent="0" marL="0">
+                      <a:pPr marL="0" indent="0">
                         <a:buNone/>
                       </a:pPr>
                       <a:r>
@@ -4464,7 +4686,7 @@
                     <a:bodyPr/>
                     <a:lstStyle/>
                     <a:p>
-                      <a:pPr indent="0" marL="0">
+                      <a:pPr marL="0" indent="0">
                         <a:buNone/>
                       </a:pPr>
                       <a:r>
@@ -4520,6 +4742,11 @@
                     </a:solidFill>
                   </a:tcPr>
                 </a:tc>
+                <a:extLst>
+                  <a:ext uri="{0D108BD9-81ED-4DB2-BD59-A6C34878D82A}">
+                    <a16:rowId xmlns:a16="http://schemas.microsoft.com/office/drawing/2014/main" val="10000"/>
+                  </a:ext>
+                </a:extLst>
               </a:tr>
               <a:tr h="292608">
                 <a:tc>
@@ -4527,7 +4754,7 @@
                     <a:bodyPr/>
                     <a:lstStyle/>
                     <a:p>
-                      <a:pPr indent="0" marL="0">
+                      <a:pPr marL="0" indent="0">
                         <a:buNone/>
                       </a:pPr>
                       <a:r>
@@ -4595,7 +4822,7 @@
                     <a:bodyPr/>
                     <a:lstStyle/>
                     <a:p>
-                      <a:pPr indent="0" marL="0">
+                      <a:pPr marL="0" indent="0">
                         <a:buNone/>
                       </a:pPr>
                       <a:r>
@@ -4651,6 +4878,11 @@
                     </a:solidFill>
                   </a:tcPr>
                 </a:tc>
+                <a:extLst>
+                  <a:ext uri="{0D108BD9-81ED-4DB2-BD59-A6C34878D82A}">
+                    <a16:rowId xmlns:a16="http://schemas.microsoft.com/office/drawing/2014/main" val="10001"/>
+                  </a:ext>
+                </a:extLst>
               </a:tr>
               <a:tr h="292608">
                 <a:tc>
@@ -4658,7 +4890,7 @@
                     <a:bodyPr/>
                     <a:lstStyle/>
                     <a:p>
-                      <a:pPr indent="0" marL="0">
+                      <a:pPr marL="0" indent="0">
                         <a:buNone/>
                       </a:pPr>
                       <a:r>
@@ -4726,7 +4958,7 @@
                     <a:bodyPr/>
                     <a:lstStyle/>
                     <a:p>
-                      <a:pPr indent="0" marL="0">
+                      <a:pPr marL="0" indent="0">
                         <a:buNone/>
                       </a:pPr>
                       <a:r>
@@ -4735,7 +4967,7 @@
                             <a:schemeClr val="tx1"/>
                           </a:solidFill>
                         </a:rPr>
-                        <a:t>③ 비대칭 교차 어텐션</a:t>
+                        <a:t>③ 교차 어텐션</a:t>
                       </a:r>
                       <a:endParaRPr lang="en-US" sz="1450" dirty="0"/>
                     </a:p>
@@ -4782,6 +5014,11 @@
                     </a:solidFill>
                   </a:tcPr>
                 </a:tc>
+                <a:extLst>
+                  <a:ext uri="{0D108BD9-81ED-4DB2-BD59-A6C34878D82A}">
+                    <a16:rowId xmlns:a16="http://schemas.microsoft.com/office/drawing/2014/main" val="10002"/>
+                  </a:ext>
+                </a:extLst>
               </a:tr>
               <a:tr h="292608">
                 <a:tc>
@@ -4789,7 +5026,7 @@
                     <a:bodyPr/>
                     <a:lstStyle/>
                     <a:p>
-                      <a:pPr indent="0" marL="0">
+                      <a:pPr marL="0" indent="0">
                         <a:buNone/>
                       </a:pPr>
                       <a:r>
@@ -4857,7 +5094,7 @@
                     <a:bodyPr/>
                     <a:lstStyle/>
                     <a:p>
-                      <a:pPr indent="0" marL="0">
+                      <a:pPr marL="0" indent="0">
                         <a:buNone/>
                       </a:pPr>
                       <a:r>
@@ -4913,6 +5150,11 @@
                     </a:solidFill>
                   </a:tcPr>
                 </a:tc>
+                <a:extLst>
+                  <a:ext uri="{0D108BD9-81ED-4DB2-BD59-A6C34878D82A}">
+                    <a16:rowId xmlns:a16="http://schemas.microsoft.com/office/drawing/2014/main" val="10003"/>
+                  </a:ext>
+                </a:extLst>
               </a:tr>
               <a:tr h="292608">
                 <a:tc>
@@ -4920,7 +5162,7 @@
                     <a:bodyPr/>
                     <a:lstStyle/>
                     <a:p>
-                      <a:pPr indent="0" marL="0">
+                      <a:pPr marL="0" indent="0">
                         <a:buNone/>
                       </a:pPr>
                       <a:r>
@@ -4988,7 +5230,7 @@
                     <a:bodyPr/>
                     <a:lstStyle/>
                     <a:p>
-                      <a:pPr indent="0" marL="0">
+                      <a:pPr marL="0" indent="0">
                         <a:buNone/>
                       </a:pPr>
                       <a:r>
@@ -5044,6 +5286,11 @@
                     </a:solidFill>
                   </a:tcPr>
                 </a:tc>
+                <a:extLst>
+                  <a:ext uri="{0D108BD9-81ED-4DB2-BD59-A6C34878D82A}">
+                    <a16:rowId xmlns:a16="http://schemas.microsoft.com/office/drawing/2014/main" val="10004"/>
+                  </a:ext>
+                </a:extLst>
               </a:tr>
               <a:tr h="292608">
                 <a:tc>
@@ -5051,7 +5298,7 @@
                     <a:bodyPr/>
                     <a:lstStyle/>
                     <a:p>
-                      <a:pPr indent="0" marL="0">
+                      <a:pPr marL="0" indent="0">
                         <a:buNone/>
                       </a:pPr>
                       <a:r>
@@ -5119,7 +5366,7 @@
                     <a:bodyPr/>
                     <a:lstStyle/>
                     <a:p>
-                      <a:pPr indent="0" marL="0">
+                      <a:pPr marL="0" indent="0">
                         <a:buNone/>
                       </a:pPr>
                       <a:r>
@@ -5175,6 +5422,11 @@
                     </a:solidFill>
                   </a:tcPr>
                 </a:tc>
+                <a:extLst>
+                  <a:ext uri="{0D108BD9-81ED-4DB2-BD59-A6C34878D82A}">
+                    <a16:rowId xmlns:a16="http://schemas.microsoft.com/office/drawing/2014/main" val="10005"/>
+                  </a:ext>
+                </a:extLst>
               </a:tr>
             </a:tbl>
           </a:graphicData>
@@ -5188,7 +5440,7 @@
         </p:nvSpPr>
         <p:spPr>
           <a:xfrm>
-            <a:off x="7742682" y="16916400"/>
+            <a:off x="7742682" y="17190720"/>
             <a:ext cx="6828282" cy="4010558"/>
           </a:xfrm>
           <a:prstGeom prst="roundRect">
@@ -5215,7 +5467,7 @@
         </p:nvSpPr>
         <p:spPr>
           <a:xfrm>
-            <a:off x="8062722" y="17190720"/>
+            <a:off x="8062722" y="17465040"/>
             <a:ext cx="621792" cy="621792"/>
           </a:xfrm>
           <a:prstGeom prst="ellipse">
@@ -5240,7 +5492,7 @@
         </p:nvSpPr>
         <p:spPr>
           <a:xfrm>
-            <a:off x="8062722" y="17190720"/>
+            <a:off x="8062722" y="17465040"/>
             <a:ext cx="621792" cy="621792"/>
           </a:xfrm>
           <a:prstGeom prst="rect">
@@ -5253,7 +5505,7 @@
           <a:bodyPr wrap="square" lIns="0" tIns="0" rIns="0" bIns="0" rtlCol="0" anchor="ctr"/>
           <a:lstStyle/>
           <a:p>
-            <a:pPr algn="ctr" indent="0" marL="0">
+            <a:pPr marL="0" indent="0" algn="ctr">
               <a:buNone/>
             </a:pPr>
             <a:r>
@@ -5276,7 +5528,7 @@
         </p:nvSpPr>
         <p:spPr>
           <a:xfrm>
-            <a:off x="8839962" y="17190720"/>
+            <a:off x="8839962" y="17465040"/>
             <a:ext cx="5456682" cy="621792"/>
           </a:xfrm>
           <a:prstGeom prst="rect">
@@ -5289,7 +5541,7 @@
           <a:bodyPr wrap="square" lIns="0" tIns="0" rIns="0" bIns="0" rtlCol="0" anchor="ctr"/>
           <a:lstStyle/>
           <a:p>
-            <a:pPr indent="0" marL="0">
+            <a:pPr marL="0" indent="0">
               <a:buNone/>
             </a:pPr>
             <a:r>
@@ -5312,7 +5564,7 @@
         </p:nvSpPr>
         <p:spPr>
           <a:xfrm>
-            <a:off x="8108442" y="18059400"/>
+            <a:off x="8108442" y="18333720"/>
             <a:ext cx="6096762" cy="2593238"/>
           </a:xfrm>
           <a:prstGeom prst="rect">
@@ -5340,15 +5592,6 @@
               </a:rPr>
               <a:t>성과  </a:t>
             </a:r>
-            <a:pPr indent="0" marL="0">
-              <a:lnSpc>
-                <a:spcPct val="105000"/>
-              </a:lnSpc>
-              <a:spcAft>
-                <a:spcPts val="800"/>
-              </a:spcAft>
-              <a:buNone/>
-            </a:pPr>
             <a:r>
               <a:rPr lang="en-US" sz="1900" dirty="0">
                 <a:solidFill>
@@ -5375,15 +5618,6 @@
               </a:rPr>
               <a:t>한계  </a:t>
             </a:r>
-            <a:pPr indent="0" marL="0">
-              <a:lnSpc>
-                <a:spcPct val="105000"/>
-              </a:lnSpc>
-              <a:spcAft>
-                <a:spcPts val="800"/>
-              </a:spcAft>
-              <a:buNone/>
-            </a:pPr>
             <a:r>
               <a:rPr lang="en-US" sz="1900" dirty="0">
                 <a:solidFill>
@@ -5410,15 +5644,6 @@
               </a:rPr>
               <a:t>향후  </a:t>
             </a:r>
-            <a:pPr indent="0" marL="0">
-              <a:lnSpc>
-                <a:spcPct val="105000"/>
-              </a:lnSpc>
-              <a:spcAft>
-                <a:spcPts val="800"/>
-              </a:spcAft>
-              <a:buNone/>
-            </a:pPr>
             <a:r>
               <a:rPr lang="en-US" sz="1900" dirty="0">
                 <a:solidFill>
@@ -5439,7 +5664,7 @@
         </p:nvSpPr>
         <p:spPr>
           <a:xfrm>
-            <a:off x="548640" y="12344400"/>
+            <a:off x="548640" y="12618720"/>
             <a:ext cx="6828282" cy="8582558"/>
           </a:xfrm>
           <a:prstGeom prst="roundRect">
@@ -5466,7 +5691,7 @@
         </p:nvSpPr>
         <p:spPr>
           <a:xfrm>
-            <a:off x="868680" y="12618720"/>
+            <a:off x="868680" y="12893040"/>
             <a:ext cx="621792" cy="621792"/>
           </a:xfrm>
           <a:prstGeom prst="ellipse">
@@ -5491,7 +5716,7 @@
         </p:nvSpPr>
         <p:spPr>
           <a:xfrm>
-            <a:off x="868680" y="12618720"/>
+            <a:off x="868680" y="12893040"/>
             <a:ext cx="621792" cy="621792"/>
           </a:xfrm>
           <a:prstGeom prst="rect">
@@ -5504,7 +5729,7 @@
           <a:bodyPr wrap="square" lIns="0" tIns="0" rIns="0" bIns="0" rtlCol="0" anchor="ctr"/>
           <a:lstStyle/>
           <a:p>
-            <a:pPr algn="ctr" indent="0" marL="0">
+            <a:pPr marL="0" indent="0" algn="ctr">
               <a:buNone/>
             </a:pPr>
             <a:r>
@@ -5513,7 +5738,7 @@
                   <a:schemeClr val="accent1"/>
                 </a:solidFill>
               </a:rPr>
-              <a:t>5</a:t>
+              <a:t>4</a:t>
             </a:r>
             <a:endParaRPr lang="en-US" sz="2600" dirty="0"/>
           </a:p>
@@ -5527,7 +5752,7 @@
         </p:nvSpPr>
         <p:spPr>
           <a:xfrm>
-            <a:off x="1645920" y="12618720"/>
+            <a:off x="1645920" y="12893040"/>
             <a:ext cx="5456682" cy="621792"/>
           </a:xfrm>
           <a:prstGeom prst="rect">
@@ -5540,7 +5765,7 @@
           <a:bodyPr wrap="square" lIns="0" tIns="0" rIns="0" bIns="0" rtlCol="0" anchor="ctr"/>
           <a:lstStyle/>
           <a:p>
-            <a:pPr indent="0" marL="0">
+            <a:pPr marL="0" indent="0">
               <a:buNone/>
             </a:pPr>
             <a:r>
@@ -5563,7 +5788,7 @@
         </p:nvSpPr>
         <p:spPr>
           <a:xfrm>
-            <a:off x="914400" y="13487400"/>
+            <a:off x="914400" y="13761720"/>
             <a:ext cx="6096762" cy="685800"/>
           </a:xfrm>
           <a:prstGeom prst="rect">
@@ -5576,66 +5801,58 @@
           <a:bodyPr wrap="square" lIns="0" tIns="0" rIns="0" bIns="0" rtlCol="0" anchor="t"/>
           <a:lstStyle/>
           <a:p>
-            <a:pPr indent="0" marL="0">
+            <a:pPr marL="0" indent="0">
               <a:lnSpc>
                 <a:spcPct val="105000"/>
               </a:lnSpc>
+              <a:spcAft>
+                <a:spcPts val="300"/>
+              </a:spcAft>
               <a:buNone/>
             </a:pPr>
             <a:r>
-              <a:rPr lang="en-US" sz="1500" b="1" dirty="0">
+              <a:rPr lang="ko-KR" altLang="en-US" sz="1450" b="1" dirty="0">
                 <a:solidFill>
                   <a:schemeClr val="accent1"/>
                 </a:solidFill>
               </a:rPr>
-              <a:t>데이터  </a:t>
-            </a:r>
-            <a:pPr indent="0" marL="0">
+              <a:t>평가 방법  </a:t>
+            </a:r>
+            <a:r>
+              <a:rPr lang="ko-KR" altLang="en-US" sz="1450" dirty="0">
+                <a:solidFill>
+                  <a:schemeClr val="tx1"/>
+                </a:solidFill>
+              </a:rPr>
+              <a:t>2020.03~2021.05 기업 보도자료로 "과거로 학습 → 다음 기간 평가"를 3번 반복 (평가 뉴스 32,926건)</a:t>
+            </a:r>
+          </a:p>
+          <a:p>
+            <a:pPr marL="0" indent="0">
               <a:lnSpc>
                 <a:spcPct val="105000"/>
               </a:lnSpc>
+              <a:spcAft>
+                <a:spcPts val="300"/>
+              </a:spcAft>
               <a:buNone/>
             </a:pPr>
             <a:r>
-              <a:rPr lang="en-US" sz="1500" dirty="0">
+              <a:rPr lang="ko-KR" altLang="en-US" sz="1450" b="1" dirty="0">
+                <a:solidFill>
+                  <a:schemeClr val="accent1"/>
+                </a:solidFill>
+              </a:rPr>
+              <a:t>순위 IC  </a:t>
+            </a:r>
+            <a:r>
+              <a:rPr lang="ko-KR" altLang="en-US" sz="1450" dirty="0">
                 <a:solidFill>
                   <a:schemeClr val="tx1"/>
                 </a:solidFill>
               </a:rPr>
-              <a:t>EDT 보도자료(2020.03~2021.05), 표본 외 32,926건</a:t>
-            </a:r>
-            <a:endParaRPr lang="en-US" sz="1500" dirty="0"/>
-          </a:p>
-          <a:p>
-            <a:pPr indent="0" marL="0">
-              <a:lnSpc>
-                <a:spcPct val="105000"/>
-              </a:lnSpc>
-              <a:buNone/>
-            </a:pPr>
-            <a:r>
-              <a:rPr lang="en-US" sz="1500" b="1" dirty="0">
-                <a:solidFill>
-                  <a:schemeClr val="accent1"/>
-                </a:solidFill>
-              </a:rPr>
-              <a:t>지표  </a:t>
-            </a:r>
-            <a:pPr indent="0" marL="0">
-              <a:lnSpc>
-                <a:spcPct val="105000"/>
-              </a:lnSpc>
-              <a:buNone/>
-            </a:pPr>
-            <a:r>
-              <a:rPr lang="en-US" sz="1500" dirty="0">
-                <a:solidFill>
-                  <a:schemeClr val="tx1"/>
-                </a:solidFill>
-              </a:rPr>
-              <a:t>순위 IC = 예측 순위와 실제 1일 초과수익률 순위의 상관</a:t>
-            </a:r>
-            <a:endParaRPr lang="en-US" sz="1500" dirty="0"/>
+              <a:t>예측 순서와 실제 등락 순서의 일치도 (0 = 무작위, 0.05 이상이면 의미 있음)</a:t>
+            </a:r>
           </a:p>
         </p:txBody>
       </p:sp>
@@ -5647,7 +5864,7 @@
         </p:nvSpPr>
         <p:spPr>
           <a:xfrm>
-            <a:off x="914400" y="14310360"/>
+            <a:off x="914400" y="14843760"/>
             <a:ext cx="1910334" cy="1645920"/>
           </a:xfrm>
           <a:prstGeom prst="roundRect">
@@ -5674,7 +5891,7 @@
         </p:nvSpPr>
         <p:spPr>
           <a:xfrm>
-            <a:off x="914400" y="14420088"/>
+            <a:off x="914400" y="14953488"/>
             <a:ext cx="1910334" cy="731520"/>
           </a:xfrm>
           <a:prstGeom prst="rect">
@@ -5687,7 +5904,7 @@
           <a:bodyPr wrap="square" lIns="0" tIns="0" rIns="0" bIns="0" rtlCol="0" anchor="ctr"/>
           <a:lstStyle/>
           <a:p>
-            <a:pPr algn="ctr" indent="0" marL="0">
+            <a:pPr marL="0" indent="0" algn="ctr">
               <a:buNone/>
             </a:pPr>
             <a:r>
@@ -5710,7 +5927,7 @@
         </p:nvSpPr>
         <p:spPr>
           <a:xfrm>
-            <a:off x="987552" y="15151608"/>
+            <a:off x="987552" y="15685008"/>
             <a:ext cx="1764030" cy="731520"/>
           </a:xfrm>
           <a:prstGeom prst="rect">
@@ -5723,7 +5940,7 @@
           <a:bodyPr wrap="square" lIns="0" tIns="0" rIns="0" bIns="0" rtlCol="0" anchor="ctr"/>
           <a:lstStyle/>
           <a:p>
-            <a:pPr algn="ctr" indent="0" marL="0">
+            <a:pPr marL="0" indent="0" algn="ctr">
               <a:buNone/>
             </a:pPr>
             <a:r>
@@ -5732,12 +5949,12 @@
                   <a:schemeClr val="tx1"/>
                 </a:solidFill>
               </a:rPr>
-              <a:t>논문 구조 순위 IC</a:t>
+              <a:t>논문 구조의 순위 IC</a:t>
             </a:r>
             <a:endParaRPr lang="en-US" sz="1350" dirty="0"/>
           </a:p>
           <a:p>
-            <a:pPr algn="ctr" indent="0" marL="0">
+            <a:pPr marL="0" indent="0" algn="ctr">
               <a:buNone/>
             </a:pPr>
             <a:r>
@@ -5746,7 +5963,7 @@
                   <a:schemeClr val="tx1"/>
                 </a:solidFill>
               </a:rPr>
-              <a:t>95% CI 0.046~0.073</a:t>
+              <a:t>우연 확률 0.1% 미만</a:t>
             </a:r>
             <a:endParaRPr lang="en-US" sz="1350" dirty="0"/>
           </a:p>
@@ -5760,7 +5977,7 @@
         </p:nvSpPr>
         <p:spPr>
           <a:xfrm>
-            <a:off x="3007614" y="14310360"/>
+            <a:off x="3007614" y="14843760"/>
             <a:ext cx="1910334" cy="1645920"/>
           </a:xfrm>
           <a:prstGeom prst="roundRect">
@@ -5787,7 +6004,7 @@
         </p:nvSpPr>
         <p:spPr>
           <a:xfrm>
-            <a:off x="3007614" y="14420088"/>
+            <a:off x="3007614" y="14953488"/>
             <a:ext cx="1910334" cy="731520"/>
           </a:xfrm>
           <a:prstGeom prst="rect">
@@ -5800,7 +6017,7 @@
           <a:bodyPr wrap="square" lIns="0" tIns="0" rIns="0" bIns="0" rtlCol="0" anchor="ctr"/>
           <a:lstStyle/>
           <a:p>
-            <a:pPr algn="ctr" indent="0" marL="0">
+            <a:pPr marL="0" indent="0" algn="ctr">
               <a:buNone/>
             </a:pPr>
             <a:r>
@@ -5823,7 +6040,7 @@
         </p:nvSpPr>
         <p:spPr>
           <a:xfrm>
-            <a:off x="3080766" y="15151608"/>
+            <a:off x="3080766" y="15685008"/>
             <a:ext cx="1764030" cy="731520"/>
           </a:xfrm>
           <a:prstGeom prst="rect">
@@ -5836,7 +6053,7 @@
           <a:bodyPr wrap="square" lIns="0" tIns="0" rIns="0" bIns="0" rtlCol="0" anchor="ctr"/>
           <a:lstStyle/>
           <a:p>
-            <a:pPr algn="ctr" indent="0" marL="0">
+            <a:pPr marL="0" indent="0" algn="ctr">
               <a:buNone/>
             </a:pPr>
             <a:r>
@@ -5845,12 +6062,12 @@
                   <a:schemeClr val="tx1"/>
                 </a:solidFill>
               </a:rPr>
-              <a:t>평가 구간 모두</a:t>
+              <a:t>세 평가 기간 모두</a:t>
             </a:r>
             <a:endParaRPr lang="en-US" sz="1350" dirty="0"/>
           </a:p>
           <a:p>
-            <a:pPr algn="ctr" indent="0" marL="0">
+            <a:pPr marL="0" indent="0" algn="ctr">
               <a:buNone/>
             </a:pPr>
             <a:r>
@@ -5859,7 +6076,7 @@
                   <a:schemeClr val="tx1"/>
                 </a:solidFill>
               </a:rPr>
-              <a:t>양(+)의 예측력</a:t>
+              <a:t>예측력 확인</a:t>
             </a:r>
             <a:endParaRPr lang="en-US" sz="1350" dirty="0"/>
           </a:p>
@@ -5873,7 +6090,7 @@
         </p:nvSpPr>
         <p:spPr>
           <a:xfrm>
-            <a:off x="5100828" y="14310360"/>
+            <a:off x="5100828" y="14843760"/>
             <a:ext cx="1910334" cy="1645920"/>
           </a:xfrm>
           <a:prstGeom prst="roundRect">
@@ -5900,7 +6117,7 @@
         </p:nvSpPr>
         <p:spPr>
           <a:xfrm>
-            <a:off x="5100828" y="14420088"/>
+            <a:off x="5100828" y="14953488"/>
             <a:ext cx="1910334" cy="731520"/>
           </a:xfrm>
           <a:prstGeom prst="rect">
@@ -5913,7 +6130,7 @@
           <a:bodyPr wrap="square" lIns="0" tIns="0" rIns="0" bIns="0" rtlCol="0" anchor="ctr"/>
           <a:lstStyle/>
           <a:p>
-            <a:pPr algn="ctr" indent="0" marL="0">
+            <a:pPr marL="0" indent="0" algn="ctr">
               <a:buNone/>
             </a:pPr>
             <a:r>
@@ -5936,7 +6153,7 @@
         </p:nvSpPr>
         <p:spPr>
           <a:xfrm>
-            <a:off x="5173980" y="15151608"/>
+            <a:off x="5173980" y="15685008"/>
             <a:ext cx="1764030" cy="731520"/>
           </a:xfrm>
           <a:prstGeom prst="rect">
@@ -5949,7 +6166,7 @@
           <a:bodyPr wrap="square" lIns="0" tIns="0" rIns="0" bIns="0" rtlCol="0" anchor="ctr"/>
           <a:lstStyle/>
           <a:p>
-            <a:pPr algn="ctr" indent="0" marL="0">
+            <a:pPr marL="0" indent="0" algn="ctr">
               <a:buNone/>
             </a:pPr>
             <a:r>
@@ -5958,12 +6175,12 @@
                   <a:schemeClr val="tx1"/>
                 </a:solidFill>
               </a:rPr>
-              <a:t>감성 점수만 사용</a:t>
+              <a:t>감성 점수만 쓰면</a:t>
             </a:r>
             <a:endParaRPr lang="en-US" sz="1350" dirty="0"/>
           </a:p>
           <a:p>
-            <a:pPr algn="ctr" indent="0" marL="0">
+            <a:pPr marL="0" indent="0" algn="ctr">
               <a:buNone/>
             </a:pPr>
             <a:r>
@@ -5972,7 +6189,7 @@
                   <a:schemeClr val="tx1"/>
                 </a:solidFill>
               </a:rPr>
-              <a:t>(예측력 없음)</a:t>
+              <a:t>예측 못 함 (≈ 0)</a:t>
             </a:r>
             <a:endParaRPr lang="en-US" sz="1350" dirty="0"/>
           </a:p>
@@ -5980,33 +6197,82 @@
       </p:sp>
       <p:graphicFrame>
         <p:nvGraphicFramePr>
-          <p:cNvPr id="103" name="chart-ic" descr=""/>
+          <p:cNvPr id="103" name="chart-ic"/>
           <p:cNvGraphicFramePr/>
-          <p:nvPr/>
+          <p:nvPr>
+            <p:extLst>
+              <p:ext uri="{D42A27DB-BD31-4B8C-83A1-F6EECF244321}">
+                <p14:modId xmlns:p14="http://schemas.microsoft.com/office/powerpoint/2010/main" val="4030103467"/>
+              </p:ext>
+            </p:extLst>
+          </p:nvPr>
         </p:nvGraphicFramePr>
         <p:xfrm>
-          <a:off x="914400" y="16139160"/>
-          <a:ext cx="6096762" cy="2377440"/>
+          <a:off x="914400" y="17129760"/>
+          <a:ext cx="6096762" cy="2176272"/>
         </p:xfrm>
-        <a:graphic xmlns:a="http://schemas.openxmlformats.org/drawingml/2006/main">
+        <a:graphic>
           <a:graphicData uri="http://schemas.openxmlformats.org/drawingml/2006/chart">
-            <c:chart xmlns:c="http://schemas.openxmlformats.org/drawingml/2006/chart" r:id="rId1"/>
+            <c:chart xmlns:c="http://schemas.openxmlformats.org/drawingml/2006/chart" xmlns:r="http://schemas.openxmlformats.org/officeDocument/2006/relationships" r:id="rId3"/>
           </a:graphicData>
         </a:graphic>
       </p:graphicFrame>
+      <p:sp>
+        <p:nvSpPr>
+          <p:cNvPr id="105" name="text-summary"/>
+          <p:cNvSpPr txBox="1"/>
+          <p:nvPr/>
+        </p:nvSpPr>
+        <p:spPr>
+          <a:xfrm>
+            <a:off x="914400" y="16672560"/>
+            <a:ext cx="6096762" cy="438912"/>
+          </a:xfrm>
+          <a:prstGeom prst="rect">
+            <a:avLst/>
+          </a:prstGeom>
+          <a:noFill/>
+        </p:spPr>
+        <p:txBody>
+          <a:bodyPr wrap="square" lIns="0" tIns="0" rIns="0" bIns="0" rtlCol="0" anchor="ctr"/>
+          <a:lstStyle/>
+          <a:p>
+            <a:pPr marL="0" indent="0">
+              <a:lnSpc>
+                <a:spcPct val="100000"/>
+              </a:lnSpc>
+              <a:buNone/>
+            </a:pPr>
+            <a:r>
+              <a:rPr lang="ko-KR" altLang="en-US" sz="1500" b="1" dirty="0">
+                <a:solidFill>
+                  <a:schemeClr val="accent1"/>
+                </a:solidFill>
+              </a:rPr>
+              <a:t>→ 감성 점수만으로는 예측 불가, 뉴스 의미·감성 + 시장 지표를 결합한 논문 구조는 예측 가능</a:t>
+            </a:r>
+          </a:p>
+        </p:txBody>
+      </p:sp>
       <p:graphicFrame>
         <p:nvGraphicFramePr>
-          <p:cNvPr id="104" name="chart-window" descr=""/>
+          <p:cNvPr id="104" name="chart-window"/>
           <p:cNvGraphicFramePr/>
-          <p:nvPr/>
+          <p:nvPr>
+            <p:extLst>
+              <p:ext uri="{D42A27DB-BD31-4B8C-83A1-F6EECF244321}">
+                <p14:modId xmlns:p14="http://schemas.microsoft.com/office/powerpoint/2010/main" val="392070214"/>
+              </p:ext>
+            </p:extLst>
+          </p:nvPr>
         </p:nvGraphicFramePr>
         <p:xfrm>
-          <a:off x="914400" y="18653760"/>
-          <a:ext cx="6096762" cy="2044598"/>
+          <a:off x="914400" y="19443192"/>
+          <a:ext cx="6096762" cy="1788566"/>
         </p:xfrm>
-        <a:graphic xmlns:a="http://schemas.openxmlformats.org/drawingml/2006/main">
+        <a:graphic>
           <a:graphicData uri="http://schemas.openxmlformats.org/drawingml/2006/chart">
-            <c:chart xmlns:c="http://schemas.openxmlformats.org/drawingml/2006/chart" r:id="rId2"/>
+            <c:chart xmlns:c="http://schemas.openxmlformats.org/drawingml/2006/chart" xmlns:r="http://schemas.openxmlformats.org/officeDocument/2006/relationships" r:id="rId4"/>
           </a:graphicData>
         </a:graphic>
       </p:graphicFrame>
@@ -6311,4 +6577,299 @@
     </a:ext>
   </a:extLst>
 </a:theme>
+</file>
+
+<file path=ppt/theme/theme2.xml><?xml version="1.0" encoding="utf-8"?>
+<a:theme xmlns:a="http://schemas.openxmlformats.org/drawingml/2006/main" name="Office 테마">
+  <a:themeElements>
+    <a:clrScheme name="Office">
+      <a:dk1>
+        <a:sysClr val="windowText" lastClr="000000"/>
+      </a:dk1>
+      <a:lt1>
+        <a:sysClr val="window" lastClr="FFFFFF"/>
+      </a:lt1>
+      <a:dk2>
+        <a:srgbClr val="44546A"/>
+      </a:dk2>
+      <a:lt2>
+        <a:srgbClr val="E7E6E6"/>
+      </a:lt2>
+      <a:accent1>
+        <a:srgbClr val="4472C4"/>
+      </a:accent1>
+      <a:accent2>
+        <a:srgbClr val="ED7D31"/>
+      </a:accent2>
+      <a:accent3>
+        <a:srgbClr val="A5A5A5"/>
+      </a:accent3>
+      <a:accent4>
+        <a:srgbClr val="FFC000"/>
+      </a:accent4>
+      <a:accent5>
+        <a:srgbClr val="5B9BD5"/>
+      </a:accent5>
+      <a:accent6>
+        <a:srgbClr val="70AD47"/>
+      </a:accent6>
+      <a:hlink>
+        <a:srgbClr val="0563C1"/>
+      </a:hlink>
+      <a:folHlink>
+        <a:srgbClr val="954F72"/>
+      </a:folHlink>
+    </a:clrScheme>
+    <a:fontScheme name="Office">
+      <a:majorFont>
+        <a:latin typeface="맑은 고딕" panose="020F0302020204030204"/>
+        <a:ea typeface=""/>
+        <a:cs typeface=""/>
+        <a:font script="Jpan" typeface="游ゴシック Light"/>
+        <a:font script="Hang" typeface="맑은 고딕"/>
+        <a:font script="Hans" typeface="等线 Light"/>
+        <a:font script="Hant" typeface="新細明體"/>
+        <a:font script="Arab" typeface="Times New Roman"/>
+        <a:font script="Hebr" typeface="Times New Roman"/>
+        <a:font script="Thai" typeface="Angsana New"/>
+        <a:font script="Ethi" typeface="Nyala"/>
+        <a:font script="Beng" typeface="Vrinda"/>
+        <a:font script="Gujr" typeface="Shruti"/>
+        <a:font script="Khmr" typeface="MoolBoran"/>
+        <a:font script="Knda" typeface="Tunga"/>
+        <a:font script="Guru" typeface="Raavi"/>
+        <a:font script="Cans" typeface="Euphemia"/>
+        <a:font script="Cher" typeface="Plantagenet Cherokee"/>
+        <a:font script="Yiii" typeface="Microsoft Yi Baiti"/>
+        <a:font script="Tibt" typeface="Microsoft Himalaya"/>
+        <a:font script="Thaa" typeface="MV Boli"/>
+        <a:font script="Deva" typeface="Mangal"/>
+        <a:font script="Telu" typeface="Gautami"/>
+        <a:font script="Taml" typeface="Latha"/>
+        <a:font script="Syrc" typeface="Estrangelo Edessa"/>
+        <a:font script="Orya" typeface="Kalinga"/>
+        <a:font script="Mlym" typeface="Kartika"/>
+        <a:font script="Laoo" typeface="DokChampa"/>
+        <a:font script="Sinh" typeface="Iskoola Pota"/>
+        <a:font script="Mong" typeface="Mongolian Baiti"/>
+        <a:font script="Viet" typeface="Times New Roman"/>
+        <a:font script="Uigh" typeface="Microsoft Uighur"/>
+        <a:font script="Geor" typeface="Sylfaen"/>
+        <a:font script="Armn" typeface="Arial"/>
+        <a:font script="Bugi" typeface="Leelawadee UI"/>
+        <a:font script="Bopo" typeface="Microsoft JhengHei"/>
+        <a:font script="Java" typeface="Javanese Text"/>
+        <a:font script="Lisu" typeface="Segoe UI"/>
+        <a:font script="Mymr" typeface="Myanmar Text"/>
+        <a:font script="Nkoo" typeface="Ebrima"/>
+        <a:font script="Olck" typeface="Nirmala UI"/>
+        <a:font script="Osma" typeface="Ebrima"/>
+        <a:font script="Phag" typeface="Phagspa"/>
+        <a:font script="Syrn" typeface="Estrangelo Edessa"/>
+        <a:font script="Syrj" typeface="Estrangelo Edessa"/>
+        <a:font script="Syre" typeface="Estrangelo Edessa"/>
+        <a:font script="Sora" typeface="Nirmala UI"/>
+        <a:font script="Tale" typeface="Microsoft Tai Le"/>
+        <a:font script="Talu" typeface="Microsoft New Tai Lue"/>
+        <a:font script="Tfng" typeface="Ebrima"/>
+      </a:majorFont>
+      <a:minorFont>
+        <a:latin typeface="맑은 고딕" panose="020F0502020204030204"/>
+        <a:ea typeface=""/>
+        <a:cs typeface=""/>
+        <a:font script="Jpan" typeface="游ゴシック"/>
+        <a:font script="Hang" typeface="맑은 고딕"/>
+        <a:font script="Hans" typeface="等线"/>
+        <a:font script="Hant" typeface="新細明體"/>
+        <a:font script="Arab" typeface="Arial"/>
+        <a:font script="Hebr" typeface="Arial"/>
+        <a:font script="Thai" typeface="Cordia New"/>
+        <a:font script="Ethi" typeface="Nyala"/>
+        <a:font script="Beng" typeface="Vrinda"/>
+        <a:font script="Gujr" typeface="Shruti"/>
+        <a:font script="Khmr" typeface="DaunPenh"/>
+        <a:font script="Knda" typeface="Tunga"/>
+        <a:font script="Guru" typeface="Raavi"/>
+        <a:font script="Cans" typeface="Euphemia"/>
+        <a:font script="Cher" typeface="Plantagenet Cherokee"/>
+        <a:font script="Yiii" typeface="Microsoft Yi Baiti"/>
+        <a:font script="Tibt" typeface="Microsoft Himalaya"/>
+        <a:font script="Thaa" typeface="MV Boli"/>
+        <a:font script="Deva" typeface="Mangal"/>
+        <a:font script="Telu" typeface="Gautami"/>
+        <a:font script="Taml" typeface="Latha"/>
+        <a:font script="Syrc" typeface="Estrangelo Edessa"/>
+        <a:font script="Orya" typeface="Kalinga"/>
+        <a:font script="Mlym" typeface="Kartika"/>
+        <a:font script="Laoo" typeface="DokChampa"/>
+        <a:font script="Sinh" typeface="Iskoola Pota"/>
+        <a:font script="Mong" typeface="Mongolian Baiti"/>
+        <a:font script="Viet" typeface="Arial"/>
+        <a:font script="Uigh" typeface="Microsoft Uighur"/>
+        <a:font script="Geor" typeface="Sylfaen"/>
+        <a:font script="Armn" typeface="Arial"/>
+        <a:font script="Bugi" typeface="Leelawadee UI"/>
+        <a:font script="Bopo" typeface="Microsoft JhengHei"/>
+        <a:font script="Java" typeface="Javanese Text"/>
+        <a:font script="Lisu" typeface="Segoe UI"/>
+        <a:font script="Mymr" typeface="Myanmar Text"/>
+        <a:font script="Nkoo" typeface="Ebrima"/>
+        <a:font script="Olck" typeface="Nirmala UI"/>
+        <a:font script="Osma" typeface="Ebrima"/>
+        <a:font script="Phag" typeface="Phagspa"/>
+        <a:font script="Syrn" typeface="Estrangelo Edessa"/>
+        <a:font script="Syrj" typeface="Estrangelo Edessa"/>
+        <a:font script="Syre" typeface="Estrangelo Edessa"/>
+        <a:font script="Sora" typeface="Nirmala UI"/>
+        <a:font script="Tale" typeface="Microsoft Tai Le"/>
+        <a:font script="Talu" typeface="Microsoft New Tai Lue"/>
+        <a:font script="Tfng" typeface="Ebrima"/>
+      </a:minorFont>
+    </a:fontScheme>
+    <a:fmtScheme name="Office">
+      <a:fillStyleLst>
+        <a:solidFill>
+          <a:schemeClr val="phClr"/>
+        </a:solidFill>
+        <a:gradFill rotWithShape="1">
+          <a:gsLst>
+            <a:gs pos="0">
+              <a:schemeClr val="phClr">
+                <a:lumMod val="110000"/>
+                <a:satMod val="105000"/>
+                <a:tint val="67000"/>
+              </a:schemeClr>
+            </a:gs>
+            <a:gs pos="50000">
+              <a:schemeClr val="phClr">
+                <a:lumMod val="105000"/>
+                <a:satMod val="103000"/>
+                <a:tint val="73000"/>
+              </a:schemeClr>
+            </a:gs>
+            <a:gs pos="100000">
+              <a:schemeClr val="phClr">
+                <a:lumMod val="105000"/>
+                <a:satMod val="109000"/>
+                <a:tint val="81000"/>
+              </a:schemeClr>
+            </a:gs>
+          </a:gsLst>
+          <a:lin ang="5400000" scaled="0"/>
+        </a:gradFill>
+        <a:gradFill rotWithShape="1">
+          <a:gsLst>
+            <a:gs pos="0">
+              <a:schemeClr val="phClr">
+                <a:satMod val="103000"/>
+                <a:lumMod val="102000"/>
+                <a:tint val="94000"/>
+              </a:schemeClr>
+            </a:gs>
+            <a:gs pos="50000">
+              <a:schemeClr val="phClr">
+                <a:satMod val="110000"/>
+                <a:lumMod val="100000"/>
+                <a:shade val="100000"/>
+              </a:schemeClr>
+            </a:gs>
+            <a:gs pos="100000">
+              <a:schemeClr val="phClr">
+                <a:lumMod val="99000"/>
+                <a:satMod val="120000"/>
+                <a:shade val="78000"/>
+              </a:schemeClr>
+            </a:gs>
+          </a:gsLst>
+          <a:lin ang="5400000" scaled="0"/>
+        </a:gradFill>
+      </a:fillStyleLst>
+      <a:lnStyleLst>
+        <a:ln w="6350" cap="flat" cmpd="sng" algn="ctr">
+          <a:solidFill>
+            <a:schemeClr val="phClr"/>
+          </a:solidFill>
+          <a:prstDash val="solid"/>
+          <a:miter lim="800000"/>
+        </a:ln>
+        <a:ln w="12700" cap="flat" cmpd="sng" algn="ctr">
+          <a:solidFill>
+            <a:schemeClr val="phClr"/>
+          </a:solidFill>
+          <a:prstDash val="solid"/>
+          <a:miter lim="800000"/>
+        </a:ln>
+        <a:ln w="19050" cap="flat" cmpd="sng" algn="ctr">
+          <a:solidFill>
+            <a:schemeClr val="phClr"/>
+          </a:solidFill>
+          <a:prstDash val="solid"/>
+          <a:miter lim="800000"/>
+        </a:ln>
+      </a:lnStyleLst>
+      <a:effectStyleLst>
+        <a:effectStyle>
+          <a:effectLst/>
+        </a:effectStyle>
+        <a:effectStyle>
+          <a:effectLst/>
+        </a:effectStyle>
+        <a:effectStyle>
+          <a:effectLst>
+            <a:outerShdw blurRad="57150" dist="19050" dir="5400000" algn="ctr" rotWithShape="0">
+              <a:srgbClr val="000000">
+                <a:alpha val="63000"/>
+              </a:srgbClr>
+            </a:outerShdw>
+          </a:effectLst>
+        </a:effectStyle>
+      </a:effectStyleLst>
+      <a:bgFillStyleLst>
+        <a:solidFill>
+          <a:schemeClr val="phClr"/>
+        </a:solidFill>
+        <a:solidFill>
+          <a:schemeClr val="phClr">
+            <a:tint val="95000"/>
+            <a:satMod val="170000"/>
+          </a:schemeClr>
+        </a:solidFill>
+        <a:gradFill rotWithShape="1">
+          <a:gsLst>
+            <a:gs pos="0">
+              <a:schemeClr val="phClr">
+                <a:tint val="93000"/>
+                <a:satMod val="150000"/>
+                <a:shade val="98000"/>
+                <a:lumMod val="102000"/>
+              </a:schemeClr>
+            </a:gs>
+            <a:gs pos="50000">
+              <a:schemeClr val="phClr">
+                <a:tint val="98000"/>
+                <a:satMod val="130000"/>
+                <a:shade val="90000"/>
+                <a:lumMod val="103000"/>
+              </a:schemeClr>
+            </a:gs>
+            <a:gs pos="100000">
+              <a:schemeClr val="phClr">
+                <a:shade val="63000"/>
+                <a:satMod val="120000"/>
+              </a:schemeClr>
+            </a:gs>
+          </a:gsLst>
+          <a:lin ang="5400000" scaled="0"/>
+        </a:gradFill>
+      </a:bgFillStyleLst>
+    </a:fmtScheme>
+  </a:themeElements>
+  <a:objectDefaults/>
+  <a:extraClrSchemeLst/>
+  <a:extLst>
+    <a:ext uri="{05A4C25C-085E-4340-85A3-A5531E510DB2}">
+      <thm15:themeFamily xmlns:thm15="http://schemas.microsoft.com/office/thememl/2012/main" name="Office Theme" id="{62F939B6-93AF-4DB8-9C6B-D6C7DFDC589F}" vid="{4A3C46E8-61CC-4603-A589-7422A47A8E4A}"/>
+    </a:ext>
+  </a:extLst>
+</a:theme>
 </file>
--- a/docs/exhibition/패널_A_논문구조.pptx
+++ b/docs/exhibition/패널_A_논문구조.pptx
@@ -259,22 +259,6 @@
               </c:ext>
             </c:extLst>
           </c:dPt>
-          <c:dPt>
-            <c:idx val="3"/>
-            <c:invertIfNegative val="0"/>
-            <c:bubble3D val="0"/>
-            <c:spPr>
-              <a:solidFill>
-                <a:srgbClr val="9AA6B5"/>
-              </a:solidFill>
-              <a:effectLst/>
-            </c:spPr>
-            <c:extLst>
-              <c:ext xmlns:c16="http://schemas.microsoft.com/office/drawing/2014/chart" uri="{C3380CC4-5D6E-409C-BE32-E72D297353CC}">
-                <c16:uniqueId val="{00000007-0817-44ED-8E7C-C02718DE7F71}"/>
-              </c:ext>
-            </c:extLst>
-          </c:dPt>
           <c:dLbls>
             <c:numFmt formatCode="0.000" sourceLinked="0"/>
             <c:spPr>
@@ -314,9 +298,9 @@
           </c:dLbls>
           <c:cat>
             <c:strRef>
-              <c:f>Sheet1!$A$2:$A$5</c:f>
+              <c:f>Sheet1!$A$2:$A$4</c:f>
               <c:strCache>
-                <c:ptCount val="4"/>
+                <c:ptCount val="3"/>
                 <c:pt idx="0">
                   <c:v>감성 점수만</c:v>
                 </c:pt>
@@ -326,18 +310,15 @@
                 <c:pt idx="2">
                   <c:v>논문 구조 (P0)</c:v>
                 </c:pt>
-                <c:pt idx="3">
-                  <c:v>추가 개선 실험</c:v>
-                </c:pt>
               </c:strCache>
             </c:strRef>
           </c:cat>
           <c:val>
             <c:numRef>
-              <c:f>Sheet1!$B$2:$B$5</c:f>
+              <c:f>Sheet1!$B$2:$B$4</c:f>
               <c:numCache>
                 <c:formatCode>General</c:formatCode>
-                <c:ptCount val="4"/>
+                <c:ptCount val="3"/>
                 <c:pt idx="0">
                   <c:v>-6.0000000000000001E-3</c:v>
                 </c:pt>
@@ -346,9 +327,6 @@
                 </c:pt>
                 <c:pt idx="2">
                   <c:v>0.06</c:v>
-                </c:pt>
-                <c:pt idx="3">
-                  <c:v>9.1999999999999998E-2</c:v>
                 </c:pt>
               </c:numCache>
             </c:numRef>
@@ -5642,6 +5620,32 @@
                   <a:schemeClr val="accent1"/>
                 </a:solidFill>
               </a:rPr>
+              <a:t>추가 실험  </a:t>
+            </a:r>
+            <a:r>
+              <a:rPr lang="en-US" sz="1900" dirty="0">
+                <a:solidFill>
+                  <a:schemeClr val="tx1"/>
+                </a:solidFill>
+              </a:rPr>
+              <a:t>이벤트 정보 입력·순위 손실·12개 모델 앙상블로 순위 IC 0.060 → 0.092까지 향상</a:t>
+            </a:r>
+            <a:endParaRPr lang="en-US" sz="1900" dirty="0"/>
+          </a:p>
+          <a:p>
+            <a:pPr marL="228600" indent="-228600">
+              <a:lnSpc>
+                <a:spcPct val="105000"/>
+              </a:lnSpc>
+              <a:buSzPct val="100000"/>
+              <a:buChar char="•"/>
+            </a:pPr>
+            <a:r>
+              <a:rPr lang="en-US" sz="1900" b="1" dirty="0">
+                <a:solidFill>
+                  <a:schemeClr val="accent1"/>
+                </a:solidFill>
+              </a:rPr>
               <a:t>향후  </a:t>
             </a:r>
             <a:r>
@@ -5650,7 +5654,7 @@
                   <a:schemeClr val="tx1"/>
                 </a:solidFill>
               </a:rPr>
-              <a:t>입력 확장·앙상블로 0.092까지 개선 확인 → 비용을 고려한 전략 검증</a:t>
+              <a:t>거래비용을 고려한 실제 투자 전략 검증</a:t>
             </a:r>
             <a:endParaRPr lang="en-US" sz="1900" dirty="0"/>
           </a:p>

--- a/docs/exhibition/패널_A_논문구조.pptx
+++ b/docs/exhibition/패널_A_논문구조.pptx
@@ -5563,7 +5563,7 @@
               <a:buChar char="•"/>
             </a:pPr>
             <a:r>
-              <a:rPr lang="en-US" sz="1900" b="1" dirty="0">
+              <a:rPr lang="en-US" sz="1600" b="1" dirty="0">
                 <a:solidFill>
                   <a:schemeClr val="accent1"/>
                 </a:solidFill>
@@ -5571,14 +5571,14 @@
               <a:t>성과  </a:t>
             </a:r>
             <a:r>
-              <a:rPr lang="en-US" sz="1900" dirty="0">
+              <a:rPr lang="en-US" sz="1600" dirty="0">
                 <a:solidFill>
                   <a:schemeClr val="tx1"/>
                 </a:solidFill>
               </a:rPr>
-              <a:t>감성 점수만으로는 예측력이 없지만(−0.006), 제안 구조는 유의한 예측력(0.060)</a:t>
-            </a:r>
-            <a:endParaRPr lang="en-US" sz="1900" dirty="0"/>
+              <a:t>뉴스 의미·감성과 시장 지표를 결합한 논문 구조가 실제 데이터에서 예측력 확인 (순위 IC 0.060, 세 기간 모두 0보다 큼). 감성 점수만으로는 예측 불가 (−0.006)</a:t>
+            </a:r>
+            <a:endParaRPr lang="en-US" sz="1600" dirty="0"/>
           </a:p>
           <a:p>
             <a:pPr marL="228600" indent="-228600">
@@ -5589,22 +5589,22 @@
               <a:buChar char="•"/>
             </a:pPr>
             <a:r>
-              <a:rPr lang="en-US" sz="1900" b="1" dirty="0">
+              <a:rPr lang="en-US" sz="1600" b="1" dirty="0">
                 <a:solidFill>
                   <a:schemeClr val="accent1"/>
                 </a:solidFill>
               </a:rPr>
-              <a:t>한계  </a:t>
-            </a:r>
-            <a:r>
-              <a:rPr lang="en-US" sz="1900" dirty="0">
+              <a:t>추가 실험  </a:t>
+            </a:r>
+            <a:r>
+              <a:rPr lang="en-US" sz="1600" dirty="0">
                 <a:solidFill>
                   <a:schemeClr val="tx1"/>
                 </a:solidFill>
               </a:rPr>
-              <a:t>최근 구간 약화(0.033), 거래비용 반영 시 수익 소멸, 어텐션은 30일에 고르게 분포</a:t>
-            </a:r>
-            <a:endParaRPr lang="en-US" sz="1900" dirty="0"/>
+              <a:t>이벤트 정보 입력·순위 손실·12개 모델 앙상블로 순위 IC 0.092까지 향상</a:t>
+            </a:r>
+            <a:endParaRPr lang="en-US" sz="1600" dirty="0"/>
           </a:p>
           <a:p>
             <a:pPr marL="228600" indent="-228600">
@@ -5615,22 +5615,22 @@
               <a:buChar char="•"/>
             </a:pPr>
             <a:r>
-              <a:rPr lang="en-US" sz="1900" b="1" dirty="0">
+              <a:rPr lang="en-US" sz="1600" b="1" dirty="0">
                 <a:solidFill>
                   <a:schemeClr val="accent1"/>
                 </a:solidFill>
               </a:rPr>
-              <a:t>추가 실험  </a:t>
-            </a:r>
-            <a:r>
-              <a:rPr lang="en-US" sz="1900" dirty="0">
+              <a:t>한계  </a:t>
+            </a:r>
+            <a:r>
+              <a:rPr lang="en-US" sz="1600" dirty="0">
                 <a:solidFill>
                   <a:schemeClr val="tx1"/>
                 </a:solidFill>
               </a:rPr>
-              <a:t>이벤트 정보 입력·순위 손실·12개 모델 앙상블로 순위 IC 0.060 → 0.092까지 향상</a:t>
-            </a:r>
-            <a:endParaRPr lang="en-US" sz="1900" dirty="0"/>
+              <a:t>가장 최근 기간엔 예측력이 약해짐 (0.033), 매매 비용을 빼면 수익이 남지 않음, 어텐션이 특정 날을 고르지 못하고 30일을 고르게 참고</a:t>
+            </a:r>
+            <a:endParaRPr lang="en-US" sz="1600" dirty="0"/>
           </a:p>
           <a:p>
             <a:pPr marL="228600" indent="-228600">
@@ -5641,7 +5641,7 @@
               <a:buChar char="•"/>
             </a:pPr>
             <a:r>
-              <a:rPr lang="en-US" sz="1900" b="1" dirty="0">
+              <a:rPr lang="en-US" sz="1600" b="1" dirty="0">
                 <a:solidFill>
                   <a:schemeClr val="accent1"/>
                 </a:solidFill>
@@ -5649,14 +5649,14 @@
               <a:t>향후  </a:t>
             </a:r>
             <a:r>
-              <a:rPr lang="en-US" sz="1900" dirty="0">
+              <a:rPr lang="en-US" sz="1600" dirty="0">
                 <a:solidFill>
                   <a:schemeClr val="tx1"/>
                 </a:solidFill>
               </a:rPr>
-              <a:t>거래비용을 고려한 실제 투자 전략 검증</a:t>
-            </a:r>
-            <a:endParaRPr lang="en-US" sz="1900" dirty="0"/>
+              <a:t>대형주 중심·거래비용을 고려한 투자 전략 검증, 어텐션이 관련 날짜를 구분하도록 구조 개선</a:t>
+            </a:r>
+            <a:endParaRPr lang="en-US" sz="1600" dirty="0"/>
           </a:p>
         </p:txBody>
       </p:sp>
